--- a/artifacts/critical-quality-review/corrected/water-cycle-content-benchmark.pptx
+++ b/artifacts/critical-quality-review/corrected/water-cycle-content-benchmark.pptx
@@ -18,12 +18,9 @@
     <p:sldId id="266" r:id="rId12"/>
     <p:sldId id="267" r:id="rId13"/>
     <p:sldId id="268" r:id="rId14"/>
-    <p:sldId id="269" r:id="rId15"/>
-    <p:sldId id="270" r:id="rId16"/>
-    <p:sldId id="271" r:id="rId17"/>
   </p:sldIdLst>
   <p:notesMasterIdLst>
-    <p:notesMasterId r:id="rId18"/>
+    <p:notesMasterId r:id="rId15"/>
   </p:notesMasterIdLst>
   <p:sldSz cx="12192000" cy="6858000"/>
   <p:notesSz cx="6858000" cy="12192000"/>
@@ -606,8 +603,8 @@
           <a:p>
             <a:r>
               <a:rPr lang="en-US" dirty="0"/>
-              <a:t>Suggested timing: 8–10 minutes
-Teacher focus: Think-Pair-Share Activity — "The Water Cycle" Students review and consolidate their learning. 1. Think (2 min): Write down the 3 most important things you learned about "The Water Cycle" today. 2. Pair (2 min): Compare your key points with a partner — what did you both include? What was different? 3. Share (2 min): 2-3 pairs share their most important insight with the class. Teacher: Ask students to connect their insights back to today's learning objectives about "The Water Cycle".</a:t>
+              <a:t>Suggested timing: set expectations only
+Teacher focus: Research Task: "The Water Cycle" 1. Choose one aspect of "The Water Cycle" that interested you most from today's lesson. 2. Research it further using textbooks, reliable websites, or other sources. 3. Write a one-page summary of your findings in your own words. 4. Include one diagram, image, or real-world example that helps explain your chosen aspect. 5. Be ready to share your most interesting discovery at the start of the next lesson. Challenge: How does "The Water Cycle" connect to daily life or a career that interests you?</a:t>
             </a:r>
             <a:endParaRPr lang="en-US" dirty="0"/>
           </a:p>
@@ -695,8 +692,8 @@
           <a:p>
             <a:r>
               <a:rPr lang="en-US" dirty="0"/>
-              <a:t>This page continues the original slide. See the teacher notes on its first page.
-(Continuation slide — same section.)</a:t>
+              <a:t>Suggested timing: 3–4 minutes
+Teacher focus: Incomplete exit ticket for "The Water Cycle". Regenerate this lesson to create two or three assessment questions.</a:t>
             </a:r>
             <a:endParaRPr lang="en-US" dirty="0"/>
           </a:p>
@@ -784,8 +781,8 @@
           <a:p>
             <a:r>
               <a:rPr lang="en-US" dirty="0"/>
-              <a:t>Suggested timing: set expectations only
-Teacher focus: Research Task: "The Water Cycle" 1. Choose one aspect of "The Water Cycle" that interested you most from today's lesson. 2. Research it further using textbooks, reliable websites, or other sources. 3. Write a one-page summary of your findings in your own words. 4. Include one diagram, image, or real-world example that helps explain your chosen aspect. 5. Be ready to share your most interesting discovery at the start of the next lesson. Challenge: How does "The Water Cycle" connect to daily life or a career that interests you?</a:t>
+              <a:t>Suggested timing: 3–4 minutes
+Teacher focus: Incomplete success criteria for "The Water Cycle". Regenerate this lesson to create measurable criteria and self-evaluation prompts.</a:t>
             </a:r>
             <a:endParaRPr lang="en-US" dirty="0"/>
           </a:p>
@@ -873,8 +870,8 @@
           <a:p>
             <a:r>
               <a:rPr lang="en-US" dirty="0"/>
-              <a:t>This page continues the original slide. See the teacher notes on its first page.
-(Continuation slide — same section.)</a:t>
+              <a:t>Suggested timing: 1 minute
+Teacher focus: Close with a concise learning takeaway and one reflective next-step question.</a:t>
             </a:r>
             <a:endParaRPr lang="en-US" dirty="0"/>
           </a:p>
@@ -898,273 +895,6 @@
             <a:fld id="{F7021451-1387-4CA6-816F-3879F97B5CBC}" type="slidenum">
               <a:rPr lang="en-US"/>
               <a:t>13</a:t>
-            </a:fld>
-            <a:endParaRPr lang="en-US"/>
-          </a:p>
-        </p:txBody>
-      </p:sp>
-    </p:spTree>
-    <p:extLst>
-      <p:ext uri="{BB962C8B-B14F-4D97-AF65-F5344CB8AC3E}">
-        <p14:creationId xmlns:p14="http://schemas.microsoft.com/office/powerpoint/2010/main" val="1024086991"/>
-      </p:ext>
-    </p:extLst>
-  </p:cSld>
-  <p:clrMapOvr>
-    <a:masterClrMapping/>
-  </p:clrMapOvr>
-</p:notes>
-</file>
-
-<file path=ppt/notesSlides/notesSlide14.xml><?xml version="1.0" encoding="utf-8"?>
-<p:notes xmlns:a="http://schemas.openxmlformats.org/drawingml/2006/main" xmlns:r="http://schemas.openxmlformats.org/officeDocument/2006/relationships" xmlns:p="http://schemas.openxmlformats.org/presentationml/2006/main">
-  <p:cSld>
-    <p:spTree>
-      <p:nvGrpSpPr>
-        <p:cNvPr id="1" name=""/>
-        <p:cNvGrpSpPr/>
-        <p:nvPr/>
-      </p:nvGrpSpPr>
-      <p:grpSpPr>
-        <a:xfrm>
-          <a:off x="0" y="0"/>
-          <a:ext cx="0" cy="0"/>
-          <a:chOff x="0" y="0"/>
-          <a:chExt cx="0" cy="0"/>
-        </a:xfrm>
-      </p:grpSpPr>
-      <p:sp>
-        <p:nvSpPr>
-          <p:cNvPr id="2" name="Slide Image Placeholder 1"/>
-          <p:cNvSpPr>
-            <a:spLocks noGrp="1" noRot="1" noChangeAspect="1"/>
-          </p:cNvSpPr>
-          <p:nvPr>
-            <p:ph type="sldImg"/>
-          </p:nvPr>
-        </p:nvSpPr>
-        <p:spPr/>
-      </p:sp>
-      <p:sp>
-        <p:nvSpPr>
-          <p:cNvPr id="3" name="Notes Placeholder 2"/>
-          <p:cNvSpPr>
-            <a:spLocks noGrp="1"/>
-          </p:cNvSpPr>
-          <p:nvPr>
-            <p:ph type="body" idx="1"/>
-          </p:nvPr>
-        </p:nvSpPr>
-        <p:spPr/>
-        <p:txBody>
-          <a:bodyPr/>
-          <a:lstStyle/>
-          <a:p>
-            <a:r>
-              <a:rPr lang="en-US" dirty="0"/>
-              <a:t>Suggested timing: 3–4 minutes
-Teacher focus: Quick Check: "The Water Cycle" A short question to check your understanding before you leave today's lesson.</a:t>
-            </a:r>
-            <a:endParaRPr lang="en-US" dirty="0"/>
-          </a:p>
-        </p:txBody>
-      </p:sp>
-      <p:sp>
-        <p:nvSpPr>
-          <p:cNvPr id="4" name="Slide Number Placeholder 3"/>
-          <p:cNvSpPr>
-            <a:spLocks noGrp="1"/>
-          </p:cNvSpPr>
-          <p:nvPr>
-            <p:ph type="sldNum" sz="quarter" idx="10"/>
-          </p:nvPr>
-        </p:nvSpPr>
-        <p:spPr/>
-        <p:txBody>
-          <a:bodyPr/>
-          <a:lstStyle/>
-          <a:p>
-            <a:fld id="{F7021451-1387-4CA6-816F-3879F97B5CBC}" type="slidenum">
-              <a:rPr lang="en-US"/>
-              <a:t>14</a:t>
-            </a:fld>
-            <a:endParaRPr lang="en-US"/>
-          </a:p>
-        </p:txBody>
-      </p:sp>
-    </p:spTree>
-    <p:extLst>
-      <p:ext uri="{BB962C8B-B14F-4D97-AF65-F5344CB8AC3E}">
-        <p14:creationId xmlns:p14="http://schemas.microsoft.com/office/powerpoint/2010/main" val="1024086991"/>
-      </p:ext>
-    </p:extLst>
-  </p:cSld>
-  <p:clrMapOvr>
-    <a:masterClrMapping/>
-  </p:clrMapOvr>
-</p:notes>
-</file>
-
-<file path=ppt/notesSlides/notesSlide15.xml><?xml version="1.0" encoding="utf-8"?>
-<p:notes xmlns:a="http://schemas.openxmlformats.org/drawingml/2006/main" xmlns:r="http://schemas.openxmlformats.org/officeDocument/2006/relationships" xmlns:p="http://schemas.openxmlformats.org/presentationml/2006/main">
-  <p:cSld>
-    <p:spTree>
-      <p:nvGrpSpPr>
-        <p:cNvPr id="1" name=""/>
-        <p:cNvGrpSpPr/>
-        <p:nvPr/>
-      </p:nvGrpSpPr>
-      <p:grpSpPr>
-        <a:xfrm>
-          <a:off x="0" y="0"/>
-          <a:ext cx="0" cy="0"/>
-          <a:chOff x="0" y="0"/>
-          <a:chExt cx="0" cy="0"/>
-        </a:xfrm>
-      </p:grpSpPr>
-      <p:sp>
-        <p:nvSpPr>
-          <p:cNvPr id="2" name="Slide Image Placeholder 1"/>
-          <p:cNvSpPr>
-            <a:spLocks noGrp="1" noRot="1" noChangeAspect="1"/>
-          </p:cNvSpPr>
-          <p:nvPr>
-            <p:ph type="sldImg"/>
-          </p:nvPr>
-        </p:nvSpPr>
-        <p:spPr/>
-      </p:sp>
-      <p:sp>
-        <p:nvSpPr>
-          <p:cNvPr id="3" name="Notes Placeholder 2"/>
-          <p:cNvSpPr>
-            <a:spLocks noGrp="1"/>
-          </p:cNvSpPr>
-          <p:nvPr>
-            <p:ph type="body" idx="1"/>
-          </p:nvPr>
-        </p:nvSpPr>
-        <p:spPr/>
-        <p:txBody>
-          <a:bodyPr/>
-          <a:lstStyle/>
-          <a:p>
-            <a:r>
-              <a:rPr lang="en-US" dirty="0"/>
-              <a:t>Suggested timing: 3–4 minutes
-Teacher focus: Success Criteria Reflect on what you have learned about "The Water Cycle" today and rate your own confidence.</a:t>
-            </a:r>
-            <a:endParaRPr lang="en-US" dirty="0"/>
-          </a:p>
-        </p:txBody>
-      </p:sp>
-      <p:sp>
-        <p:nvSpPr>
-          <p:cNvPr id="4" name="Slide Number Placeholder 3"/>
-          <p:cNvSpPr>
-            <a:spLocks noGrp="1"/>
-          </p:cNvSpPr>
-          <p:nvPr>
-            <p:ph type="sldNum" sz="quarter" idx="10"/>
-          </p:nvPr>
-        </p:nvSpPr>
-        <p:spPr/>
-        <p:txBody>
-          <a:bodyPr/>
-          <a:lstStyle/>
-          <a:p>
-            <a:fld id="{F7021451-1387-4CA6-816F-3879F97B5CBC}" type="slidenum">
-              <a:rPr lang="en-US"/>
-              <a:t>15</a:t>
-            </a:fld>
-            <a:endParaRPr lang="en-US"/>
-          </a:p>
-        </p:txBody>
-      </p:sp>
-    </p:spTree>
-    <p:extLst>
-      <p:ext uri="{BB962C8B-B14F-4D97-AF65-F5344CB8AC3E}">
-        <p14:creationId xmlns:p14="http://schemas.microsoft.com/office/powerpoint/2010/main" val="1024086991"/>
-      </p:ext>
-    </p:extLst>
-  </p:cSld>
-  <p:clrMapOvr>
-    <a:masterClrMapping/>
-  </p:clrMapOvr>
-</p:notes>
-</file>
-
-<file path=ppt/notesSlides/notesSlide16.xml><?xml version="1.0" encoding="utf-8"?>
-<p:notes xmlns:a="http://schemas.openxmlformats.org/drawingml/2006/main" xmlns:r="http://schemas.openxmlformats.org/officeDocument/2006/relationships" xmlns:p="http://schemas.openxmlformats.org/presentationml/2006/main">
-  <p:cSld>
-    <p:spTree>
-      <p:nvGrpSpPr>
-        <p:cNvPr id="1" name=""/>
-        <p:cNvGrpSpPr/>
-        <p:nvPr/>
-      </p:nvGrpSpPr>
-      <p:grpSpPr>
-        <a:xfrm>
-          <a:off x="0" y="0"/>
-          <a:ext cx="0" cy="0"/>
-          <a:chOff x="0" y="0"/>
-          <a:chExt cx="0" cy="0"/>
-        </a:xfrm>
-      </p:grpSpPr>
-      <p:sp>
-        <p:nvSpPr>
-          <p:cNvPr id="2" name="Slide Image Placeholder 1"/>
-          <p:cNvSpPr>
-            <a:spLocks noGrp="1" noRot="1" noChangeAspect="1"/>
-          </p:cNvSpPr>
-          <p:nvPr>
-            <p:ph type="sldImg"/>
-          </p:nvPr>
-        </p:nvSpPr>
-        <p:spPr/>
-      </p:sp>
-      <p:sp>
-        <p:nvSpPr>
-          <p:cNvPr id="3" name="Notes Placeholder 2"/>
-          <p:cNvSpPr>
-            <a:spLocks noGrp="1"/>
-          </p:cNvSpPr>
-          <p:nvPr>
-            <p:ph type="body" idx="1"/>
-          </p:nvPr>
-        </p:nvSpPr>
-        <p:spPr/>
-        <p:txBody>
-          <a:bodyPr/>
-          <a:lstStyle/>
-          <a:p>
-            <a:r>
-              <a:rPr lang="en-US" dirty="0"/>
-              <a:t>Suggested timing: 1 minute
-Teacher focus: Close with a concise learning takeaway and one reflective next-step question.</a:t>
-            </a:r>
-            <a:endParaRPr lang="en-US" dirty="0"/>
-          </a:p>
-        </p:txBody>
-      </p:sp>
-      <p:sp>
-        <p:nvSpPr>
-          <p:cNvPr id="4" name="Slide Number Placeholder 3"/>
-          <p:cNvSpPr>
-            <a:spLocks noGrp="1"/>
-          </p:cNvSpPr>
-          <p:nvPr>
-            <p:ph type="sldNum" sz="quarter" idx="10"/>
-          </p:nvPr>
-        </p:nvSpPr>
-        <p:spPr/>
-        <p:txBody>
-          <a:bodyPr/>
-          <a:lstStyle/>
-          <a:p>
-            <a:fld id="{F7021451-1387-4CA6-816F-3879F97B5CBC}" type="slidenum">
-              <a:rPr lang="en-US"/>
-              <a:t>16</a:t>
             </a:fld>
             <a:endParaRPr lang="en-US"/>
           </a:p>
@@ -1230,7 +960,7 @@
             <a:r>
               <a:rPr lang="en-US" dirty="0"/>
               <a:t>Suggested timing: 5–10 minutes
-Teacher focus: Warm-Up: "The Water Cycle" Take a moment to think about what you already know. Share one idea, question, or guess about today's topic with a partner.</a:t>
+Teacher focus: Incomplete starter content for "The Water Cycle". Regenerate this lesson to create a topic-specific student question and activity.</a:t>
             </a:r>
             <a:endParaRPr lang="en-US" dirty="0"/>
           </a:p>
@@ -1319,7 +1049,7 @@
             <a:r>
               <a:rPr lang="en-US" dirty="0"/>
               <a:t>Suggested timing: 2 minutes
-Teacher focus: Chapter Overview Topic: "The Water Cycle" SDG Connection: this topic links to the UN Sustainable Development Goals.</a:t>
+Teacher focus: Incomplete SDG connection for "The Water Cycle". Regenerate this lesson to identify and explain a relevant Sustainable Development Goal.</a:t>
             </a:r>
             <a:endParaRPr lang="en-US" dirty="0"/>
           </a:p>
@@ -1497,7 +1227,7 @@
             <a:r>
               <a:rPr lang="en-US" dirty="0"/>
               <a:t>Suggested timing: 3 minutes
-Teacher focus: By the end of this lesson, students will be able to demonstrate a clear, measurable understanding of "The Water Cycle".</a:t>
+Teacher focus: Incomplete learning outcomes for "The Water Cycle". Regenerate this lesson to create measurable, objective-aligned outcomes.</a:t>
             </a:r>
             <a:endParaRPr lang="en-US" dirty="0"/>
           </a:p>
@@ -1586,7 +1316,7 @@
             <a:r>
               <a:rPr lang="en-US" dirty="0"/>
               <a:t>Suggested timing: 25–35 minutes
-Teacher focus: Core Teaching: "The Water Cycle" Key concepts, terms, and explanations for today's lesson, followed by guided practice activities to apply what students have learned.</a:t>
+Teacher focus: Incomplete core teaching for "The Water Cycle". Regenerate this lesson before presenting or downloading it.</a:t>
             </a:r>
             <a:endParaRPr lang="en-US" dirty="0"/>
           </a:p>
@@ -1763,8 +1493,8 @@
           <a:p>
             <a:r>
               <a:rPr lang="en-US" dirty="0"/>
-              <a:t>This page continues the original slide. See the teacher notes on its first page.
-(Continuation slide — same section.)</a:t>
+              <a:t>Suggested timing: 4–6 minutes
+Teacher focus: Slide 8 — one link only (cross-curricular). No UAE content.</a:t>
             </a:r>
             <a:endParaRPr lang="en-US" dirty="0"/>
           </a:p>
@@ -1852,8 +1582,8 @@
           <a:p>
             <a:r>
               <a:rPr lang="en-US" dirty="0"/>
-              <a:t>Suggested timing: 4–6 minutes
-Teacher focus: Slide 8 — one link only (cross-curricular). No UAE content.</a:t>
+              <a:t>Suggested timing: 8–10 minutes
+Teacher focus: Think-Pair-Share Activity — "The Water Cycle" Students review and consolidate their learning. 1. Think (2 min): Write down the 3 most important things you learned about "The Water Cycle" today. 2. Pair (2 min): Compare your key points with a partner — what did you both include? What was different? 3. Share (2 min): 2-3 pairs share their most important insight with the class. Teacher: Ask students to connect their insights back to today's learning objectives about "The Water Cycle".</a:t>
             </a:r>
             <a:endParaRPr lang="en-US" dirty="0"/>
           </a:p>
@@ -2477,7 +2207,7 @@
                 <a:ea typeface="Calibri" pitchFamily="34" charset="-122"/>
                 <a:cs typeface="Calibri" pitchFamily="34" charset="-120"/>
               </a:rPr>
-              <a:t>1 / 16</a:t>
+              <a:t>1 / 13</a:t>
             </a:r>
             <a:endParaRPr lang="en-US" sz="1200" dirty="0"/>
           </a:p>
@@ -2519,7 +2249,7 @@
         <p:spPr>
           <a:xfrm>
             <a:off x="274320" y="6510528"/>
-            <a:ext cx="727691" cy="73152"/>
+            <a:ext cx="895620" cy="73152"/>
           </a:xfrm>
           <a:prstGeom prst="roundRect">
             <a:avLst>
@@ -2605,7 +2335,7 @@
                 <a:ea typeface="Calibri" pitchFamily="34" charset="-122"/>
                 <a:cs typeface="Calibri" pitchFamily="34" charset="-120"/>
               </a:rPr>
-              <a:t>Plenary</a:t>
+              <a:t>Extended Task</a:t>
             </a:r>
             <a:endParaRPr lang="en-US" sz="3400" dirty="0"/>
           </a:p>
@@ -2778,7 +2508,7 @@
                 <a:ea typeface="Calibri" pitchFamily="34" charset="-122"/>
                 <a:cs typeface="Calibri" pitchFamily="34" charset="-120"/>
               </a:rPr>
-              <a:t>10 / 16</a:t>
+              <a:t>10 / 13</a:t>
             </a:r>
             <a:endParaRPr lang="en-US" sz="1200" dirty="0"/>
           </a:p>
@@ -2820,7 +2550,7 @@
         <p:spPr>
           <a:xfrm>
             <a:off x="274320" y="6510528"/>
-            <a:ext cx="7276910" cy="73152"/>
+            <a:ext cx="8956196" cy="73152"/>
           </a:xfrm>
           <a:prstGeom prst="roundRect">
             <a:avLst>
@@ -2840,78 +2570,14 @@
       </p:sp>
       <p:sp>
         <p:nvSpPr>
-          <p:cNvPr id="11" name="Shape 8"/>
-          <p:cNvSpPr/>
-          <p:nvPr/>
-        </p:nvSpPr>
-        <p:spPr>
-          <a:xfrm>
-            <a:off x="877824" y="1682496"/>
-            <a:ext cx="377190" cy="377190"/>
-          </a:xfrm>
-          <a:prstGeom prst="ellipse">
-            <a:avLst/>
-          </a:prstGeom>
-          <a:solidFill>
-            <a:srgbClr val="087866"/>
-          </a:solidFill>
-          <a:ln w="12700">
-            <a:solidFill>
-              <a:srgbClr val="087866"/>
-            </a:solidFill>
-            <a:prstDash val="solid"/>
-          </a:ln>
-        </p:spPr>
-      </p:sp>
-      <p:sp>
-        <p:nvSpPr>
-          <p:cNvPr id="12" name="Text 9"/>
-          <p:cNvSpPr/>
-          <p:nvPr/>
-        </p:nvSpPr>
-        <p:spPr>
-          <a:xfrm>
-            <a:off x="877824" y="1682496"/>
-            <a:ext cx="377190" cy="377190"/>
-          </a:xfrm>
-          <a:prstGeom prst="rect">
-            <a:avLst/>
-          </a:prstGeom>
-          <a:noFill/>
-          <a:ln/>
-        </p:spPr>
-        <p:txBody>
-          <a:bodyPr wrap="square" lIns="0" tIns="0" rIns="0" bIns="0" rtlCol="0" anchor="ctr"/>
-          <a:lstStyle/>
-          <a:p>
-            <a:pPr algn="ctr" indent="0" marL="0">
-              <a:buNone/>
-            </a:pPr>
-            <a:r>
-              <a:rPr lang="en-US" sz="1500" b="1" dirty="0">
-                <a:solidFill>
-                  <a:srgbClr val="FFFFFF"/>
-                </a:solidFill>
-                <a:latin typeface="Calibri" pitchFamily="34" charset="0"/>
-                <a:ea typeface="Calibri" pitchFamily="34" charset="-122"/>
-                <a:cs typeface="Calibri" pitchFamily="34" charset="-120"/>
-              </a:rPr>
-              <a:t>1</a:t>
-            </a:r>
-            <a:endParaRPr lang="en-US" sz="1500" dirty="0"/>
-          </a:p>
-        </p:txBody>
-      </p:sp>
-      <p:sp>
-        <p:nvSpPr>
-          <p:cNvPr id="13" name="Text 10"/>
-          <p:cNvSpPr/>
-          <p:nvPr/>
-        </p:nvSpPr>
-        <p:spPr>
-          <a:xfrm>
-            <a:off x="1401318" y="1664208"/>
-            <a:ext cx="9992106" cy="395478"/>
+          <p:cNvPr id="11" name="Text 8"/>
+          <p:cNvSpPr/>
+          <p:nvPr/>
+        </p:nvSpPr>
+        <p:spPr>
+          <a:xfrm>
+            <a:off x="749808" y="1335024"/>
+            <a:ext cx="10680192" cy="310896"/>
           </a:xfrm>
           <a:prstGeom prst="rect">
             <a:avLst/>
@@ -2930,7 +2596,7 @@
               <a:buNone/>
             </a:pPr>
             <a:r>
-              <a:rPr lang="en-US" sz="2200" dirty="0">
+              <a:rPr lang="en-US" sz="1500" dirty="0">
                 <a:solidFill>
                   <a:srgbClr val="111827"/>
                 </a:solidFill>
@@ -2938,94 +2604,7 @@
                 <a:ea typeface="Calibri" pitchFamily="34" charset="-122"/>
                 <a:cs typeface="Calibri" pitchFamily="34" charset="-120"/>
               </a:rPr>
-              <a:t>Water-particle challenge</a:t>
-            </a:r>
-            <a:endParaRPr lang="en-US" sz="2200" dirty="0"/>
-          </a:p>
-        </p:txBody>
-      </p:sp>
-      <p:sp>
-        <p:nvSpPr>
-          <p:cNvPr id="14" name="Shape 11"/>
-          <p:cNvSpPr/>
-          <p:nvPr/>
-        </p:nvSpPr>
-        <p:spPr>
-          <a:xfrm>
-            <a:off x="877824" y="2225675"/>
-            <a:ext cx="10515600" cy="0"/>
-          </a:xfrm>
-          <a:prstGeom prst="line">
-            <a:avLst/>
-          </a:prstGeom>
-          <a:noFill/>
-          <a:ln w="12700">
-            <a:solidFill>
-              <a:srgbClr val="CFF6ED"/>
-            </a:solidFill>
-            <a:prstDash val="solid"/>
-          </a:ln>
-        </p:spPr>
-      </p:sp>
-      <p:sp>
-        <p:nvSpPr>
-          <p:cNvPr id="15" name="Shape 12"/>
-          <p:cNvSpPr/>
-          <p:nvPr/>
-        </p:nvSpPr>
-        <p:spPr>
-          <a:xfrm>
-            <a:off x="877824" y="2409952"/>
-            <a:ext cx="377190" cy="377190"/>
-          </a:xfrm>
-          <a:prstGeom prst="ellipse">
-            <a:avLst/>
-          </a:prstGeom>
-          <a:solidFill>
-            <a:srgbClr val="087866"/>
-          </a:solidFill>
-          <a:ln w="12700">
-            <a:solidFill>
-              <a:srgbClr val="087866"/>
-            </a:solidFill>
-            <a:prstDash val="solid"/>
-          </a:ln>
-        </p:spPr>
-      </p:sp>
-      <p:sp>
-        <p:nvSpPr>
-          <p:cNvPr id="16" name="Text 13"/>
-          <p:cNvSpPr/>
-          <p:nvPr/>
-        </p:nvSpPr>
-        <p:spPr>
-          <a:xfrm>
-            <a:off x="877824" y="2409952"/>
-            <a:ext cx="377190" cy="377190"/>
-          </a:xfrm>
-          <a:prstGeom prst="rect">
-            <a:avLst/>
-          </a:prstGeom>
-          <a:noFill/>
-          <a:ln/>
-        </p:spPr>
-        <p:txBody>
-          <a:bodyPr wrap="square" lIns="0" tIns="0" rIns="0" bIns="0" rtlCol="0" anchor="ctr"/>
-          <a:lstStyle/>
-          <a:p>
-            <a:pPr algn="ctr" indent="0" marL="0">
-              <a:buNone/>
-            </a:pPr>
-            <a:r>
-              <a:rPr lang="en-US" sz="1500" b="1" dirty="0">
-                <a:solidFill>
-                  <a:srgbClr val="FFFFFF"/>
-                </a:solidFill>
-                <a:latin typeface="Calibri" pitchFamily="34" charset="0"/>
-                <a:ea typeface="Calibri" pitchFamily="34" charset="-122"/>
-                <a:cs typeface="Calibri" pitchFamily="34" charset="-120"/>
-              </a:rPr>
-              <a:t>2</a:t>
+              <a:t>Mini water-cycle investigation</a:t>
             </a:r>
             <a:endParaRPr lang="en-US" sz="1500" dirty="0"/>
           </a:p>
@@ -3033,14 +2612,14 @@
       </p:sp>
       <p:sp>
         <p:nvSpPr>
-          <p:cNvPr id="17" name="Text 14"/>
-          <p:cNvSpPr/>
-          <p:nvPr/>
-        </p:nvSpPr>
-        <p:spPr>
-          <a:xfrm>
-            <a:off x="1401318" y="2391664"/>
-            <a:ext cx="9992106" cy="395478"/>
+          <p:cNvPr id="12" name="Text 9"/>
+          <p:cNvSpPr/>
+          <p:nvPr/>
+        </p:nvSpPr>
+        <p:spPr>
+          <a:xfrm>
+            <a:off x="749808" y="1682496"/>
+            <a:ext cx="10680192" cy="310896"/>
           </a:xfrm>
           <a:prstGeom prst="rect">
             <a:avLst/>
@@ -3059,7 +2638,7 @@
               <a:buNone/>
             </a:pPr>
             <a:r>
-              <a:rPr lang="en-US" sz="2200" dirty="0">
+              <a:rPr lang="en-US" sz="1500" dirty="0">
                 <a:solidFill>
                   <a:srgbClr val="111827"/>
                 </a:solidFill>
@@ -3067,44 +2646,21 @@
                 <a:ea typeface="Calibri" pitchFamily="34" charset="-122"/>
                 <a:cs typeface="Calibri" pitchFamily="34" charset="-120"/>
               </a:rPr>
-              <a:t>1.</a:t>
-            </a:r>
-            <a:endParaRPr lang="en-US" sz="2200" dirty="0"/>
-          </a:p>
-        </p:txBody>
-      </p:sp>
-      <p:sp>
-        <p:nvSpPr>
-          <p:cNvPr id="18" name="Shape 15"/>
-          <p:cNvSpPr/>
-          <p:nvPr/>
-        </p:nvSpPr>
-        <p:spPr>
-          <a:xfrm>
-            <a:off x="877824" y="2953131"/>
-            <a:ext cx="10515600" cy="0"/>
-          </a:xfrm>
-          <a:prstGeom prst="line">
-            <a:avLst/>
-          </a:prstGeom>
-          <a:noFill/>
-          <a:ln w="12700">
-            <a:solidFill>
-              <a:srgbClr val="CFF6ED"/>
-            </a:solidFill>
-            <a:prstDash val="solid"/>
-          </a:ln>
-        </p:spPr>
-      </p:sp>
-      <p:sp>
-        <p:nvSpPr>
-          <p:cNvPr id="19" name="Shape 16"/>
-          <p:cNvSpPr/>
-          <p:nvPr/>
-        </p:nvSpPr>
-        <p:spPr>
-          <a:xfrm>
-            <a:off x="877824" y="3137408"/>
+              <a:t>Challenge: identify one limitation and improve the method.</a:t>
+            </a:r>
+            <a:endParaRPr lang="en-US" sz="1500" dirty="0"/>
+          </a:p>
+        </p:txBody>
+      </p:sp>
+      <p:sp>
+        <p:nvSpPr>
+          <p:cNvPr id="13" name="Shape 10"/>
+          <p:cNvSpPr/>
+          <p:nvPr/>
+        </p:nvSpPr>
+        <p:spPr>
+          <a:xfrm>
+            <a:off x="749808" y="2212848"/>
             <a:ext cx="377190" cy="377190"/>
           </a:xfrm>
           <a:prstGeom prst="ellipse">
@@ -3123,13 +2679,13 @@
       </p:sp>
       <p:sp>
         <p:nvSpPr>
-          <p:cNvPr id="20" name="Text 17"/>
-          <p:cNvSpPr/>
-          <p:nvPr/>
-        </p:nvSpPr>
-        <p:spPr>
-          <a:xfrm>
-            <a:off x="877824" y="3137408"/>
+          <p:cNvPr id="14" name="Text 11"/>
+          <p:cNvSpPr/>
+          <p:nvPr/>
+        </p:nvSpPr>
+        <p:spPr>
+          <a:xfrm>
+            <a:off x="749808" y="2212848"/>
             <a:ext cx="377190" cy="377190"/>
           </a:xfrm>
           <a:prstGeom prst="rect">
@@ -3154,7 +2710,7 @@
                 <a:ea typeface="Calibri" pitchFamily="34" charset="-122"/>
                 <a:cs typeface="Calibri" pitchFamily="34" charset="-120"/>
               </a:rPr>
-              <a:t>3</a:t>
+              <a:t>1</a:t>
             </a:r>
             <a:endParaRPr lang="en-US" sz="1500" dirty="0"/>
           </a:p>
@@ -3162,14 +2718,14 @@
       </p:sp>
       <p:sp>
         <p:nvSpPr>
-          <p:cNvPr id="21" name="Text 18"/>
-          <p:cNvSpPr/>
-          <p:nvPr/>
-        </p:nvSpPr>
-        <p:spPr>
-          <a:xfrm>
-            <a:off x="1401318" y="3119120"/>
-            <a:ext cx="9992106" cy="395478"/>
+          <p:cNvPr id="15" name="Text 12"/>
+          <p:cNvSpPr/>
+          <p:nvPr/>
+        </p:nvSpPr>
+        <p:spPr>
+          <a:xfrm>
+            <a:off x="1273302" y="2194560"/>
+            <a:ext cx="10174986" cy="715264"/>
           </a:xfrm>
           <a:prstGeom prst="rect">
             <a:avLst/>
@@ -3196,7 +2752,7 @@
                 <a:ea typeface="Calibri" pitchFamily="34" charset="-122"/>
                 <a:cs typeface="Calibri" pitchFamily="34" charset="-120"/>
               </a:rPr>
-              <a:t>Draw one particle’s route: ocean → atmosphere → cloud → river.</a:t>
+              <a:t>Cover warm water in a clear container with film; place ice above one side.</a:t>
             </a:r>
             <a:endParaRPr lang="en-US" sz="2200" dirty="0"/>
           </a:p>
@@ -3204,36 +2760,13 @@
       </p:sp>
       <p:sp>
         <p:nvSpPr>
-          <p:cNvPr id="22" name="Shape 19"/>
-          <p:cNvSpPr/>
-          <p:nvPr/>
-        </p:nvSpPr>
-        <p:spPr>
-          <a:xfrm>
-            <a:off x="877824" y="3680587"/>
-            <a:ext cx="10515600" cy="0"/>
-          </a:xfrm>
-          <a:prstGeom prst="line">
-            <a:avLst/>
-          </a:prstGeom>
-          <a:noFill/>
-          <a:ln w="12700">
-            <a:solidFill>
-              <a:srgbClr val="CFF6ED"/>
-            </a:solidFill>
-            <a:prstDash val="solid"/>
-          </a:ln>
-        </p:spPr>
-      </p:sp>
-      <p:sp>
-        <p:nvSpPr>
-          <p:cNvPr id="23" name="Shape 20"/>
-          <p:cNvSpPr/>
-          <p:nvPr/>
-        </p:nvSpPr>
-        <p:spPr>
-          <a:xfrm>
-            <a:off x="877824" y="3864864"/>
+          <p:cNvPr id="16" name="Shape 13"/>
+          <p:cNvSpPr/>
+          <p:nvPr/>
+        </p:nvSpPr>
+        <p:spPr>
+          <a:xfrm>
+            <a:off x="749808" y="3385312"/>
             <a:ext cx="377190" cy="377190"/>
           </a:xfrm>
           <a:prstGeom prst="ellipse">
@@ -3252,13 +2785,13 @@
       </p:sp>
       <p:sp>
         <p:nvSpPr>
-          <p:cNvPr id="24" name="Text 21"/>
-          <p:cNvSpPr/>
-          <p:nvPr/>
-        </p:nvSpPr>
-        <p:spPr>
-          <a:xfrm>
-            <a:off x="877824" y="3864864"/>
+          <p:cNvPr id="17" name="Text 14"/>
+          <p:cNvSpPr/>
+          <p:nvPr/>
+        </p:nvSpPr>
+        <p:spPr>
+          <a:xfrm>
+            <a:off x="749808" y="3385312"/>
             <a:ext cx="377190" cy="377190"/>
           </a:xfrm>
           <a:prstGeom prst="rect">
@@ -3283,7 +2816,7 @@
                 <a:ea typeface="Calibri" pitchFamily="34" charset="-122"/>
                 <a:cs typeface="Calibri" pitchFamily="34" charset="-120"/>
               </a:rPr>
-              <a:t>4</a:t>
+              <a:t>2</a:t>
             </a:r>
             <a:endParaRPr lang="en-US" sz="1500" dirty="0"/>
           </a:p>
@@ -3291,14 +2824,14 @@
       </p:sp>
       <p:sp>
         <p:nvSpPr>
-          <p:cNvPr id="25" name="Text 22"/>
-          <p:cNvSpPr/>
-          <p:nvPr/>
-        </p:nvSpPr>
-        <p:spPr>
-          <a:xfrm>
-            <a:off x="1401318" y="3846576"/>
-            <a:ext cx="9992106" cy="395478"/>
+          <p:cNvPr id="18" name="Text 15"/>
+          <p:cNvSpPr/>
+          <p:nvPr/>
+        </p:nvSpPr>
+        <p:spPr>
+          <a:xfrm>
+            <a:off x="1273302" y="3367024"/>
+            <a:ext cx="10174986" cy="395478"/>
           </a:xfrm>
           <a:prstGeom prst="rect">
             <a:avLst/>
@@ -3325,7 +2858,7 @@
                 <a:ea typeface="Calibri" pitchFamily="34" charset="-122"/>
                 <a:cs typeface="Calibri" pitchFamily="34" charset="-120"/>
               </a:rPr>
-              <a:t>2.</a:t>
+              <a:t>Predict where droplets will appear.</a:t>
             </a:r>
             <a:endParaRPr lang="en-US" sz="2200" dirty="0"/>
           </a:p>
@@ -3333,36 +2866,13 @@
       </p:sp>
       <p:sp>
         <p:nvSpPr>
-          <p:cNvPr id="26" name="Shape 23"/>
-          <p:cNvSpPr/>
-          <p:nvPr/>
-        </p:nvSpPr>
-        <p:spPr>
-          <a:xfrm>
-            <a:off x="877824" y="4408043"/>
-            <a:ext cx="10515600" cy="0"/>
-          </a:xfrm>
-          <a:prstGeom prst="line">
-            <a:avLst/>
-          </a:prstGeom>
-          <a:noFill/>
-          <a:ln w="12700">
-            <a:solidFill>
-              <a:srgbClr val="CFF6ED"/>
-            </a:solidFill>
-            <a:prstDash val="solid"/>
-          </a:ln>
-        </p:spPr>
-      </p:sp>
-      <p:sp>
-        <p:nvSpPr>
-          <p:cNvPr id="27" name="Shape 24"/>
-          <p:cNvSpPr/>
-          <p:nvPr/>
-        </p:nvSpPr>
-        <p:spPr>
-          <a:xfrm>
-            <a:off x="877824" y="4592320"/>
+          <p:cNvPr id="19" name="Shape 16"/>
+          <p:cNvSpPr/>
+          <p:nvPr/>
+        </p:nvSpPr>
+        <p:spPr>
+          <a:xfrm>
+            <a:off x="749808" y="4237990"/>
             <a:ext cx="377190" cy="377190"/>
           </a:xfrm>
           <a:prstGeom prst="ellipse">
@@ -3381,13 +2891,13 @@
       </p:sp>
       <p:sp>
         <p:nvSpPr>
-          <p:cNvPr id="28" name="Text 25"/>
-          <p:cNvSpPr/>
-          <p:nvPr/>
-        </p:nvSpPr>
-        <p:spPr>
-          <a:xfrm>
-            <a:off x="877824" y="4592320"/>
+          <p:cNvPr id="20" name="Text 17"/>
+          <p:cNvSpPr/>
+          <p:nvPr/>
+        </p:nvSpPr>
+        <p:spPr>
+          <a:xfrm>
+            <a:off x="749808" y="4237990"/>
             <a:ext cx="377190" cy="377190"/>
           </a:xfrm>
           <a:prstGeom prst="rect">
@@ -3412,7 +2922,7 @@
                 <a:ea typeface="Calibri" pitchFamily="34" charset="-122"/>
                 <a:cs typeface="Calibri" pitchFamily="34" charset="-120"/>
               </a:rPr>
-              <a:t>5</a:t>
+              <a:t>3</a:t>
             </a:r>
             <a:endParaRPr lang="en-US" sz="1500" dirty="0"/>
           </a:p>
@@ -3420,14 +2930,14 @@
       </p:sp>
       <p:sp>
         <p:nvSpPr>
-          <p:cNvPr id="29" name="Text 26"/>
-          <p:cNvSpPr/>
-          <p:nvPr/>
-        </p:nvSpPr>
-        <p:spPr>
-          <a:xfrm>
-            <a:off x="1401318" y="4574032"/>
-            <a:ext cx="9992106" cy="715264"/>
+          <p:cNvPr id="21" name="Text 18"/>
+          <p:cNvSpPr/>
+          <p:nvPr/>
+        </p:nvSpPr>
+        <p:spPr>
+          <a:xfrm>
+            <a:off x="1273302" y="4219702"/>
+            <a:ext cx="10174986" cy="395478"/>
           </a:xfrm>
           <a:prstGeom prst="rect">
             <a:avLst/>
@@ -3454,7 +2964,7 @@
                 <a:ea typeface="Calibri" pitchFamily="34" charset="-122"/>
                 <a:cs typeface="Calibri" pitchFamily="34" charset="-120"/>
               </a:rPr>
-              <a:t>Label each change and state whether the particle gains or loses energy.</a:t>
+              <a:t>Record observations every two minutes for ten minutes.</a:t>
             </a:r>
             <a:endParaRPr lang="en-US" sz="2200" dirty="0"/>
           </a:p>
@@ -3462,36 +2972,13 @@
       </p:sp>
       <p:sp>
         <p:nvSpPr>
-          <p:cNvPr id="30" name="Shape 27"/>
-          <p:cNvSpPr/>
-          <p:nvPr/>
-        </p:nvSpPr>
-        <p:spPr>
-          <a:xfrm>
-            <a:off x="877824" y="5455285"/>
-            <a:ext cx="10515600" cy="0"/>
-          </a:xfrm>
-          <a:prstGeom prst="line">
-            <a:avLst/>
-          </a:prstGeom>
-          <a:noFill/>
-          <a:ln w="12700">
-            <a:solidFill>
-              <a:srgbClr val="CFF6ED"/>
-            </a:solidFill>
-            <a:prstDash val="solid"/>
-          </a:ln>
-        </p:spPr>
-      </p:sp>
-      <p:sp>
-        <p:nvSpPr>
-          <p:cNvPr id="31" name="Shape 28"/>
-          <p:cNvSpPr/>
-          <p:nvPr/>
-        </p:nvSpPr>
-        <p:spPr>
-          <a:xfrm>
-            <a:off x="877824" y="5639562"/>
+          <p:cNvPr id="22" name="Shape 19"/>
+          <p:cNvSpPr/>
+          <p:nvPr/>
+        </p:nvSpPr>
+        <p:spPr>
+          <a:xfrm>
+            <a:off x="749808" y="5090668"/>
             <a:ext cx="377190" cy="377190"/>
           </a:xfrm>
           <a:prstGeom prst="ellipse">
@@ -3510,13 +2997,13 @@
       </p:sp>
       <p:sp>
         <p:nvSpPr>
-          <p:cNvPr id="32" name="Text 29"/>
-          <p:cNvSpPr/>
-          <p:nvPr/>
-        </p:nvSpPr>
-        <p:spPr>
-          <a:xfrm>
-            <a:off x="877824" y="5639562"/>
+          <p:cNvPr id="23" name="Text 20"/>
+          <p:cNvSpPr/>
+          <p:nvPr/>
+        </p:nvSpPr>
+        <p:spPr>
+          <a:xfrm>
+            <a:off x="749808" y="5090668"/>
             <a:ext cx="377190" cy="377190"/>
           </a:xfrm>
           <a:prstGeom prst="rect">
@@ -3541,7 +3028,7 @@
                 <a:ea typeface="Calibri" pitchFamily="34" charset="-122"/>
                 <a:cs typeface="Calibri" pitchFamily="34" charset="-120"/>
               </a:rPr>
-              <a:t>6</a:t>
+              <a:t>4</a:t>
             </a:r>
             <a:endParaRPr lang="en-US" sz="1500" dirty="0"/>
           </a:p>
@@ -3549,14 +3036,14 @@
       </p:sp>
       <p:sp>
         <p:nvSpPr>
-          <p:cNvPr id="33" name="Text 30"/>
-          <p:cNvSpPr/>
-          <p:nvPr/>
-        </p:nvSpPr>
-        <p:spPr>
-          <a:xfrm>
-            <a:off x="1401318" y="5621274"/>
-            <a:ext cx="9992106" cy="395478"/>
+          <p:cNvPr id="24" name="Text 21"/>
+          <p:cNvSpPr/>
+          <p:nvPr/>
+        </p:nvSpPr>
+        <p:spPr>
+          <a:xfrm>
+            <a:off x="1273302" y="5072380"/>
+            <a:ext cx="10174986" cy="715264"/>
           </a:xfrm>
           <a:prstGeom prst="rect">
             <a:avLst/>
@@ -3583,7 +3070,7 @@
                 <a:ea typeface="Calibri" pitchFamily="34" charset="-122"/>
                 <a:cs typeface="Calibri" pitchFamily="34" charset="-120"/>
               </a:rPr>
-              <a:t>3.</a:t>
+              <a:t>Submit a labelled diagram and 120-word particle explanation next lesson.</a:t>
             </a:r>
             <a:endParaRPr lang="en-US" sz="2200" dirty="0"/>
           </a:p>
@@ -3657,7 +3144,7 @@
                 <a:ea typeface="Calibri" pitchFamily="34" charset="-122"/>
                 <a:cs typeface="Calibri" pitchFamily="34" charset="-120"/>
               </a:rPr>
-              <a:t>Plenary — Continued</a:t>
+              <a:t>Exit Ticket</a:t>
             </a:r>
             <a:endParaRPr lang="en-US" sz="3400" dirty="0"/>
           </a:p>
@@ -3830,7 +3317,7 @@
                 <a:ea typeface="Calibri" pitchFamily="34" charset="-122"/>
                 <a:cs typeface="Calibri" pitchFamily="34" charset="-120"/>
               </a:rPr>
-              <a:t>11 / 16</a:t>
+              <a:t>11 / 13</a:t>
             </a:r>
             <a:endParaRPr lang="en-US" sz="1200" dirty="0"/>
           </a:p>
@@ -3872,7 +3359,7 @@
         <p:spPr>
           <a:xfrm>
             <a:off x="274320" y="6510528"/>
-            <a:ext cx="8004600" cy="73152"/>
+            <a:ext cx="9851816" cy="73152"/>
           </a:xfrm>
           <a:prstGeom prst="roundRect">
             <a:avLst>
@@ -3898,14 +3385,16 @@
         </p:nvSpPr>
         <p:spPr>
           <a:xfrm>
-            <a:off x="877824" y="1682496"/>
-            <a:ext cx="457200" cy="457200"/>
-          </a:xfrm>
-          <a:prstGeom prst="ellipse">
+            <a:off x="941832" y="2136915"/>
+            <a:ext cx="347701" cy="347701"/>
+          </a:xfrm>
+          <a:prstGeom prst="rect">
             <a:avLst/>
           </a:prstGeom>
           <a:solidFill>
-            <a:srgbClr val="087866"/>
+            <a:srgbClr val="FFFFFF">
+              <a:alpha val="0"/>
+            </a:srgbClr>
           </a:solidFill>
           <a:ln w="12700">
             <a:solidFill>
@@ -3923,47 +3412,8 @@
         </p:nvSpPr>
         <p:spPr>
           <a:xfrm>
-            <a:off x="877824" y="1682496"/>
-            <a:ext cx="457200" cy="457200"/>
-          </a:xfrm>
-          <a:prstGeom prst="rect">
-            <a:avLst/>
-          </a:prstGeom>
-          <a:noFill/>
-          <a:ln/>
-        </p:spPr>
-        <p:txBody>
-          <a:bodyPr wrap="square" lIns="0" tIns="0" rIns="0" bIns="0" rtlCol="0" anchor="ctr"/>
-          <a:lstStyle/>
-          <a:p>
-            <a:pPr algn="ctr" indent="0" marL="0">
-              <a:buNone/>
-            </a:pPr>
-            <a:r>
-              <a:rPr lang="en-US" sz="1900" b="1" dirty="0">
-                <a:solidFill>
-                  <a:srgbClr val="FFFFFF"/>
-                </a:solidFill>
-                <a:latin typeface="Calibri" pitchFamily="34" charset="0"/>
-                <a:ea typeface="Calibri" pitchFamily="34" charset="-122"/>
-                <a:cs typeface="Calibri" pitchFamily="34" charset="-120"/>
-              </a:rPr>
-              <a:t>1</a:t>
-            </a:r>
-            <a:endParaRPr lang="en-US" sz="1900" dirty="0"/>
-          </a:p>
-        </p:txBody>
-      </p:sp>
-      <p:sp>
-        <p:nvSpPr>
-          <p:cNvPr id="13" name="Text 10"/>
-          <p:cNvSpPr/>
-          <p:nvPr/>
-        </p:nvSpPr>
-        <p:spPr>
-          <a:xfrm>
-            <a:off x="1481328" y="1664208"/>
-            <a:ext cx="9912096" cy="910336"/>
+            <a:off x="1506474" y="2069592"/>
+            <a:ext cx="9923526" cy="845312"/>
           </a:xfrm>
           <a:prstGeom prst="rect">
             <a:avLst/>
@@ -3982,7 +3432,7 @@
               <a:buNone/>
             </a:pPr>
             <a:r>
-              <a:rPr lang="en-US" sz="2800" dirty="0">
+              <a:rPr lang="en-US" sz="2600" dirty="0">
                 <a:solidFill>
                   <a:srgbClr val="111827"/>
                 </a:solidFill>
@@ -3990,11 +3440,34 @@
                 <a:ea typeface="Calibri" pitchFamily="34" charset="-122"/>
                 <a:cs typeface="Calibri" pitchFamily="34" charset="-120"/>
               </a:rPr>
-              <a:t>Swap diagrams; check every arrow against the objective.</a:t>
-            </a:r>
-            <a:endParaRPr lang="en-US" sz="2800" dirty="0"/>
-          </a:p>
-        </p:txBody>
+              <a:t>What change of state turns liquid water into water vapour?</a:t>
+            </a:r>
+            <a:endParaRPr lang="en-US" sz="2600" dirty="0"/>
+          </a:p>
+        </p:txBody>
+      </p:sp>
+      <p:sp>
+        <p:nvSpPr>
+          <p:cNvPr id="13" name="Shape 10"/>
+          <p:cNvSpPr/>
+          <p:nvPr/>
+        </p:nvSpPr>
+        <p:spPr>
+          <a:xfrm>
+            <a:off x="914400" y="3166364"/>
+            <a:ext cx="10515600" cy="0"/>
+          </a:xfrm>
+          <a:prstGeom prst="line">
+            <a:avLst/>
+          </a:prstGeom>
+          <a:noFill/>
+          <a:ln w="12700">
+            <a:solidFill>
+              <a:srgbClr val="CFF6ED"/>
+            </a:solidFill>
+            <a:prstDash val="solid"/>
+          </a:ln>
+        </p:spPr>
       </p:sp>
       <p:sp>
         <p:nvSpPr>
@@ -4004,37 +3477,16 @@
         </p:nvSpPr>
         <p:spPr>
           <a:xfrm>
-            <a:off x="877824" y="2838027"/>
-            <a:ext cx="10515600" cy="0"/>
-          </a:xfrm>
-          <a:prstGeom prst="line">
-            <a:avLst/>
-          </a:prstGeom>
-          <a:noFill/>
-          <a:ln w="12700">
-            <a:solidFill>
-              <a:srgbClr val="CFF6ED"/>
-            </a:solidFill>
-            <a:prstDash val="solid"/>
-          </a:ln>
-        </p:spPr>
-      </p:sp>
-      <p:sp>
-        <p:nvSpPr>
-          <p:cNvPr id="15" name="Shape 12"/>
-          <p:cNvSpPr/>
-          <p:nvPr/>
-        </p:nvSpPr>
-        <p:spPr>
-          <a:xfrm>
-            <a:off x="877824" y="3119797"/>
-            <a:ext cx="457200" cy="457200"/>
-          </a:xfrm>
-          <a:prstGeom prst="ellipse">
+            <a:off x="941832" y="3485147"/>
+            <a:ext cx="347701" cy="347701"/>
+          </a:xfrm>
+          <a:prstGeom prst="rect">
             <a:avLst/>
           </a:prstGeom>
           <a:solidFill>
-            <a:srgbClr val="087866"/>
+            <a:srgbClr val="FFFFFF">
+              <a:alpha val="0"/>
+            </a:srgbClr>
           </a:solidFill>
           <a:ln w="12700">
             <a:solidFill>
@@ -4046,53 +3498,14 @@
       </p:sp>
       <p:sp>
         <p:nvSpPr>
-          <p:cNvPr id="16" name="Text 13"/>
-          <p:cNvSpPr/>
-          <p:nvPr/>
-        </p:nvSpPr>
-        <p:spPr>
-          <a:xfrm>
-            <a:off x="877824" y="3119797"/>
-            <a:ext cx="457200" cy="457200"/>
-          </a:xfrm>
-          <a:prstGeom prst="rect">
-            <a:avLst/>
-          </a:prstGeom>
-          <a:noFill/>
-          <a:ln/>
-        </p:spPr>
-        <p:txBody>
-          <a:bodyPr wrap="square" lIns="0" tIns="0" rIns="0" bIns="0" rtlCol="0" anchor="ctr"/>
-          <a:lstStyle/>
-          <a:p>
-            <a:pPr algn="ctr" indent="0" marL="0">
-              <a:buNone/>
-            </a:pPr>
-            <a:r>
-              <a:rPr lang="en-US" sz="1900" b="1" dirty="0">
-                <a:solidFill>
-                  <a:srgbClr val="FFFFFF"/>
-                </a:solidFill>
-                <a:latin typeface="Calibri" pitchFamily="34" charset="0"/>
-                <a:ea typeface="Calibri" pitchFamily="34" charset="-122"/>
-                <a:cs typeface="Calibri" pitchFamily="34" charset="-120"/>
-              </a:rPr>
-              <a:t>2</a:t>
-            </a:r>
-            <a:endParaRPr lang="en-US" sz="1900" dirty="0"/>
-          </a:p>
-        </p:txBody>
-      </p:sp>
-      <p:sp>
-        <p:nvSpPr>
-          <p:cNvPr id="17" name="Text 14"/>
-          <p:cNvSpPr/>
-          <p:nvPr/>
-        </p:nvSpPr>
-        <p:spPr>
-          <a:xfrm>
-            <a:off x="1481328" y="3101509"/>
-            <a:ext cx="9912096" cy="475488"/>
+          <p:cNvPr id="15" name="Text 12"/>
+          <p:cNvSpPr/>
+          <p:nvPr/>
+        </p:nvSpPr>
+        <p:spPr>
+          <a:xfrm>
+            <a:off x="1506474" y="3417824"/>
+            <a:ext cx="9923526" cy="845312"/>
           </a:xfrm>
           <a:prstGeom prst="rect">
             <a:avLst/>
@@ -4111,7 +3524,7 @@
               <a:buNone/>
             </a:pPr>
             <a:r>
-              <a:rPr lang="en-US" sz="2800" dirty="0">
+              <a:rPr lang="en-US" sz="2600" dirty="0">
                 <a:solidFill>
                   <a:srgbClr val="111827"/>
                 </a:solidFill>
@@ -4119,21 +3532,21 @@
                 <a:ea typeface="Calibri" pitchFamily="34" charset="-122"/>
                 <a:cs typeface="Calibri" pitchFamily="34" charset="-120"/>
               </a:rPr>
-              <a:t>4.</a:t>
-            </a:r>
-            <a:endParaRPr lang="en-US" sz="2800" dirty="0"/>
-          </a:p>
-        </p:txBody>
-      </p:sp>
-      <p:sp>
-        <p:nvSpPr>
-          <p:cNvPr id="18" name="Shape 15"/>
-          <p:cNvSpPr/>
-          <p:nvPr/>
-        </p:nvSpPr>
-        <p:spPr>
-          <a:xfrm>
-            <a:off x="877824" y="3840480"/>
+              <a:t>Explain why droplets form on the outside of a cold bottle using particle movement.</a:t>
+            </a:r>
+            <a:endParaRPr lang="en-US" sz="2600" dirty="0"/>
+          </a:p>
+        </p:txBody>
+      </p:sp>
+      <p:sp>
+        <p:nvSpPr>
+          <p:cNvPr id="16" name="Shape 13"/>
+          <p:cNvSpPr/>
+          <p:nvPr/>
+        </p:nvSpPr>
+        <p:spPr>
+          <a:xfrm>
+            <a:off x="914400" y="4514596"/>
             <a:ext cx="10515600" cy="0"/>
           </a:xfrm>
           <a:prstGeom prst="line">
@@ -4150,20 +3563,22 @@
       </p:sp>
       <p:sp>
         <p:nvSpPr>
-          <p:cNvPr id="19" name="Shape 16"/>
-          <p:cNvSpPr/>
-          <p:nvPr/>
-        </p:nvSpPr>
-        <p:spPr>
-          <a:xfrm>
-            <a:off x="877824" y="4122251"/>
-            <a:ext cx="457200" cy="457200"/>
-          </a:xfrm>
-          <a:prstGeom prst="ellipse">
+          <p:cNvPr id="17" name="Shape 14"/>
+          <p:cNvSpPr/>
+          <p:nvPr/>
+        </p:nvSpPr>
+        <p:spPr>
+          <a:xfrm>
+            <a:off x="941832" y="4833379"/>
+            <a:ext cx="347701" cy="347701"/>
+          </a:xfrm>
+          <a:prstGeom prst="rect">
             <a:avLst/>
           </a:prstGeom>
           <a:solidFill>
-            <a:srgbClr val="087866"/>
+            <a:srgbClr val="FFFFFF">
+              <a:alpha val="0"/>
+            </a:srgbClr>
           </a:solidFill>
           <a:ln w="12700">
             <a:solidFill>
@@ -4175,53 +3590,14 @@
       </p:sp>
       <p:sp>
         <p:nvSpPr>
-          <p:cNvPr id="20" name="Text 17"/>
-          <p:cNvSpPr/>
-          <p:nvPr/>
-        </p:nvSpPr>
-        <p:spPr>
-          <a:xfrm>
-            <a:off x="877824" y="4122251"/>
-            <a:ext cx="457200" cy="457200"/>
-          </a:xfrm>
-          <a:prstGeom prst="rect">
-            <a:avLst/>
-          </a:prstGeom>
-          <a:noFill/>
-          <a:ln/>
-        </p:spPr>
-        <p:txBody>
-          <a:bodyPr wrap="square" lIns="0" tIns="0" rIns="0" bIns="0" rtlCol="0" anchor="ctr"/>
-          <a:lstStyle/>
-          <a:p>
-            <a:pPr algn="ctr" indent="0" marL="0">
-              <a:buNone/>
-            </a:pPr>
-            <a:r>
-              <a:rPr lang="en-US" sz="1900" b="1" dirty="0">
-                <a:solidFill>
-                  <a:srgbClr val="FFFFFF"/>
-                </a:solidFill>
-                <a:latin typeface="Calibri" pitchFamily="34" charset="0"/>
-                <a:ea typeface="Calibri" pitchFamily="34" charset="-122"/>
-                <a:cs typeface="Calibri" pitchFamily="34" charset="-120"/>
-              </a:rPr>
-              <a:t>3</a:t>
-            </a:r>
-            <a:endParaRPr lang="en-US" sz="1900" dirty="0"/>
-          </a:p>
-        </p:txBody>
-      </p:sp>
-      <p:sp>
-        <p:nvSpPr>
-          <p:cNvPr id="21" name="Text 18"/>
-          <p:cNvSpPr/>
-          <p:nvPr/>
-        </p:nvSpPr>
-        <p:spPr>
-          <a:xfrm>
-            <a:off x="1481328" y="4103963"/>
-            <a:ext cx="9912096" cy="475488"/>
+          <p:cNvPr id="18" name="Text 15"/>
+          <p:cNvSpPr/>
+          <p:nvPr/>
+        </p:nvSpPr>
+        <p:spPr>
+          <a:xfrm>
+            <a:off x="1506474" y="4766056"/>
+            <a:ext cx="9923526" cy="845312"/>
           </a:xfrm>
           <a:prstGeom prst="rect">
             <a:avLst/>
@@ -4240,7 +3616,7 @@
               <a:buNone/>
             </a:pPr>
             <a:r>
-              <a:rPr lang="en-US" sz="2800" dirty="0">
+              <a:rPr lang="en-US" sz="2600" dirty="0">
                 <a:solidFill>
                   <a:srgbClr val="111827"/>
                 </a:solidFill>
@@ -4248,138 +3624,9 @@
                 <a:ea typeface="Calibri" pitchFamily="34" charset="-122"/>
                 <a:cs typeface="Calibri" pitchFamily="34" charset="-120"/>
               </a:rPr>
-              <a:t>Improve one explanation using particle movement.</a:t>
-            </a:r>
-            <a:endParaRPr lang="en-US" sz="2800" dirty="0"/>
-          </a:p>
-        </p:txBody>
-      </p:sp>
-      <p:sp>
-        <p:nvSpPr>
-          <p:cNvPr id="22" name="Shape 19"/>
-          <p:cNvSpPr/>
-          <p:nvPr/>
-        </p:nvSpPr>
-        <p:spPr>
-          <a:xfrm>
-            <a:off x="877824" y="4842933"/>
-            <a:ext cx="10515600" cy="0"/>
-          </a:xfrm>
-          <a:prstGeom prst="line">
-            <a:avLst/>
-          </a:prstGeom>
-          <a:noFill/>
-          <a:ln w="12700">
-            <a:solidFill>
-              <a:srgbClr val="CFF6ED"/>
-            </a:solidFill>
-            <a:prstDash val="solid"/>
-          </a:ln>
-        </p:spPr>
-      </p:sp>
-      <p:sp>
-        <p:nvSpPr>
-          <p:cNvPr id="23" name="Shape 20"/>
-          <p:cNvSpPr/>
-          <p:nvPr/>
-        </p:nvSpPr>
-        <p:spPr>
-          <a:xfrm>
-            <a:off x="877824" y="5124704"/>
-            <a:ext cx="457200" cy="457200"/>
-          </a:xfrm>
-          <a:prstGeom prst="ellipse">
-            <a:avLst/>
-          </a:prstGeom>
-          <a:solidFill>
-            <a:srgbClr val="087866"/>
-          </a:solidFill>
-          <a:ln w="12700">
-            <a:solidFill>
-              <a:srgbClr val="087866"/>
-            </a:solidFill>
-            <a:prstDash val="solid"/>
-          </a:ln>
-        </p:spPr>
-      </p:sp>
-      <p:sp>
-        <p:nvSpPr>
-          <p:cNvPr id="24" name="Text 21"/>
-          <p:cNvSpPr/>
-          <p:nvPr/>
-        </p:nvSpPr>
-        <p:spPr>
-          <a:xfrm>
-            <a:off x="877824" y="5124704"/>
-            <a:ext cx="457200" cy="457200"/>
-          </a:xfrm>
-          <a:prstGeom prst="rect">
-            <a:avLst/>
-          </a:prstGeom>
-          <a:noFill/>
-          <a:ln/>
-        </p:spPr>
-        <p:txBody>
-          <a:bodyPr wrap="square" lIns="0" tIns="0" rIns="0" bIns="0" rtlCol="0" anchor="ctr"/>
-          <a:lstStyle/>
-          <a:p>
-            <a:pPr algn="ctr" indent="0" marL="0">
-              <a:buNone/>
-            </a:pPr>
-            <a:r>
-              <a:rPr lang="en-US" sz="1900" b="1" dirty="0">
-                <a:solidFill>
-                  <a:srgbClr val="FFFFFF"/>
-                </a:solidFill>
-                <a:latin typeface="Calibri" pitchFamily="34" charset="0"/>
-                <a:ea typeface="Calibri" pitchFamily="34" charset="-122"/>
-                <a:cs typeface="Calibri" pitchFamily="34" charset="-120"/>
-              </a:rPr>
-              <a:t>4</a:t>
-            </a:r>
-            <a:endParaRPr lang="en-US" sz="1900" dirty="0"/>
-          </a:p>
-        </p:txBody>
-      </p:sp>
-      <p:sp>
-        <p:nvSpPr>
-          <p:cNvPr id="25" name="Text 22"/>
-          <p:cNvSpPr/>
-          <p:nvPr/>
-        </p:nvSpPr>
-        <p:spPr>
-          <a:xfrm>
-            <a:off x="1481328" y="5106416"/>
-            <a:ext cx="9912096" cy="910336"/>
-          </a:xfrm>
-          <a:prstGeom prst="rect">
-            <a:avLst/>
-          </a:prstGeom>
-          <a:noFill/>
-          <a:ln/>
-        </p:spPr>
-        <p:txBody>
-          <a:bodyPr wrap="square" lIns="0" tIns="0" rIns="0" bIns="0" rtlCol="0" anchor="t"/>
-          <a:lstStyle/>
-          <a:p>
-            <a:pPr algn="l" indent="0" marL="0">
-              <a:lnSpc>
-                <a:spcPct val="116000"/>
-              </a:lnSpc>
-              <a:buNone/>
-            </a:pPr>
-            <a:r>
-              <a:rPr lang="en-US" sz="2800" dirty="0">
-                <a:solidFill>
-                  <a:srgbClr val="111827"/>
-                </a:solidFill>
-                <a:latin typeface="Calibri" pitchFamily="34" charset="0"/>
-                <a:ea typeface="Calibri" pitchFamily="34" charset="-122"/>
-                <a:cs typeface="Calibri" pitchFamily="34" charset="-120"/>
-              </a:rPr>
-              <a:t>Final check: why is this a cycle rather than a one-way path?</a:t>
-            </a:r>
-            <a:endParaRPr lang="en-US" sz="2800" dirty="0"/>
+              <a:t>Predict one effect of stronger solar heating on the water cycle and justify your answer.</a:t>
+            </a:r>
+            <a:endParaRPr lang="en-US" sz="2600" dirty="0"/>
           </a:p>
         </p:txBody>
       </p:sp>
@@ -4451,7 +3698,7 @@
                 <a:ea typeface="Calibri" pitchFamily="34" charset="-122"/>
                 <a:cs typeface="Calibri" pitchFamily="34" charset="-120"/>
               </a:rPr>
-              <a:t>Extended Task</a:t>
+              <a:t>Success Criteria and Self Evaluation</a:t>
             </a:r>
             <a:endParaRPr lang="en-US" sz="3400" dirty="0"/>
           </a:p>
@@ -4624,7 +3871,7 @@
                 <a:ea typeface="Calibri" pitchFamily="34" charset="-122"/>
                 <a:cs typeface="Calibri" pitchFamily="34" charset="-120"/>
               </a:rPr>
-              <a:t>12 / 16</a:t>
+              <a:t>12 / 13</a:t>
             </a:r>
             <a:endParaRPr lang="en-US" sz="1200" dirty="0"/>
           </a:p>
@@ -4666,7 +3913,7 @@
         <p:spPr>
           <a:xfrm>
             <a:off x="274320" y="6510528"/>
-            <a:ext cx="8732291" cy="73152"/>
+            <a:ext cx="10747436" cy="73152"/>
           </a:xfrm>
           <a:prstGeom prst="roundRect">
             <a:avLst>
@@ -4692,14 +3939,16 @@
         </p:nvSpPr>
         <p:spPr>
           <a:xfrm>
-            <a:off x="749808" y="1591056"/>
-            <a:ext cx="308610" cy="308610"/>
-          </a:xfrm>
-          <a:prstGeom prst="ellipse">
+            <a:off x="941832" y="1723987"/>
+            <a:ext cx="294208" cy="294208"/>
+          </a:xfrm>
+          <a:prstGeom prst="rect">
             <a:avLst/>
           </a:prstGeom>
           <a:solidFill>
-            <a:srgbClr val="087866"/>
+            <a:srgbClr val="FFFFFF">
+              <a:alpha val="0"/>
+            </a:srgbClr>
           </a:solidFill>
           <a:ln w="12700">
             <a:solidFill>
@@ -4717,47 +3966,8 @@
         </p:nvSpPr>
         <p:spPr>
           <a:xfrm>
-            <a:off x="749808" y="1591056"/>
-            <a:ext cx="308610" cy="308610"/>
-          </a:xfrm>
-          <a:prstGeom prst="rect">
-            <a:avLst/>
-          </a:prstGeom>
-          <a:noFill/>
-          <a:ln/>
-        </p:spPr>
-        <p:txBody>
-          <a:bodyPr wrap="square" lIns="0" tIns="0" rIns="0" bIns="0" rtlCol="0" anchor="ctr"/>
-          <a:lstStyle/>
-          <a:p>
-            <a:pPr algn="ctr" indent="0" marL="0">
-              <a:buNone/>
-            </a:pPr>
-            <a:r>
-              <a:rPr lang="en-US" sz="1300" b="1" dirty="0">
-                <a:solidFill>
-                  <a:srgbClr val="FFFFFF"/>
-                </a:solidFill>
-                <a:latin typeface="Calibri" pitchFamily="34" charset="0"/>
-                <a:ea typeface="Calibri" pitchFamily="34" charset="-122"/>
-                <a:cs typeface="Calibri" pitchFamily="34" charset="-120"/>
-              </a:rPr>
-              <a:t>1</a:t>
-            </a:r>
-            <a:endParaRPr lang="en-US" sz="1300" dirty="0"/>
-          </a:p>
-        </p:txBody>
-      </p:sp>
-      <p:sp>
-        <p:nvSpPr>
-          <p:cNvPr id="13" name="Text 10"/>
-          <p:cNvSpPr/>
-          <p:nvPr/>
-        </p:nvSpPr>
-        <p:spPr>
-          <a:xfrm>
-            <a:off x="1204722" y="1572768"/>
-            <a:ext cx="10243566" cy="326898"/>
+            <a:off x="1437894" y="1664208"/>
+            <a:ext cx="9992106" cy="715264"/>
           </a:xfrm>
           <a:prstGeom prst="rect">
             <a:avLst/>
@@ -4776,7 +3986,7 @@
               <a:buNone/>
             </a:pPr>
             <a:r>
-              <a:rPr lang="en-US" sz="1800" dirty="0">
+              <a:rPr lang="en-US" sz="2200" dirty="0">
                 <a:solidFill>
                   <a:srgbClr val="111827"/>
                 </a:solidFill>
@@ -4784,11 +3994,34 @@
                 <a:ea typeface="Calibri" pitchFamily="34" charset="-122"/>
                 <a:cs typeface="Calibri" pitchFamily="34" charset="-120"/>
               </a:rPr>
-              <a:t>Mini water-cycle investigation</a:t>
-            </a:r>
-            <a:endParaRPr lang="en-US" sz="1800" dirty="0"/>
-          </a:p>
-        </p:txBody>
+              <a:t>I can label evaporation, condensation, precipitation and collection on an unfamiliar diagram.</a:t>
+            </a:r>
+            <a:endParaRPr lang="en-US" sz="2200" dirty="0"/>
+          </a:p>
+        </p:txBody>
+      </p:sp>
+      <p:sp>
+        <p:nvSpPr>
+          <p:cNvPr id="13" name="Shape 10"/>
+          <p:cNvSpPr/>
+          <p:nvPr/>
+        </p:nvSpPr>
+        <p:spPr>
+          <a:xfrm>
+            <a:off x="914400" y="2516473"/>
+            <a:ext cx="10515600" cy="0"/>
+          </a:xfrm>
+          <a:prstGeom prst="line">
+            <a:avLst/>
+          </a:prstGeom>
+          <a:noFill/>
+          <a:ln w="12700">
+            <a:solidFill>
+              <a:srgbClr val="CFF6ED"/>
+            </a:solidFill>
+            <a:prstDash val="solid"/>
+          </a:ln>
+        </p:spPr>
       </p:sp>
       <p:sp>
         <p:nvSpPr>
@@ -4798,14 +4031,16 @@
         </p:nvSpPr>
         <p:spPr>
           <a:xfrm>
-            <a:off x="749808" y="2105692"/>
-            <a:ext cx="308610" cy="308610"/>
-          </a:xfrm>
-          <a:prstGeom prst="ellipse">
+            <a:off x="941832" y="2713253"/>
+            <a:ext cx="294208" cy="294208"/>
+          </a:xfrm>
+          <a:prstGeom prst="rect">
             <a:avLst/>
           </a:prstGeom>
           <a:solidFill>
-            <a:srgbClr val="087866"/>
+            <a:srgbClr val="FFFFFF">
+              <a:alpha val="0"/>
+            </a:srgbClr>
           </a:solidFill>
           <a:ln w="12700">
             <a:solidFill>
@@ -4823,47 +4058,8 @@
         </p:nvSpPr>
         <p:spPr>
           <a:xfrm>
-            <a:off x="749808" y="2105692"/>
-            <a:ext cx="308610" cy="308610"/>
-          </a:xfrm>
-          <a:prstGeom prst="rect">
-            <a:avLst/>
-          </a:prstGeom>
-          <a:noFill/>
-          <a:ln/>
-        </p:spPr>
-        <p:txBody>
-          <a:bodyPr wrap="square" lIns="0" tIns="0" rIns="0" bIns="0" rtlCol="0" anchor="ctr"/>
-          <a:lstStyle/>
-          <a:p>
-            <a:pPr algn="ctr" indent="0" marL="0">
-              <a:buNone/>
-            </a:pPr>
-            <a:r>
-              <a:rPr lang="en-US" sz="1300" b="1" dirty="0">
-                <a:solidFill>
-                  <a:srgbClr val="FFFFFF"/>
-                </a:solidFill>
-                <a:latin typeface="Calibri" pitchFamily="34" charset="0"/>
-                <a:ea typeface="Calibri" pitchFamily="34" charset="-122"/>
-                <a:cs typeface="Calibri" pitchFamily="34" charset="-120"/>
-              </a:rPr>
-              <a:t>2</a:t>
-            </a:r>
-            <a:endParaRPr lang="en-US" sz="1300" dirty="0"/>
-          </a:p>
-        </p:txBody>
-      </p:sp>
-      <p:sp>
-        <p:nvSpPr>
-          <p:cNvPr id="16" name="Text 13"/>
-          <p:cNvSpPr/>
-          <p:nvPr/>
-        </p:nvSpPr>
-        <p:spPr>
-          <a:xfrm>
-            <a:off x="1204722" y="2087404"/>
-            <a:ext cx="10243566" cy="326898"/>
+            <a:off x="1437894" y="2653475"/>
+            <a:ext cx="9992106" cy="715264"/>
           </a:xfrm>
           <a:prstGeom prst="rect">
             <a:avLst/>
@@ -4882,7 +4078,7 @@
               <a:buNone/>
             </a:pPr>
             <a:r>
-              <a:rPr lang="en-US" sz="1800" dirty="0">
+              <a:rPr lang="en-US" sz="2200" dirty="0">
                 <a:solidFill>
                   <a:srgbClr val="111827"/>
                 </a:solidFill>
@@ -4890,11 +4086,34 @@
                 <a:ea typeface="Calibri" pitchFamily="34" charset="-122"/>
                 <a:cs typeface="Calibri" pitchFamily="34" charset="-120"/>
               </a:rPr>
-              <a:t>1.</a:t>
-            </a:r>
-            <a:endParaRPr lang="en-US" sz="1800" dirty="0"/>
-          </a:p>
-        </p:txBody>
+              <a:t>I can explain evaporation and condensation using energy and particles.</a:t>
+            </a:r>
+            <a:endParaRPr lang="en-US" sz="2200" dirty="0"/>
+          </a:p>
+        </p:txBody>
+      </p:sp>
+      <p:sp>
+        <p:nvSpPr>
+          <p:cNvPr id="16" name="Shape 13"/>
+          <p:cNvSpPr/>
+          <p:nvPr/>
+        </p:nvSpPr>
+        <p:spPr>
+          <a:xfrm>
+            <a:off x="914400" y="3505740"/>
+            <a:ext cx="10515600" cy="0"/>
+          </a:xfrm>
+          <a:prstGeom prst="line">
+            <a:avLst/>
+          </a:prstGeom>
+          <a:noFill/>
+          <a:ln w="12700">
+            <a:solidFill>
+              <a:srgbClr val="CFF6ED"/>
+            </a:solidFill>
+            <a:prstDash val="solid"/>
+          </a:ln>
+        </p:spPr>
       </p:sp>
       <p:sp>
         <p:nvSpPr>
@@ -4904,14 +4123,16 @@
         </p:nvSpPr>
         <p:spPr>
           <a:xfrm>
-            <a:off x="749808" y="2620328"/>
-            <a:ext cx="308610" cy="308610"/>
-          </a:xfrm>
-          <a:prstGeom prst="ellipse">
+            <a:off x="941832" y="3702520"/>
+            <a:ext cx="294208" cy="294208"/>
+          </a:xfrm>
+          <a:prstGeom prst="rect">
             <a:avLst/>
           </a:prstGeom>
           <a:solidFill>
-            <a:srgbClr val="087866"/>
+            <a:srgbClr val="FFFFFF">
+              <a:alpha val="0"/>
+            </a:srgbClr>
           </a:solidFill>
           <a:ln w="12700">
             <a:solidFill>
@@ -4929,47 +4150,8 @@
         </p:nvSpPr>
         <p:spPr>
           <a:xfrm>
-            <a:off x="749808" y="2620328"/>
-            <a:ext cx="308610" cy="308610"/>
-          </a:xfrm>
-          <a:prstGeom prst="rect">
-            <a:avLst/>
-          </a:prstGeom>
-          <a:noFill/>
-          <a:ln/>
-        </p:spPr>
-        <p:txBody>
-          <a:bodyPr wrap="square" lIns="0" tIns="0" rIns="0" bIns="0" rtlCol="0" anchor="ctr"/>
-          <a:lstStyle/>
-          <a:p>
-            <a:pPr algn="ctr" indent="0" marL="0">
-              <a:buNone/>
-            </a:pPr>
-            <a:r>
-              <a:rPr lang="en-US" sz="1300" b="1" dirty="0">
-                <a:solidFill>
-                  <a:srgbClr val="FFFFFF"/>
-                </a:solidFill>
-                <a:latin typeface="Calibri" pitchFamily="34" charset="0"/>
-                <a:ea typeface="Calibri" pitchFamily="34" charset="-122"/>
-                <a:cs typeface="Calibri" pitchFamily="34" charset="-120"/>
-              </a:rPr>
-              <a:t>3</a:t>
-            </a:r>
-            <a:endParaRPr lang="en-US" sz="1300" dirty="0"/>
-          </a:p>
-        </p:txBody>
-      </p:sp>
-      <p:sp>
-        <p:nvSpPr>
-          <p:cNvPr id="19" name="Text 16"/>
-          <p:cNvSpPr/>
-          <p:nvPr/>
-        </p:nvSpPr>
-        <p:spPr>
-          <a:xfrm>
-            <a:off x="1204722" y="2602040"/>
-            <a:ext cx="10243566" cy="326898"/>
+            <a:off x="1437894" y="3642741"/>
+            <a:ext cx="9992106" cy="715264"/>
           </a:xfrm>
           <a:prstGeom prst="rect">
             <a:avLst/>
@@ -4988,7 +4170,7 @@
               <a:buNone/>
             </a:pPr>
             <a:r>
-              <a:rPr lang="en-US" sz="1800" dirty="0">
+              <a:rPr lang="en-US" sz="2200" dirty="0">
                 <a:solidFill>
                   <a:srgbClr val="111827"/>
                 </a:solidFill>
@@ -4996,11 +4178,34 @@
                 <a:ea typeface="Calibri" pitchFamily="34" charset="-122"/>
                 <a:cs typeface="Calibri" pitchFamily="34" charset="-120"/>
               </a:rPr>
-              <a:t>Cover warm water in a clear container with film; place ice above one side.</a:t>
-            </a:r>
-            <a:endParaRPr lang="en-US" sz="1800" dirty="0"/>
-          </a:p>
-        </p:txBody>
+              <a:t>I can trace water through four stages without creating or losing water.</a:t>
+            </a:r>
+            <a:endParaRPr lang="en-US" sz="2200" dirty="0"/>
+          </a:p>
+        </p:txBody>
+      </p:sp>
+      <p:sp>
+        <p:nvSpPr>
+          <p:cNvPr id="19" name="Shape 16"/>
+          <p:cNvSpPr/>
+          <p:nvPr/>
+        </p:nvSpPr>
+        <p:spPr>
+          <a:xfrm>
+            <a:off x="914400" y="4495006"/>
+            <a:ext cx="10515600" cy="0"/>
+          </a:xfrm>
+          <a:prstGeom prst="line">
+            <a:avLst/>
+          </a:prstGeom>
+          <a:noFill/>
+          <a:ln w="12700">
+            <a:solidFill>
+              <a:srgbClr val="CFF6ED"/>
+            </a:solidFill>
+            <a:prstDash val="solid"/>
+          </a:ln>
+        </p:spPr>
       </p:sp>
       <p:sp>
         <p:nvSpPr>
@@ -5010,14 +4215,16 @@
         </p:nvSpPr>
         <p:spPr>
           <a:xfrm>
-            <a:off x="749808" y="3134963"/>
-            <a:ext cx="308610" cy="308610"/>
-          </a:xfrm>
-          <a:prstGeom prst="ellipse">
+            <a:off x="941832" y="4691786"/>
+            <a:ext cx="294208" cy="294208"/>
+          </a:xfrm>
+          <a:prstGeom prst="rect">
             <a:avLst/>
           </a:prstGeom>
           <a:solidFill>
-            <a:srgbClr val="087866"/>
+            <a:srgbClr val="FFFFFF">
+              <a:alpha val="0"/>
+            </a:srgbClr>
           </a:solidFill>
           <a:ln w="12700">
             <a:solidFill>
@@ -5035,47 +4242,8 @@
         </p:nvSpPr>
         <p:spPr>
           <a:xfrm>
-            <a:off x="749808" y="3134963"/>
-            <a:ext cx="308610" cy="308610"/>
-          </a:xfrm>
-          <a:prstGeom prst="rect">
-            <a:avLst/>
-          </a:prstGeom>
-          <a:noFill/>
-          <a:ln/>
-        </p:spPr>
-        <p:txBody>
-          <a:bodyPr wrap="square" lIns="0" tIns="0" rIns="0" bIns="0" rtlCol="0" anchor="ctr"/>
-          <a:lstStyle/>
-          <a:p>
-            <a:pPr algn="ctr" indent="0" marL="0">
-              <a:buNone/>
-            </a:pPr>
-            <a:r>
-              <a:rPr lang="en-US" sz="1300" b="1" dirty="0">
-                <a:solidFill>
-                  <a:srgbClr val="FFFFFF"/>
-                </a:solidFill>
-                <a:latin typeface="Calibri" pitchFamily="34" charset="0"/>
-                <a:ea typeface="Calibri" pitchFamily="34" charset="-122"/>
-                <a:cs typeface="Calibri" pitchFamily="34" charset="-120"/>
-              </a:rPr>
-              <a:t>4</a:t>
-            </a:r>
-            <a:endParaRPr lang="en-US" sz="1300" dirty="0"/>
-          </a:p>
-        </p:txBody>
-      </p:sp>
-      <p:sp>
-        <p:nvSpPr>
-          <p:cNvPr id="22" name="Text 19"/>
-          <p:cNvSpPr/>
-          <p:nvPr/>
-        </p:nvSpPr>
-        <p:spPr>
-          <a:xfrm>
-            <a:off x="1204722" y="3116675"/>
-            <a:ext cx="10243566" cy="326898"/>
+            <a:off x="1437894" y="4632008"/>
+            <a:ext cx="9992106" cy="395478"/>
           </a:xfrm>
           <a:prstGeom prst="rect">
             <a:avLst/>
@@ -5094,7 +4262,7 @@
               <a:buNone/>
             </a:pPr>
             <a:r>
-              <a:rPr lang="en-US" sz="1800" dirty="0">
+              <a:rPr lang="en-US" sz="2200" dirty="0">
                 <a:solidFill>
                   <a:srgbClr val="111827"/>
                 </a:solidFill>
@@ -5102,11 +4270,34 @@
                 <a:ea typeface="Calibri" pitchFamily="34" charset="-122"/>
                 <a:cs typeface="Calibri" pitchFamily="34" charset="-120"/>
               </a:rPr>
-              <a:t>2.</a:t>
-            </a:r>
-            <a:endParaRPr lang="en-US" sz="1800" dirty="0"/>
-          </a:p>
-        </p:txBody>
+              <a:t>I can use evidence to predict how temperature affects evaporation.</a:t>
+            </a:r>
+            <a:endParaRPr lang="en-US" sz="2200" dirty="0"/>
+          </a:p>
+        </p:txBody>
+      </p:sp>
+      <p:sp>
+        <p:nvSpPr>
+          <p:cNvPr id="22" name="Shape 19"/>
+          <p:cNvSpPr/>
+          <p:nvPr/>
+        </p:nvSpPr>
+        <p:spPr>
+          <a:xfrm>
+            <a:off x="914400" y="5164487"/>
+            <a:ext cx="10515600" cy="0"/>
+          </a:xfrm>
+          <a:prstGeom prst="line">
+            <a:avLst/>
+          </a:prstGeom>
+          <a:noFill/>
+          <a:ln w="12700">
+            <a:solidFill>
+              <a:srgbClr val="CFF6ED"/>
+            </a:solidFill>
+            <a:prstDash val="solid"/>
+          </a:ln>
+        </p:spPr>
       </p:sp>
       <p:sp>
         <p:nvSpPr>
@@ -5116,14 +4307,16 @@
         </p:nvSpPr>
         <p:spPr>
           <a:xfrm>
-            <a:off x="749808" y="3649599"/>
-            <a:ext cx="308610" cy="308610"/>
-          </a:xfrm>
-          <a:prstGeom prst="ellipse">
+            <a:off x="941832" y="5361267"/>
+            <a:ext cx="294208" cy="294208"/>
+          </a:xfrm>
+          <a:prstGeom prst="rect">
             <a:avLst/>
           </a:prstGeom>
           <a:solidFill>
-            <a:srgbClr val="087866"/>
+            <a:srgbClr val="FFFFFF">
+              <a:alpha val="0"/>
+            </a:srgbClr>
           </a:solidFill>
           <a:ln w="12700">
             <a:solidFill>
@@ -5141,47 +4334,8 @@
         </p:nvSpPr>
         <p:spPr>
           <a:xfrm>
-            <a:off x="749808" y="3649599"/>
-            <a:ext cx="308610" cy="308610"/>
-          </a:xfrm>
-          <a:prstGeom prst="rect">
-            <a:avLst/>
-          </a:prstGeom>
-          <a:noFill/>
-          <a:ln/>
-        </p:spPr>
-        <p:txBody>
-          <a:bodyPr wrap="square" lIns="0" tIns="0" rIns="0" bIns="0" rtlCol="0" anchor="ctr"/>
-          <a:lstStyle/>
-          <a:p>
-            <a:pPr algn="ctr" indent="0" marL="0">
-              <a:buNone/>
-            </a:pPr>
-            <a:r>
-              <a:rPr lang="en-US" sz="1300" b="1" dirty="0">
-                <a:solidFill>
-                  <a:srgbClr val="FFFFFF"/>
-                </a:solidFill>
-                <a:latin typeface="Calibri" pitchFamily="34" charset="0"/>
-                <a:ea typeface="Calibri" pitchFamily="34" charset="-122"/>
-                <a:cs typeface="Calibri" pitchFamily="34" charset="-120"/>
-              </a:rPr>
-              <a:t>5</a:t>
-            </a:r>
-            <a:endParaRPr lang="en-US" sz="1300" dirty="0"/>
-          </a:p>
-        </p:txBody>
-      </p:sp>
-      <p:sp>
-        <p:nvSpPr>
-          <p:cNvPr id="25" name="Text 22"/>
-          <p:cNvSpPr/>
-          <p:nvPr/>
-        </p:nvSpPr>
-        <p:spPr>
-          <a:xfrm>
-            <a:off x="1204722" y="3631311"/>
-            <a:ext cx="10243566" cy="326898"/>
+            <a:off x="1437894" y="5301488"/>
+            <a:ext cx="9992106" cy="715264"/>
           </a:xfrm>
           <a:prstGeom prst="rect">
             <a:avLst/>
@@ -5200,7 +4354,7 @@
               <a:buNone/>
             </a:pPr>
             <a:r>
-              <a:rPr lang="en-US" sz="1800" dirty="0">
+              <a:rPr lang="en-US" sz="2200" dirty="0">
                 <a:solidFill>
                   <a:srgbClr val="111827"/>
                 </a:solidFill>
@@ -5208,433 +4362,9 @@
                 <a:ea typeface="Calibri" pitchFamily="34" charset="-122"/>
                 <a:cs typeface="Calibri" pitchFamily="34" charset="-120"/>
               </a:rPr>
-              <a:t>Predict where droplets will appear.</a:t>
-            </a:r>
-            <a:endParaRPr lang="en-US" sz="1800" dirty="0"/>
-          </a:p>
-        </p:txBody>
-      </p:sp>
-      <p:sp>
-        <p:nvSpPr>
-          <p:cNvPr id="26" name="Shape 23"/>
-          <p:cNvSpPr/>
-          <p:nvPr/>
-        </p:nvSpPr>
-        <p:spPr>
-          <a:xfrm>
-            <a:off x="749808" y="4164235"/>
-            <a:ext cx="308610" cy="308610"/>
-          </a:xfrm>
-          <a:prstGeom prst="ellipse">
-            <a:avLst/>
-          </a:prstGeom>
-          <a:solidFill>
-            <a:srgbClr val="087866"/>
-          </a:solidFill>
-          <a:ln w="12700">
-            <a:solidFill>
-              <a:srgbClr val="087866"/>
-            </a:solidFill>
-            <a:prstDash val="solid"/>
-          </a:ln>
-        </p:spPr>
-      </p:sp>
-      <p:sp>
-        <p:nvSpPr>
-          <p:cNvPr id="27" name="Text 24"/>
-          <p:cNvSpPr/>
-          <p:nvPr/>
-        </p:nvSpPr>
-        <p:spPr>
-          <a:xfrm>
-            <a:off x="749808" y="4164235"/>
-            <a:ext cx="308610" cy="308610"/>
-          </a:xfrm>
-          <a:prstGeom prst="rect">
-            <a:avLst/>
-          </a:prstGeom>
-          <a:noFill/>
-          <a:ln/>
-        </p:spPr>
-        <p:txBody>
-          <a:bodyPr wrap="square" lIns="0" tIns="0" rIns="0" bIns="0" rtlCol="0" anchor="ctr"/>
-          <a:lstStyle/>
-          <a:p>
-            <a:pPr algn="ctr" indent="0" marL="0">
-              <a:buNone/>
-            </a:pPr>
-            <a:r>
-              <a:rPr lang="en-US" sz="1300" b="1" dirty="0">
-                <a:solidFill>
-                  <a:srgbClr val="FFFFFF"/>
-                </a:solidFill>
-                <a:latin typeface="Calibri" pitchFamily="34" charset="0"/>
-                <a:ea typeface="Calibri" pitchFamily="34" charset="-122"/>
-                <a:cs typeface="Calibri" pitchFamily="34" charset="-120"/>
-              </a:rPr>
-              <a:t>6</a:t>
-            </a:r>
-            <a:endParaRPr lang="en-US" sz="1300" dirty="0"/>
-          </a:p>
-        </p:txBody>
-      </p:sp>
-      <p:sp>
-        <p:nvSpPr>
-          <p:cNvPr id="28" name="Text 25"/>
-          <p:cNvSpPr/>
-          <p:nvPr/>
-        </p:nvSpPr>
-        <p:spPr>
-          <a:xfrm>
-            <a:off x="1204722" y="4145947"/>
-            <a:ext cx="10243566" cy="326898"/>
-          </a:xfrm>
-          <a:prstGeom prst="rect">
-            <a:avLst/>
-          </a:prstGeom>
-          <a:noFill/>
-          <a:ln/>
-        </p:spPr>
-        <p:txBody>
-          <a:bodyPr wrap="square" lIns="0" tIns="0" rIns="0" bIns="0" rtlCol="0" anchor="t"/>
-          <a:lstStyle/>
-          <a:p>
-            <a:pPr algn="l" indent="0" marL="0">
-              <a:lnSpc>
-                <a:spcPct val="116000"/>
-              </a:lnSpc>
-              <a:buNone/>
-            </a:pPr>
-            <a:r>
-              <a:rPr lang="en-US" sz="1800" dirty="0">
-                <a:solidFill>
-                  <a:srgbClr val="111827"/>
-                </a:solidFill>
-                <a:latin typeface="Calibri" pitchFamily="34" charset="0"/>
-                <a:ea typeface="Calibri" pitchFamily="34" charset="-122"/>
-                <a:cs typeface="Calibri" pitchFamily="34" charset="-120"/>
-              </a:rPr>
-              <a:t>3.</a:t>
-            </a:r>
-            <a:endParaRPr lang="en-US" sz="1800" dirty="0"/>
-          </a:p>
-        </p:txBody>
-      </p:sp>
-      <p:sp>
-        <p:nvSpPr>
-          <p:cNvPr id="29" name="Shape 26"/>
-          <p:cNvSpPr/>
-          <p:nvPr/>
-        </p:nvSpPr>
-        <p:spPr>
-          <a:xfrm>
-            <a:off x="749808" y="4678871"/>
-            <a:ext cx="308610" cy="308610"/>
-          </a:xfrm>
-          <a:prstGeom prst="ellipse">
-            <a:avLst/>
-          </a:prstGeom>
-          <a:solidFill>
-            <a:srgbClr val="087866"/>
-          </a:solidFill>
-          <a:ln w="12700">
-            <a:solidFill>
-              <a:srgbClr val="087866"/>
-            </a:solidFill>
-            <a:prstDash val="solid"/>
-          </a:ln>
-        </p:spPr>
-      </p:sp>
-      <p:sp>
-        <p:nvSpPr>
-          <p:cNvPr id="30" name="Text 27"/>
-          <p:cNvSpPr/>
-          <p:nvPr/>
-        </p:nvSpPr>
-        <p:spPr>
-          <a:xfrm>
-            <a:off x="749808" y="4678871"/>
-            <a:ext cx="308610" cy="308610"/>
-          </a:xfrm>
-          <a:prstGeom prst="rect">
-            <a:avLst/>
-          </a:prstGeom>
-          <a:noFill/>
-          <a:ln/>
-        </p:spPr>
-        <p:txBody>
-          <a:bodyPr wrap="square" lIns="0" tIns="0" rIns="0" bIns="0" rtlCol="0" anchor="ctr"/>
-          <a:lstStyle/>
-          <a:p>
-            <a:pPr algn="ctr" indent="0" marL="0">
-              <a:buNone/>
-            </a:pPr>
-            <a:r>
-              <a:rPr lang="en-US" sz="1300" b="1" dirty="0">
-                <a:solidFill>
-                  <a:srgbClr val="FFFFFF"/>
-                </a:solidFill>
-                <a:latin typeface="Calibri" pitchFamily="34" charset="0"/>
-                <a:ea typeface="Calibri" pitchFamily="34" charset="-122"/>
-                <a:cs typeface="Calibri" pitchFamily="34" charset="-120"/>
-              </a:rPr>
-              <a:t>7</a:t>
-            </a:r>
-            <a:endParaRPr lang="en-US" sz="1300" dirty="0"/>
-          </a:p>
-        </p:txBody>
-      </p:sp>
-      <p:sp>
-        <p:nvSpPr>
-          <p:cNvPr id="31" name="Text 28"/>
-          <p:cNvSpPr/>
-          <p:nvPr/>
-        </p:nvSpPr>
-        <p:spPr>
-          <a:xfrm>
-            <a:off x="1204722" y="4660583"/>
-            <a:ext cx="10243566" cy="326898"/>
-          </a:xfrm>
-          <a:prstGeom prst="rect">
-            <a:avLst/>
-          </a:prstGeom>
-          <a:noFill/>
-          <a:ln/>
-        </p:spPr>
-        <p:txBody>
-          <a:bodyPr wrap="square" lIns="0" tIns="0" rIns="0" bIns="0" rtlCol="0" anchor="t"/>
-          <a:lstStyle/>
-          <a:p>
-            <a:pPr algn="l" indent="0" marL="0">
-              <a:lnSpc>
-                <a:spcPct val="116000"/>
-              </a:lnSpc>
-              <a:buNone/>
-            </a:pPr>
-            <a:r>
-              <a:rPr lang="en-US" sz="1800" dirty="0">
-                <a:solidFill>
-                  <a:srgbClr val="111827"/>
-                </a:solidFill>
-                <a:latin typeface="Calibri" pitchFamily="34" charset="0"/>
-                <a:ea typeface="Calibri" pitchFamily="34" charset="-122"/>
-                <a:cs typeface="Calibri" pitchFamily="34" charset="-120"/>
-              </a:rPr>
-              <a:t>Record observations every two minutes for ten minutes.</a:t>
-            </a:r>
-            <a:endParaRPr lang="en-US" sz="1800" dirty="0"/>
-          </a:p>
-        </p:txBody>
-      </p:sp>
-      <p:sp>
-        <p:nvSpPr>
-          <p:cNvPr id="32" name="Shape 29"/>
-          <p:cNvSpPr/>
-          <p:nvPr/>
-        </p:nvSpPr>
-        <p:spPr>
-          <a:xfrm>
-            <a:off x="749808" y="5193506"/>
-            <a:ext cx="308610" cy="308610"/>
-          </a:xfrm>
-          <a:prstGeom prst="ellipse">
-            <a:avLst/>
-          </a:prstGeom>
-          <a:solidFill>
-            <a:srgbClr val="087866"/>
-          </a:solidFill>
-          <a:ln w="12700">
-            <a:solidFill>
-              <a:srgbClr val="087866"/>
-            </a:solidFill>
-            <a:prstDash val="solid"/>
-          </a:ln>
-        </p:spPr>
-      </p:sp>
-      <p:sp>
-        <p:nvSpPr>
-          <p:cNvPr id="33" name="Text 30"/>
-          <p:cNvSpPr/>
-          <p:nvPr/>
-        </p:nvSpPr>
-        <p:spPr>
-          <a:xfrm>
-            <a:off x="749808" y="5193506"/>
-            <a:ext cx="308610" cy="308610"/>
-          </a:xfrm>
-          <a:prstGeom prst="rect">
-            <a:avLst/>
-          </a:prstGeom>
-          <a:noFill/>
-          <a:ln/>
-        </p:spPr>
-        <p:txBody>
-          <a:bodyPr wrap="square" lIns="0" tIns="0" rIns="0" bIns="0" rtlCol="0" anchor="ctr"/>
-          <a:lstStyle/>
-          <a:p>
-            <a:pPr algn="ctr" indent="0" marL="0">
-              <a:buNone/>
-            </a:pPr>
-            <a:r>
-              <a:rPr lang="en-US" sz="1300" b="1" dirty="0">
-                <a:solidFill>
-                  <a:srgbClr val="FFFFFF"/>
-                </a:solidFill>
-                <a:latin typeface="Calibri" pitchFamily="34" charset="0"/>
-                <a:ea typeface="Calibri" pitchFamily="34" charset="-122"/>
-                <a:cs typeface="Calibri" pitchFamily="34" charset="-120"/>
-              </a:rPr>
-              <a:t>8</a:t>
-            </a:r>
-            <a:endParaRPr lang="en-US" sz="1300" dirty="0"/>
-          </a:p>
-        </p:txBody>
-      </p:sp>
-      <p:sp>
-        <p:nvSpPr>
-          <p:cNvPr id="34" name="Text 31"/>
-          <p:cNvSpPr/>
-          <p:nvPr/>
-        </p:nvSpPr>
-        <p:spPr>
-          <a:xfrm>
-            <a:off x="1204722" y="5175218"/>
-            <a:ext cx="10243566" cy="326898"/>
-          </a:xfrm>
-          <a:prstGeom prst="rect">
-            <a:avLst/>
-          </a:prstGeom>
-          <a:noFill/>
-          <a:ln/>
-        </p:spPr>
-        <p:txBody>
-          <a:bodyPr wrap="square" lIns="0" tIns="0" rIns="0" bIns="0" rtlCol="0" anchor="t"/>
-          <a:lstStyle/>
-          <a:p>
-            <a:pPr algn="l" indent="0" marL="0">
-              <a:lnSpc>
-                <a:spcPct val="116000"/>
-              </a:lnSpc>
-              <a:buNone/>
-            </a:pPr>
-            <a:r>
-              <a:rPr lang="en-US" sz="1800" dirty="0">
-                <a:solidFill>
-                  <a:srgbClr val="111827"/>
-                </a:solidFill>
-                <a:latin typeface="Calibri" pitchFamily="34" charset="0"/>
-                <a:ea typeface="Calibri" pitchFamily="34" charset="-122"/>
-                <a:cs typeface="Calibri" pitchFamily="34" charset="-120"/>
-              </a:rPr>
-              <a:t>4.</a:t>
-            </a:r>
-            <a:endParaRPr lang="en-US" sz="1800" dirty="0"/>
-          </a:p>
-        </p:txBody>
-      </p:sp>
-      <p:sp>
-        <p:nvSpPr>
-          <p:cNvPr id="35" name="Shape 32"/>
-          <p:cNvSpPr/>
-          <p:nvPr/>
-        </p:nvSpPr>
-        <p:spPr>
-          <a:xfrm>
-            <a:off x="749808" y="5708142"/>
-            <a:ext cx="308610" cy="308610"/>
-          </a:xfrm>
-          <a:prstGeom prst="ellipse">
-            <a:avLst/>
-          </a:prstGeom>
-          <a:solidFill>
-            <a:srgbClr val="087866"/>
-          </a:solidFill>
-          <a:ln w="12700">
-            <a:solidFill>
-              <a:srgbClr val="087866"/>
-            </a:solidFill>
-            <a:prstDash val="solid"/>
-          </a:ln>
-        </p:spPr>
-      </p:sp>
-      <p:sp>
-        <p:nvSpPr>
-          <p:cNvPr id="36" name="Text 33"/>
-          <p:cNvSpPr/>
-          <p:nvPr/>
-        </p:nvSpPr>
-        <p:spPr>
-          <a:xfrm>
-            <a:off x="749808" y="5708142"/>
-            <a:ext cx="308610" cy="308610"/>
-          </a:xfrm>
-          <a:prstGeom prst="rect">
-            <a:avLst/>
-          </a:prstGeom>
-          <a:noFill/>
-          <a:ln/>
-        </p:spPr>
-        <p:txBody>
-          <a:bodyPr wrap="square" lIns="0" tIns="0" rIns="0" bIns="0" rtlCol="0" anchor="ctr"/>
-          <a:lstStyle/>
-          <a:p>
-            <a:pPr algn="ctr" indent="0" marL="0">
-              <a:buNone/>
-            </a:pPr>
-            <a:r>
-              <a:rPr lang="en-US" sz="1300" b="1" dirty="0">
-                <a:solidFill>
-                  <a:srgbClr val="FFFFFF"/>
-                </a:solidFill>
-                <a:latin typeface="Calibri" pitchFamily="34" charset="0"/>
-                <a:ea typeface="Calibri" pitchFamily="34" charset="-122"/>
-                <a:cs typeface="Calibri" pitchFamily="34" charset="-120"/>
-              </a:rPr>
-              <a:t>9</a:t>
-            </a:r>
-            <a:endParaRPr lang="en-US" sz="1300" dirty="0"/>
-          </a:p>
-        </p:txBody>
-      </p:sp>
-      <p:sp>
-        <p:nvSpPr>
-          <p:cNvPr id="37" name="Text 34"/>
-          <p:cNvSpPr/>
-          <p:nvPr/>
-        </p:nvSpPr>
-        <p:spPr>
-          <a:xfrm>
-            <a:off x="1204722" y="5689854"/>
-            <a:ext cx="10243566" cy="326898"/>
-          </a:xfrm>
-          <a:prstGeom prst="rect">
-            <a:avLst/>
-          </a:prstGeom>
-          <a:noFill/>
-          <a:ln/>
-        </p:spPr>
-        <p:txBody>
-          <a:bodyPr wrap="square" lIns="0" tIns="0" rIns="0" bIns="0" rtlCol="0" anchor="t"/>
-          <a:lstStyle/>
-          <a:p>
-            <a:pPr algn="l" indent="0" marL="0">
-              <a:lnSpc>
-                <a:spcPct val="116000"/>
-              </a:lnSpc>
-              <a:buNone/>
-            </a:pPr>
-            <a:r>
-              <a:rPr lang="en-US" sz="1800" dirty="0">
-                <a:solidFill>
-                  <a:srgbClr val="111827"/>
-                </a:solidFill>
-                <a:latin typeface="Calibri" pitchFamily="34" charset="0"/>
-                <a:ea typeface="Calibri" pitchFamily="34" charset="-122"/>
-                <a:cs typeface="Calibri" pitchFamily="34" charset="-120"/>
-              </a:rPr>
-              <a:t>Submit a labelled diagram and 120-word particle explanation next lesson.</a:t>
-            </a:r>
-            <a:endParaRPr lang="en-US" sz="1800" dirty="0"/>
+              <a:t>Self-check: cite evidence for one criterion and select one to improve.</a:t>
+            </a:r>
+            <a:endParaRPr lang="en-US" sz="2200" dirty="0"/>
           </a:p>
         </p:txBody>
       </p:sp>
@@ -5706,7 +4436,7 @@
                 <a:ea typeface="Calibri" pitchFamily="34" charset="-122"/>
                 <a:cs typeface="Calibri" pitchFamily="34" charset="-120"/>
               </a:rPr>
-              <a:t>Extended Task — Continued</a:t>
+              <a:t>Lesson Takeaway</a:t>
             </a:r>
             <a:endParaRPr lang="en-US" sz="3400" dirty="0"/>
           </a:p>
@@ -5879,1757 +4609,7 @@
                 <a:ea typeface="Calibri" pitchFamily="34" charset="-122"/>
                 <a:cs typeface="Calibri" pitchFamily="34" charset="-120"/>
               </a:rPr>
-              <a:t>13 / 16</a:t>
-            </a:r>
-            <a:endParaRPr lang="en-US" sz="1200" dirty="0"/>
-          </a:p>
-        </p:txBody>
-      </p:sp>
-      <p:sp>
-        <p:nvSpPr>
-          <p:cNvPr id="9" name="Shape 6"/>
-          <p:cNvSpPr/>
-          <p:nvPr/>
-        </p:nvSpPr>
-        <p:spPr>
-          <a:xfrm>
-            <a:off x="274320" y="6510528"/>
-            <a:ext cx="11643055" cy="73152"/>
-          </a:xfrm>
-          <a:prstGeom prst="roundRect">
-            <a:avLst>
-              <a:gd name="adj" fmla="val 50000"/>
-            </a:avLst>
-          </a:prstGeom>
-          <a:solidFill>
-            <a:srgbClr val="CCFAF3"/>
-          </a:solidFill>
-          <a:ln w="12700">
-            <a:solidFill>
-              <a:srgbClr val="CCFAF3"/>
-            </a:solidFill>
-            <a:prstDash val="solid"/>
-          </a:ln>
-        </p:spPr>
-      </p:sp>
-      <p:sp>
-        <p:nvSpPr>
-          <p:cNvPr id="10" name="Shape 7"/>
-          <p:cNvSpPr/>
-          <p:nvPr/>
-        </p:nvSpPr>
-        <p:spPr>
-          <a:xfrm>
-            <a:off x="274320" y="6510528"/>
-            <a:ext cx="9459982" cy="73152"/>
-          </a:xfrm>
-          <a:prstGeom prst="roundRect">
-            <a:avLst>
-              <a:gd name="adj" fmla="val 50000"/>
-            </a:avLst>
-          </a:prstGeom>
-          <a:solidFill>
-            <a:srgbClr val="0A8F7A"/>
-          </a:solidFill>
-          <a:ln w="12700">
-            <a:solidFill>
-              <a:srgbClr val="0A8F7A"/>
-            </a:solidFill>
-            <a:prstDash val="solid"/>
-          </a:ln>
-        </p:spPr>
-      </p:sp>
-      <p:sp>
-        <p:nvSpPr>
-          <p:cNvPr id="11" name="Shape 8"/>
-          <p:cNvSpPr/>
-          <p:nvPr/>
-        </p:nvSpPr>
-        <p:spPr>
-          <a:xfrm>
-            <a:off x="749808" y="1591056"/>
-            <a:ext cx="377190" cy="377190"/>
-          </a:xfrm>
-          <a:prstGeom prst="ellipse">
-            <a:avLst/>
-          </a:prstGeom>
-          <a:solidFill>
-            <a:srgbClr val="087866"/>
-          </a:solidFill>
-          <a:ln w="12700">
-            <a:solidFill>
-              <a:srgbClr val="087866"/>
-            </a:solidFill>
-            <a:prstDash val="solid"/>
-          </a:ln>
-        </p:spPr>
-      </p:sp>
-      <p:sp>
-        <p:nvSpPr>
-          <p:cNvPr id="12" name="Text 9"/>
-          <p:cNvSpPr/>
-          <p:nvPr/>
-        </p:nvSpPr>
-        <p:spPr>
-          <a:xfrm>
-            <a:off x="749808" y="1591056"/>
-            <a:ext cx="377190" cy="377190"/>
-          </a:xfrm>
-          <a:prstGeom prst="rect">
-            <a:avLst/>
-          </a:prstGeom>
-          <a:noFill/>
-          <a:ln/>
-        </p:spPr>
-        <p:txBody>
-          <a:bodyPr wrap="square" lIns="0" tIns="0" rIns="0" bIns="0" rtlCol="0" anchor="ctr"/>
-          <a:lstStyle/>
-          <a:p>
-            <a:pPr algn="ctr" indent="0" marL="0">
-              <a:buNone/>
-            </a:pPr>
-            <a:r>
-              <a:rPr lang="en-US" sz="1500" b="1" dirty="0">
-                <a:solidFill>
-                  <a:srgbClr val="FFFFFF"/>
-                </a:solidFill>
-                <a:latin typeface="Calibri" pitchFamily="34" charset="0"/>
-                <a:ea typeface="Calibri" pitchFamily="34" charset="-122"/>
-                <a:cs typeface="Calibri" pitchFamily="34" charset="-120"/>
-              </a:rPr>
-              <a:t>1</a:t>
-            </a:r>
-            <a:endParaRPr lang="en-US" sz="1500" dirty="0"/>
-          </a:p>
-        </p:txBody>
-      </p:sp>
-      <p:sp>
-        <p:nvSpPr>
-          <p:cNvPr id="13" name="Text 10"/>
-          <p:cNvSpPr/>
-          <p:nvPr/>
-        </p:nvSpPr>
-        <p:spPr>
-          <a:xfrm>
-            <a:off x="1273302" y="1572768"/>
-            <a:ext cx="10174986" cy="395478"/>
-          </a:xfrm>
-          <a:prstGeom prst="rect">
-            <a:avLst/>
-          </a:prstGeom>
-          <a:noFill/>
-          <a:ln/>
-        </p:spPr>
-        <p:txBody>
-          <a:bodyPr wrap="square" lIns="0" tIns="0" rIns="0" bIns="0" rtlCol="0" anchor="t"/>
-          <a:lstStyle/>
-          <a:p>
-            <a:pPr algn="l" indent="0" marL="0">
-              <a:lnSpc>
-                <a:spcPct val="116000"/>
-              </a:lnSpc>
-              <a:buNone/>
-            </a:pPr>
-            <a:r>
-              <a:rPr lang="en-US" sz="2200" dirty="0">
-                <a:solidFill>
-                  <a:srgbClr val="111827"/>
-                </a:solidFill>
-                <a:latin typeface="Calibri" pitchFamily="34" charset="0"/>
-                <a:ea typeface="Calibri" pitchFamily="34" charset="-122"/>
-                <a:cs typeface="Calibri" pitchFamily="34" charset="-120"/>
-              </a:rPr>
-              <a:t>Challenge: identify one limitation and improve the method.</a:t>
-            </a:r>
-            <a:endParaRPr lang="en-US" sz="2200" dirty="0"/>
-          </a:p>
-        </p:txBody>
-      </p:sp>
-    </p:spTree>
-  </p:cSld>
-  <p:clrMapOvr>
-    <a:masterClrMapping/>
-  </p:clrMapOvr>
-</p:sld>
-</file>
-
-<file path=ppt/slides/slide14.xml><?xml version="1.0" encoding="utf-8"?>
-<p:sld xmlns:a="http://schemas.openxmlformats.org/drawingml/2006/main" xmlns:r="http://schemas.openxmlformats.org/officeDocument/2006/relationships" xmlns:p="http://schemas.openxmlformats.org/presentationml/2006/main">
-  <p:cSld name="Slide 14">
-    <p:bg>
-      <p:bgPr>
-        <a:solidFill>
-          <a:srgbClr val="FFFFFF"/>
-        </a:solidFill>
-      </p:bgPr>
-    </p:bg>
-    <p:spTree>
-      <p:nvGrpSpPr>
-        <p:cNvPr id="1" name=""/>
-        <p:cNvGrpSpPr/>
-        <p:nvPr/>
-      </p:nvGrpSpPr>
-      <p:grpSpPr>
-        <a:xfrm>
-          <a:off x="0" y="0"/>
-          <a:ext cx="0" cy="0"/>
-          <a:chOff x="0" y="0"/>
-          <a:chExt cx="0" cy="0"/>
-        </a:xfrm>
-      </p:grpSpPr>
-      <p:sp>
-        <p:nvSpPr>
-          <p:cNvPr id="2" name="Text 0"/>
-          <p:cNvSpPr/>
-          <p:nvPr/>
-        </p:nvSpPr>
-        <p:spPr>
-          <a:xfrm>
-            <a:off x="621792" y="347472"/>
-            <a:ext cx="10948111" cy="713232"/>
-          </a:xfrm>
-          <a:prstGeom prst="rect">
-            <a:avLst/>
-          </a:prstGeom>
-          <a:noFill/>
-          <a:ln/>
-        </p:spPr>
-        <p:txBody>
-          <a:bodyPr wrap="square" lIns="0" tIns="0" rIns="0" bIns="0" rtlCol="0" anchor="ctr"/>
-          <a:lstStyle/>
-          <a:p>
-            <a:pPr algn="l" indent="0" marL="0">
-              <a:lnSpc>
-                <a:spcPct val="116000"/>
-              </a:lnSpc>
-              <a:buNone/>
-            </a:pPr>
-            <a:r>
-              <a:rPr lang="en-US" sz="3400" b="1" dirty="0">
-                <a:solidFill>
-                  <a:srgbClr val="111827"/>
-                </a:solidFill>
-                <a:latin typeface="Calibri" pitchFamily="34" charset="0"/>
-                <a:ea typeface="Calibri" pitchFamily="34" charset="-122"/>
-                <a:cs typeface="Calibri" pitchFamily="34" charset="-120"/>
-              </a:rPr>
-              <a:t>Exit Ticket</a:t>
-            </a:r>
-            <a:endParaRPr lang="en-US" sz="3400" dirty="0"/>
-          </a:p>
-        </p:txBody>
-      </p:sp>
-      <p:sp>
-        <p:nvSpPr>
-          <p:cNvPr id="3" name="Shape 1"/>
-          <p:cNvSpPr/>
-          <p:nvPr/>
-        </p:nvSpPr>
-        <p:spPr>
-          <a:xfrm>
-            <a:off x="621792" y="1207008"/>
-            <a:ext cx="10948111" cy="0"/>
-          </a:xfrm>
-          <a:prstGeom prst="line">
-            <a:avLst/>
-          </a:prstGeom>
-          <a:noFill/>
-          <a:ln w="12700">
-            <a:solidFill>
-              <a:srgbClr val="CFF6ED"/>
-            </a:solidFill>
-            <a:prstDash val="solid"/>
-          </a:ln>
-        </p:spPr>
-      </p:sp>
-      <p:sp>
-        <p:nvSpPr>
-          <p:cNvPr id="4" name="Shape 2"/>
-          <p:cNvSpPr/>
-          <p:nvPr/>
-        </p:nvSpPr>
-        <p:spPr>
-          <a:xfrm>
-            <a:off x="0" y="6492240"/>
-            <a:ext cx="12191695" cy="365760"/>
-          </a:xfrm>
-          <a:prstGeom prst="rect">
-            <a:avLst/>
-          </a:prstGeom>
-          <a:solidFill>
-            <a:srgbClr val="F0FDFB"/>
-          </a:solidFill>
-          <a:ln w="12700">
-            <a:solidFill>
-              <a:srgbClr val="F0FDFB"/>
-            </a:solidFill>
-            <a:prstDash val="solid"/>
-          </a:ln>
-        </p:spPr>
-      </p:sp>
-      <p:sp>
-        <p:nvSpPr>
-          <p:cNvPr id="5" name="Shape 3"/>
-          <p:cNvSpPr/>
-          <p:nvPr/>
-        </p:nvSpPr>
-        <p:spPr>
-          <a:xfrm>
-            <a:off x="0" y="6492240"/>
-            <a:ext cx="12191695" cy="0"/>
-          </a:xfrm>
-          <a:prstGeom prst="line">
-            <a:avLst/>
-          </a:prstGeom>
-          <a:noFill/>
-          <a:ln w="12700">
-            <a:solidFill>
-              <a:srgbClr val="A7F3E8"/>
-            </a:solidFill>
-            <a:prstDash val="solid"/>
-          </a:ln>
-        </p:spPr>
-      </p:sp>
-      <p:sp>
-        <p:nvSpPr>
-          <p:cNvPr id="6" name="Text 4"/>
-          <p:cNvSpPr/>
-          <p:nvPr/>
-        </p:nvSpPr>
-        <p:spPr>
-          <a:xfrm>
-            <a:off x="274320" y="6556248"/>
-            <a:ext cx="4754880" cy="237744"/>
-          </a:xfrm>
-          <a:prstGeom prst="rect">
-            <a:avLst/>
-          </a:prstGeom>
-          <a:noFill/>
-          <a:ln/>
-        </p:spPr>
-        <p:txBody>
-          <a:bodyPr wrap="square" rtlCol="0" anchor="ctr"/>
-          <a:lstStyle/>
-          <a:p>
-            <a:pPr indent="0" marL="0">
-              <a:buNone/>
-            </a:pPr>
-            <a:r>
-              <a:rPr lang="en-US" sz="1200" dirty="0">
-                <a:solidFill>
-                  <a:srgbClr val="087866"/>
-                </a:solidFill>
-                <a:latin typeface="Calibri" pitchFamily="34" charset="0"/>
-                <a:ea typeface="Calibri" pitchFamily="34" charset="-122"/>
-                <a:cs typeface="Calibri" pitchFamily="34" charset="-120"/>
-              </a:rPr>
-              <a:t>Science</a:t>
-            </a:r>
-            <a:endParaRPr lang="en-US" sz="1200" dirty="0"/>
-          </a:p>
-        </p:txBody>
-      </p:sp>
-      <p:pic>
-        <p:nvPicPr>
-          <p:cNvPr id="7" name="Image 0" descr="Layah">    </p:cNvPr>
-          <p:cNvPicPr>
-            <a:picLocks noChangeAspect="1"/>
-          </p:cNvPicPr>
-          <p:nvPr/>
-        </p:nvPicPr>
-        <p:blipFill>
-          <a:blip r:embed="rId1"/>
-          <a:stretch>
-            <a:fillRect/>
-          </a:stretch>
-        </p:blipFill>
-        <p:spPr>
-          <a:xfrm>
-            <a:off x="5394960" y="6528816"/>
-            <a:ext cx="1051560" cy="292608"/>
-          </a:xfrm>
-          <a:prstGeom prst="rect">
-            <a:avLst/>
-          </a:prstGeom>
-        </p:spPr>
-      </p:pic>
-      <p:sp>
-        <p:nvSpPr>
-          <p:cNvPr id="8" name="Text 5"/>
-          <p:cNvSpPr/>
-          <p:nvPr/>
-        </p:nvSpPr>
-        <p:spPr>
-          <a:xfrm>
-            <a:off x="10225735" y="6556248"/>
-            <a:ext cx="1691640" cy="237744"/>
-          </a:xfrm>
-          <a:prstGeom prst="rect">
-            <a:avLst/>
-          </a:prstGeom>
-          <a:noFill/>
-          <a:ln/>
-        </p:spPr>
-        <p:txBody>
-          <a:bodyPr wrap="square" rtlCol="0" anchor="ctr"/>
-          <a:lstStyle/>
-          <a:p>
-            <a:pPr algn="r" indent="0" marL="0">
-              <a:buNone/>
-            </a:pPr>
-            <a:r>
-              <a:rPr lang="en-US" sz="1200" dirty="0">
-                <a:solidFill>
-                  <a:srgbClr val="087866"/>
-                </a:solidFill>
-                <a:latin typeface="Calibri" pitchFamily="34" charset="0"/>
-                <a:ea typeface="Calibri" pitchFamily="34" charset="-122"/>
-                <a:cs typeface="Calibri" pitchFamily="34" charset="-120"/>
-              </a:rPr>
-              <a:t>14 / 16</a:t>
-            </a:r>
-            <a:endParaRPr lang="en-US" sz="1200" dirty="0"/>
-          </a:p>
-        </p:txBody>
-      </p:sp>
-      <p:sp>
-        <p:nvSpPr>
-          <p:cNvPr id="9" name="Shape 6"/>
-          <p:cNvSpPr/>
-          <p:nvPr/>
-        </p:nvSpPr>
-        <p:spPr>
-          <a:xfrm>
-            <a:off x="274320" y="6510528"/>
-            <a:ext cx="11643055" cy="73152"/>
-          </a:xfrm>
-          <a:prstGeom prst="roundRect">
-            <a:avLst>
-              <a:gd name="adj" fmla="val 50000"/>
-            </a:avLst>
-          </a:prstGeom>
-          <a:solidFill>
-            <a:srgbClr val="CCFAF3"/>
-          </a:solidFill>
-          <a:ln w="12700">
-            <a:solidFill>
-              <a:srgbClr val="CCFAF3"/>
-            </a:solidFill>
-            <a:prstDash val="solid"/>
-          </a:ln>
-        </p:spPr>
-      </p:sp>
-      <p:sp>
-        <p:nvSpPr>
-          <p:cNvPr id="10" name="Shape 7"/>
-          <p:cNvSpPr/>
-          <p:nvPr/>
-        </p:nvSpPr>
-        <p:spPr>
-          <a:xfrm>
-            <a:off x="274320" y="6510528"/>
-            <a:ext cx="10187673" cy="73152"/>
-          </a:xfrm>
-          <a:prstGeom prst="roundRect">
-            <a:avLst>
-              <a:gd name="adj" fmla="val 50000"/>
-            </a:avLst>
-          </a:prstGeom>
-          <a:solidFill>
-            <a:srgbClr val="0A8F7A"/>
-          </a:solidFill>
-          <a:ln w="12700">
-            <a:solidFill>
-              <a:srgbClr val="0A8F7A"/>
-            </a:solidFill>
-            <a:prstDash val="solid"/>
-          </a:ln>
-        </p:spPr>
-      </p:sp>
-      <p:sp>
-        <p:nvSpPr>
-          <p:cNvPr id="11" name="Shape 8"/>
-          <p:cNvSpPr/>
-          <p:nvPr/>
-        </p:nvSpPr>
-        <p:spPr>
-          <a:xfrm>
-            <a:off x="749808" y="1709928"/>
-            <a:ext cx="4617720" cy="2514600"/>
-          </a:xfrm>
-          <a:prstGeom prst="rect">
-            <a:avLst/>
-          </a:prstGeom>
-          <a:solidFill>
-            <a:srgbClr val="ECFDF8"/>
-          </a:solidFill>
-          <a:ln w="12700">
-            <a:solidFill>
-              <a:srgbClr val="ECFDF8"/>
-            </a:solidFill>
-            <a:prstDash val="solid"/>
-          </a:ln>
-        </p:spPr>
-      </p:sp>
-      <p:sp>
-        <p:nvSpPr>
-          <p:cNvPr id="12" name="Shape 9"/>
-          <p:cNvSpPr/>
-          <p:nvPr/>
-        </p:nvSpPr>
-        <p:spPr>
-          <a:xfrm>
-            <a:off x="749808" y="1709928"/>
-            <a:ext cx="54864" cy="2514600"/>
-          </a:xfrm>
-          <a:prstGeom prst="rect">
-            <a:avLst/>
-          </a:prstGeom>
-          <a:solidFill>
-            <a:srgbClr val="087866"/>
-          </a:solidFill>
-          <a:ln w="12700">
-            <a:solidFill>
-              <a:srgbClr val="087866"/>
-            </a:solidFill>
-            <a:prstDash val="solid"/>
-          </a:ln>
-        </p:spPr>
-      </p:sp>
-      <p:sp>
-        <p:nvSpPr>
-          <p:cNvPr id="13" name="Text 10"/>
-          <p:cNvSpPr/>
-          <p:nvPr/>
-        </p:nvSpPr>
-        <p:spPr>
-          <a:xfrm>
-            <a:off x="1005840" y="1856232"/>
-            <a:ext cx="4105656" cy="2221992"/>
-          </a:xfrm>
-          <a:prstGeom prst="rect">
-            <a:avLst/>
-          </a:prstGeom>
-          <a:noFill/>
-          <a:ln/>
-        </p:spPr>
-        <p:txBody>
-          <a:bodyPr wrap="square" lIns="0" tIns="0" rIns="0" bIns="0" rtlCol="0" anchor="ctr"/>
-          <a:lstStyle/>
-          <a:p>
-            <a:pPr algn="l" indent="0" marL="0">
-              <a:lnSpc>
-                <a:spcPct val="116000"/>
-              </a:lnSpc>
-              <a:buNone/>
-            </a:pPr>
-            <a:r>
-              <a:rPr lang="en-US" sz="2200" b="1" dirty="0">
-                <a:solidFill>
-                  <a:srgbClr val="111827"/>
-                </a:solidFill>
-                <a:latin typeface="Calibri" pitchFamily="34" charset="0"/>
-                <a:ea typeface="Calibri" pitchFamily="34" charset="-122"/>
-                <a:cs typeface="Calibri" pitchFamily="34" charset="-120"/>
-              </a:rPr>
-              <a:t>1. What change of state turns liquid water into water vapour?</a:t>
-            </a:r>
-            <a:endParaRPr lang="en-US" sz="2200" dirty="0"/>
-          </a:p>
-        </p:txBody>
-      </p:sp>
-      <p:sp>
-        <p:nvSpPr>
-          <p:cNvPr id="14" name="Shape 11"/>
-          <p:cNvSpPr/>
-          <p:nvPr/>
-        </p:nvSpPr>
-        <p:spPr>
-          <a:xfrm>
-            <a:off x="5779008" y="1591056"/>
-            <a:ext cx="308610" cy="308610"/>
-          </a:xfrm>
-          <a:prstGeom prst="ellipse">
-            <a:avLst/>
-          </a:prstGeom>
-          <a:solidFill>
-            <a:srgbClr val="087866"/>
-          </a:solidFill>
-          <a:ln w="12700">
-            <a:solidFill>
-              <a:srgbClr val="087866"/>
-            </a:solidFill>
-            <a:prstDash val="solid"/>
-          </a:ln>
-        </p:spPr>
-      </p:sp>
-      <p:sp>
-        <p:nvSpPr>
-          <p:cNvPr id="15" name="Text 12"/>
-          <p:cNvSpPr/>
-          <p:nvPr/>
-        </p:nvSpPr>
-        <p:spPr>
-          <a:xfrm>
-            <a:off x="5779008" y="1591056"/>
-            <a:ext cx="308610" cy="308610"/>
-          </a:xfrm>
-          <a:prstGeom prst="rect">
-            <a:avLst/>
-          </a:prstGeom>
-          <a:noFill/>
-          <a:ln/>
-        </p:spPr>
-        <p:txBody>
-          <a:bodyPr wrap="square" lIns="0" tIns="0" rIns="0" bIns="0" rtlCol="0" anchor="ctr"/>
-          <a:lstStyle/>
-          <a:p>
-            <a:pPr algn="ctr" indent="0" marL="0">
-              <a:buNone/>
-            </a:pPr>
-            <a:r>
-              <a:rPr lang="en-US" sz="1300" b="1" dirty="0">
-                <a:solidFill>
-                  <a:srgbClr val="FFFFFF"/>
-                </a:solidFill>
-                <a:latin typeface="Calibri" pitchFamily="34" charset="0"/>
-                <a:ea typeface="Calibri" pitchFamily="34" charset="-122"/>
-                <a:cs typeface="Calibri" pitchFamily="34" charset="-120"/>
-              </a:rPr>
-              <a:t>1</a:t>
-            </a:r>
-            <a:endParaRPr lang="en-US" sz="1300" dirty="0"/>
-          </a:p>
-        </p:txBody>
-      </p:sp>
-      <p:sp>
-        <p:nvSpPr>
-          <p:cNvPr id="16" name="Text 13"/>
-          <p:cNvSpPr/>
-          <p:nvPr/>
-        </p:nvSpPr>
-        <p:spPr>
-          <a:xfrm>
-            <a:off x="6233922" y="1572768"/>
-            <a:ext cx="5177790" cy="877824"/>
-          </a:xfrm>
-          <a:prstGeom prst="rect">
-            <a:avLst/>
-          </a:prstGeom>
-          <a:noFill/>
-          <a:ln/>
-        </p:spPr>
-        <p:txBody>
-          <a:bodyPr wrap="square" lIns="0" tIns="0" rIns="0" bIns="0" rtlCol="0" anchor="t"/>
-          <a:lstStyle/>
-          <a:p>
-            <a:pPr algn="l" indent="0" marL="0">
-              <a:lnSpc>
-                <a:spcPct val="116000"/>
-              </a:lnSpc>
-              <a:buNone/>
-            </a:pPr>
-            <a:r>
-              <a:rPr lang="en-US" sz="1800" dirty="0">
-                <a:solidFill>
-                  <a:srgbClr val="111827"/>
-                </a:solidFill>
-                <a:latin typeface="Calibri" pitchFamily="34" charset="0"/>
-                <a:ea typeface="Calibri" pitchFamily="34" charset="-122"/>
-                <a:cs typeface="Calibri" pitchFamily="34" charset="-120"/>
-              </a:rPr>
-              <a:t>2. Explain why droplets form on the outside of a cold bottle using particle movement.</a:t>
-            </a:r>
-            <a:endParaRPr lang="en-US" sz="1800" dirty="0"/>
-          </a:p>
-        </p:txBody>
-      </p:sp>
-      <p:sp>
-        <p:nvSpPr>
-          <p:cNvPr id="17" name="Shape 14"/>
-          <p:cNvSpPr/>
-          <p:nvPr/>
-        </p:nvSpPr>
-        <p:spPr>
-          <a:xfrm>
-            <a:off x="5779008" y="2670048"/>
-            <a:ext cx="308610" cy="308610"/>
-          </a:xfrm>
-          <a:prstGeom prst="ellipse">
-            <a:avLst/>
-          </a:prstGeom>
-          <a:solidFill>
-            <a:srgbClr val="087866"/>
-          </a:solidFill>
-          <a:ln w="12700">
-            <a:solidFill>
-              <a:srgbClr val="087866"/>
-            </a:solidFill>
-            <a:prstDash val="solid"/>
-          </a:ln>
-        </p:spPr>
-      </p:sp>
-      <p:sp>
-        <p:nvSpPr>
-          <p:cNvPr id="18" name="Text 15"/>
-          <p:cNvSpPr/>
-          <p:nvPr/>
-        </p:nvSpPr>
-        <p:spPr>
-          <a:xfrm>
-            <a:off x="5779008" y="2670048"/>
-            <a:ext cx="308610" cy="308610"/>
-          </a:xfrm>
-          <a:prstGeom prst="rect">
-            <a:avLst/>
-          </a:prstGeom>
-          <a:noFill/>
-          <a:ln/>
-        </p:spPr>
-        <p:txBody>
-          <a:bodyPr wrap="square" lIns="0" tIns="0" rIns="0" bIns="0" rtlCol="0" anchor="ctr"/>
-          <a:lstStyle/>
-          <a:p>
-            <a:pPr algn="ctr" indent="0" marL="0">
-              <a:buNone/>
-            </a:pPr>
-            <a:r>
-              <a:rPr lang="en-US" sz="1300" b="1" dirty="0">
-                <a:solidFill>
-                  <a:srgbClr val="FFFFFF"/>
-                </a:solidFill>
-                <a:latin typeface="Calibri" pitchFamily="34" charset="0"/>
-                <a:ea typeface="Calibri" pitchFamily="34" charset="-122"/>
-                <a:cs typeface="Calibri" pitchFamily="34" charset="-120"/>
-              </a:rPr>
-              <a:t>2</a:t>
-            </a:r>
-            <a:endParaRPr lang="en-US" sz="1300" dirty="0"/>
-          </a:p>
-        </p:txBody>
-      </p:sp>
-      <p:sp>
-        <p:nvSpPr>
-          <p:cNvPr id="19" name="Text 16"/>
-          <p:cNvSpPr/>
-          <p:nvPr/>
-        </p:nvSpPr>
-        <p:spPr>
-          <a:xfrm>
-            <a:off x="6233922" y="2651760"/>
-            <a:ext cx="5177790" cy="877824"/>
-          </a:xfrm>
-          <a:prstGeom prst="rect">
-            <a:avLst/>
-          </a:prstGeom>
-          <a:noFill/>
-          <a:ln/>
-        </p:spPr>
-        <p:txBody>
-          <a:bodyPr wrap="square" lIns="0" tIns="0" rIns="0" bIns="0" rtlCol="0" anchor="t"/>
-          <a:lstStyle/>
-          <a:p>
-            <a:pPr algn="l" indent="0" marL="0">
-              <a:lnSpc>
-                <a:spcPct val="116000"/>
-              </a:lnSpc>
-              <a:buNone/>
-            </a:pPr>
-            <a:r>
-              <a:rPr lang="en-US" sz="1800" dirty="0">
-                <a:solidFill>
-                  <a:srgbClr val="111827"/>
-                </a:solidFill>
-                <a:latin typeface="Calibri" pitchFamily="34" charset="0"/>
-                <a:ea typeface="Calibri" pitchFamily="34" charset="-122"/>
-                <a:cs typeface="Calibri" pitchFamily="34" charset="-120"/>
-              </a:rPr>
-              <a:t>3. Predict one effect of stronger solar heating on the water cycle and justify your answer.</a:t>
-            </a:r>
-            <a:endParaRPr lang="en-US" sz="1800" dirty="0"/>
-          </a:p>
-        </p:txBody>
-      </p:sp>
-    </p:spTree>
-  </p:cSld>
-  <p:clrMapOvr>
-    <a:masterClrMapping/>
-  </p:clrMapOvr>
-</p:sld>
-</file>
-
-<file path=ppt/slides/slide15.xml><?xml version="1.0" encoding="utf-8"?>
-<p:sld xmlns:a="http://schemas.openxmlformats.org/drawingml/2006/main" xmlns:r="http://schemas.openxmlformats.org/officeDocument/2006/relationships" xmlns:p="http://schemas.openxmlformats.org/presentationml/2006/main">
-  <p:cSld name="Slide 15">
-    <p:bg>
-      <p:bgPr>
-        <a:solidFill>
-          <a:srgbClr val="FFFFFF"/>
-        </a:solidFill>
-      </p:bgPr>
-    </p:bg>
-    <p:spTree>
-      <p:nvGrpSpPr>
-        <p:cNvPr id="1" name=""/>
-        <p:cNvGrpSpPr/>
-        <p:nvPr/>
-      </p:nvGrpSpPr>
-      <p:grpSpPr>
-        <a:xfrm>
-          <a:off x="0" y="0"/>
-          <a:ext cx="0" cy="0"/>
-          <a:chOff x="0" y="0"/>
-          <a:chExt cx="0" cy="0"/>
-        </a:xfrm>
-      </p:grpSpPr>
-      <p:sp>
-        <p:nvSpPr>
-          <p:cNvPr id="2" name="Text 0"/>
-          <p:cNvSpPr/>
-          <p:nvPr/>
-        </p:nvSpPr>
-        <p:spPr>
-          <a:xfrm>
-            <a:off x="621792" y="347472"/>
-            <a:ext cx="10948111" cy="713232"/>
-          </a:xfrm>
-          <a:prstGeom prst="rect">
-            <a:avLst/>
-          </a:prstGeom>
-          <a:noFill/>
-          <a:ln/>
-        </p:spPr>
-        <p:txBody>
-          <a:bodyPr wrap="square" lIns="0" tIns="0" rIns="0" bIns="0" rtlCol="0" anchor="ctr"/>
-          <a:lstStyle/>
-          <a:p>
-            <a:pPr algn="l" indent="0" marL="0">
-              <a:lnSpc>
-                <a:spcPct val="116000"/>
-              </a:lnSpc>
-              <a:buNone/>
-            </a:pPr>
-            <a:r>
-              <a:rPr lang="en-US" sz="3400" b="1" dirty="0">
-                <a:solidFill>
-                  <a:srgbClr val="111827"/>
-                </a:solidFill>
-                <a:latin typeface="Calibri" pitchFamily="34" charset="0"/>
-                <a:ea typeface="Calibri" pitchFamily="34" charset="-122"/>
-                <a:cs typeface="Calibri" pitchFamily="34" charset="-120"/>
-              </a:rPr>
-              <a:t>Success Criteria and Self Evaluation</a:t>
-            </a:r>
-            <a:endParaRPr lang="en-US" sz="3400" dirty="0"/>
-          </a:p>
-        </p:txBody>
-      </p:sp>
-      <p:sp>
-        <p:nvSpPr>
-          <p:cNvPr id="3" name="Shape 1"/>
-          <p:cNvSpPr/>
-          <p:nvPr/>
-        </p:nvSpPr>
-        <p:spPr>
-          <a:xfrm>
-            <a:off x="621792" y="1207008"/>
-            <a:ext cx="10948111" cy="0"/>
-          </a:xfrm>
-          <a:prstGeom prst="line">
-            <a:avLst/>
-          </a:prstGeom>
-          <a:noFill/>
-          <a:ln w="12700">
-            <a:solidFill>
-              <a:srgbClr val="CFF6ED"/>
-            </a:solidFill>
-            <a:prstDash val="solid"/>
-          </a:ln>
-        </p:spPr>
-      </p:sp>
-      <p:sp>
-        <p:nvSpPr>
-          <p:cNvPr id="4" name="Shape 2"/>
-          <p:cNvSpPr/>
-          <p:nvPr/>
-        </p:nvSpPr>
-        <p:spPr>
-          <a:xfrm>
-            <a:off x="0" y="6492240"/>
-            <a:ext cx="12191695" cy="365760"/>
-          </a:xfrm>
-          <a:prstGeom prst="rect">
-            <a:avLst/>
-          </a:prstGeom>
-          <a:solidFill>
-            <a:srgbClr val="F0FDFB"/>
-          </a:solidFill>
-          <a:ln w="12700">
-            <a:solidFill>
-              <a:srgbClr val="F0FDFB"/>
-            </a:solidFill>
-            <a:prstDash val="solid"/>
-          </a:ln>
-        </p:spPr>
-      </p:sp>
-      <p:sp>
-        <p:nvSpPr>
-          <p:cNvPr id="5" name="Shape 3"/>
-          <p:cNvSpPr/>
-          <p:nvPr/>
-        </p:nvSpPr>
-        <p:spPr>
-          <a:xfrm>
-            <a:off x="0" y="6492240"/>
-            <a:ext cx="12191695" cy="0"/>
-          </a:xfrm>
-          <a:prstGeom prst="line">
-            <a:avLst/>
-          </a:prstGeom>
-          <a:noFill/>
-          <a:ln w="12700">
-            <a:solidFill>
-              <a:srgbClr val="A7F3E8"/>
-            </a:solidFill>
-            <a:prstDash val="solid"/>
-          </a:ln>
-        </p:spPr>
-      </p:sp>
-      <p:sp>
-        <p:nvSpPr>
-          <p:cNvPr id="6" name="Text 4"/>
-          <p:cNvSpPr/>
-          <p:nvPr/>
-        </p:nvSpPr>
-        <p:spPr>
-          <a:xfrm>
-            <a:off x="274320" y="6556248"/>
-            <a:ext cx="4754880" cy="237744"/>
-          </a:xfrm>
-          <a:prstGeom prst="rect">
-            <a:avLst/>
-          </a:prstGeom>
-          <a:noFill/>
-          <a:ln/>
-        </p:spPr>
-        <p:txBody>
-          <a:bodyPr wrap="square" rtlCol="0" anchor="ctr"/>
-          <a:lstStyle/>
-          <a:p>
-            <a:pPr indent="0" marL="0">
-              <a:buNone/>
-            </a:pPr>
-            <a:r>
-              <a:rPr lang="en-US" sz="1200" dirty="0">
-                <a:solidFill>
-                  <a:srgbClr val="087866"/>
-                </a:solidFill>
-                <a:latin typeface="Calibri" pitchFamily="34" charset="0"/>
-                <a:ea typeface="Calibri" pitchFamily="34" charset="-122"/>
-                <a:cs typeface="Calibri" pitchFamily="34" charset="-120"/>
-              </a:rPr>
-              <a:t>Science</a:t>
-            </a:r>
-            <a:endParaRPr lang="en-US" sz="1200" dirty="0"/>
-          </a:p>
-        </p:txBody>
-      </p:sp>
-      <p:pic>
-        <p:nvPicPr>
-          <p:cNvPr id="7" name="Image 0" descr="Layah">    </p:cNvPr>
-          <p:cNvPicPr>
-            <a:picLocks noChangeAspect="1"/>
-          </p:cNvPicPr>
-          <p:nvPr/>
-        </p:nvPicPr>
-        <p:blipFill>
-          <a:blip r:embed="rId1"/>
-          <a:stretch>
-            <a:fillRect/>
-          </a:stretch>
-        </p:blipFill>
-        <p:spPr>
-          <a:xfrm>
-            <a:off x="5394960" y="6528816"/>
-            <a:ext cx="1051560" cy="292608"/>
-          </a:xfrm>
-          <a:prstGeom prst="rect">
-            <a:avLst/>
-          </a:prstGeom>
-        </p:spPr>
-      </p:pic>
-      <p:sp>
-        <p:nvSpPr>
-          <p:cNvPr id="8" name="Text 5"/>
-          <p:cNvSpPr/>
-          <p:nvPr/>
-        </p:nvSpPr>
-        <p:spPr>
-          <a:xfrm>
-            <a:off x="10225735" y="6556248"/>
-            <a:ext cx="1691640" cy="237744"/>
-          </a:xfrm>
-          <a:prstGeom prst="rect">
-            <a:avLst/>
-          </a:prstGeom>
-          <a:noFill/>
-          <a:ln/>
-        </p:spPr>
-        <p:txBody>
-          <a:bodyPr wrap="square" rtlCol="0" anchor="ctr"/>
-          <a:lstStyle/>
-          <a:p>
-            <a:pPr algn="r" indent="0" marL="0">
-              <a:buNone/>
-            </a:pPr>
-            <a:r>
-              <a:rPr lang="en-US" sz="1200" dirty="0">
-                <a:solidFill>
-                  <a:srgbClr val="087866"/>
-                </a:solidFill>
-                <a:latin typeface="Calibri" pitchFamily="34" charset="0"/>
-                <a:ea typeface="Calibri" pitchFamily="34" charset="-122"/>
-                <a:cs typeface="Calibri" pitchFamily="34" charset="-120"/>
-              </a:rPr>
-              <a:t>15 / 16</a:t>
-            </a:r>
-            <a:endParaRPr lang="en-US" sz="1200" dirty="0"/>
-          </a:p>
-        </p:txBody>
-      </p:sp>
-      <p:sp>
-        <p:nvSpPr>
-          <p:cNvPr id="9" name="Shape 6"/>
-          <p:cNvSpPr/>
-          <p:nvPr/>
-        </p:nvSpPr>
-        <p:spPr>
-          <a:xfrm>
-            <a:off x="274320" y="6510528"/>
-            <a:ext cx="11643055" cy="73152"/>
-          </a:xfrm>
-          <a:prstGeom prst="roundRect">
-            <a:avLst>
-              <a:gd name="adj" fmla="val 50000"/>
-            </a:avLst>
-          </a:prstGeom>
-          <a:solidFill>
-            <a:srgbClr val="CCFAF3"/>
-          </a:solidFill>
-          <a:ln w="12700">
-            <a:solidFill>
-              <a:srgbClr val="CCFAF3"/>
-            </a:solidFill>
-            <a:prstDash val="solid"/>
-          </a:ln>
-        </p:spPr>
-      </p:sp>
-      <p:sp>
-        <p:nvSpPr>
-          <p:cNvPr id="10" name="Shape 7"/>
-          <p:cNvSpPr/>
-          <p:nvPr/>
-        </p:nvSpPr>
-        <p:spPr>
-          <a:xfrm>
-            <a:off x="274320" y="6510528"/>
-            <a:ext cx="10915364" cy="73152"/>
-          </a:xfrm>
-          <a:prstGeom prst="roundRect">
-            <a:avLst>
-              <a:gd name="adj" fmla="val 50000"/>
-            </a:avLst>
-          </a:prstGeom>
-          <a:solidFill>
-            <a:srgbClr val="0A8F7A"/>
-          </a:solidFill>
-          <a:ln w="12700">
-            <a:solidFill>
-              <a:srgbClr val="0A8F7A"/>
-            </a:solidFill>
-            <a:prstDash val="solid"/>
-          </a:ln>
-        </p:spPr>
-      </p:sp>
-      <p:sp>
-        <p:nvSpPr>
-          <p:cNvPr id="11" name="Shape 8"/>
-          <p:cNvSpPr/>
-          <p:nvPr/>
-        </p:nvSpPr>
-        <p:spPr>
-          <a:xfrm>
-            <a:off x="941832" y="1723987"/>
-            <a:ext cx="294208" cy="294208"/>
-          </a:xfrm>
-          <a:prstGeom prst="rect">
-            <a:avLst/>
-          </a:prstGeom>
-          <a:solidFill>
-            <a:srgbClr val="FFFFFF">
-              <a:alpha val="0"/>
-            </a:srgbClr>
-          </a:solidFill>
-          <a:ln w="12700">
-            <a:solidFill>
-              <a:srgbClr val="087866"/>
-            </a:solidFill>
-            <a:prstDash val="solid"/>
-          </a:ln>
-        </p:spPr>
-      </p:sp>
-      <p:sp>
-        <p:nvSpPr>
-          <p:cNvPr id="12" name="Text 9"/>
-          <p:cNvSpPr/>
-          <p:nvPr/>
-        </p:nvSpPr>
-        <p:spPr>
-          <a:xfrm>
-            <a:off x="1437894" y="1664208"/>
-            <a:ext cx="9992106" cy="715264"/>
-          </a:xfrm>
-          <a:prstGeom prst="rect">
-            <a:avLst/>
-          </a:prstGeom>
-          <a:noFill/>
-          <a:ln/>
-        </p:spPr>
-        <p:txBody>
-          <a:bodyPr wrap="square" lIns="0" tIns="0" rIns="0" bIns="0" rtlCol="0" anchor="t"/>
-          <a:lstStyle/>
-          <a:p>
-            <a:pPr algn="l" indent="0" marL="0">
-              <a:lnSpc>
-                <a:spcPct val="116000"/>
-              </a:lnSpc>
-              <a:buNone/>
-            </a:pPr>
-            <a:r>
-              <a:rPr lang="en-US" sz="2200" dirty="0">
-                <a:solidFill>
-                  <a:srgbClr val="111827"/>
-                </a:solidFill>
-                <a:latin typeface="Calibri" pitchFamily="34" charset="0"/>
-                <a:ea typeface="Calibri" pitchFamily="34" charset="-122"/>
-                <a:cs typeface="Calibri" pitchFamily="34" charset="-120"/>
-              </a:rPr>
-              <a:t>I can label evaporation, condensation, precipitation and collection on an unfamiliar diagram.</a:t>
-            </a:r>
-            <a:endParaRPr lang="en-US" sz="2200" dirty="0"/>
-          </a:p>
-        </p:txBody>
-      </p:sp>
-      <p:sp>
-        <p:nvSpPr>
-          <p:cNvPr id="13" name="Shape 10"/>
-          <p:cNvSpPr/>
-          <p:nvPr/>
-        </p:nvSpPr>
-        <p:spPr>
-          <a:xfrm>
-            <a:off x="914400" y="2516473"/>
-            <a:ext cx="10515600" cy="0"/>
-          </a:xfrm>
-          <a:prstGeom prst="line">
-            <a:avLst/>
-          </a:prstGeom>
-          <a:noFill/>
-          <a:ln w="12700">
-            <a:solidFill>
-              <a:srgbClr val="CFF6ED"/>
-            </a:solidFill>
-            <a:prstDash val="solid"/>
-          </a:ln>
-        </p:spPr>
-      </p:sp>
-      <p:sp>
-        <p:nvSpPr>
-          <p:cNvPr id="14" name="Shape 11"/>
-          <p:cNvSpPr/>
-          <p:nvPr/>
-        </p:nvSpPr>
-        <p:spPr>
-          <a:xfrm>
-            <a:off x="941832" y="2713253"/>
-            <a:ext cx="294208" cy="294208"/>
-          </a:xfrm>
-          <a:prstGeom prst="rect">
-            <a:avLst/>
-          </a:prstGeom>
-          <a:solidFill>
-            <a:srgbClr val="FFFFFF">
-              <a:alpha val="0"/>
-            </a:srgbClr>
-          </a:solidFill>
-          <a:ln w="12700">
-            <a:solidFill>
-              <a:srgbClr val="087866"/>
-            </a:solidFill>
-            <a:prstDash val="solid"/>
-          </a:ln>
-        </p:spPr>
-      </p:sp>
-      <p:sp>
-        <p:nvSpPr>
-          <p:cNvPr id="15" name="Text 12"/>
-          <p:cNvSpPr/>
-          <p:nvPr/>
-        </p:nvSpPr>
-        <p:spPr>
-          <a:xfrm>
-            <a:off x="1437894" y="2653475"/>
-            <a:ext cx="9992106" cy="715264"/>
-          </a:xfrm>
-          <a:prstGeom prst="rect">
-            <a:avLst/>
-          </a:prstGeom>
-          <a:noFill/>
-          <a:ln/>
-        </p:spPr>
-        <p:txBody>
-          <a:bodyPr wrap="square" lIns="0" tIns="0" rIns="0" bIns="0" rtlCol="0" anchor="t"/>
-          <a:lstStyle/>
-          <a:p>
-            <a:pPr algn="l" indent="0" marL="0">
-              <a:lnSpc>
-                <a:spcPct val="116000"/>
-              </a:lnSpc>
-              <a:buNone/>
-            </a:pPr>
-            <a:r>
-              <a:rPr lang="en-US" sz="2200" dirty="0">
-                <a:solidFill>
-                  <a:srgbClr val="111827"/>
-                </a:solidFill>
-                <a:latin typeface="Calibri" pitchFamily="34" charset="0"/>
-                <a:ea typeface="Calibri" pitchFamily="34" charset="-122"/>
-                <a:cs typeface="Calibri" pitchFamily="34" charset="-120"/>
-              </a:rPr>
-              <a:t>I can explain evaporation and condensation using energy and particles.</a:t>
-            </a:r>
-            <a:endParaRPr lang="en-US" sz="2200" dirty="0"/>
-          </a:p>
-        </p:txBody>
-      </p:sp>
-      <p:sp>
-        <p:nvSpPr>
-          <p:cNvPr id="16" name="Shape 13"/>
-          <p:cNvSpPr/>
-          <p:nvPr/>
-        </p:nvSpPr>
-        <p:spPr>
-          <a:xfrm>
-            <a:off x="914400" y="3505740"/>
-            <a:ext cx="10515600" cy="0"/>
-          </a:xfrm>
-          <a:prstGeom prst="line">
-            <a:avLst/>
-          </a:prstGeom>
-          <a:noFill/>
-          <a:ln w="12700">
-            <a:solidFill>
-              <a:srgbClr val="CFF6ED"/>
-            </a:solidFill>
-            <a:prstDash val="solid"/>
-          </a:ln>
-        </p:spPr>
-      </p:sp>
-      <p:sp>
-        <p:nvSpPr>
-          <p:cNvPr id="17" name="Shape 14"/>
-          <p:cNvSpPr/>
-          <p:nvPr/>
-        </p:nvSpPr>
-        <p:spPr>
-          <a:xfrm>
-            <a:off x="941832" y="3702520"/>
-            <a:ext cx="294208" cy="294208"/>
-          </a:xfrm>
-          <a:prstGeom prst="rect">
-            <a:avLst/>
-          </a:prstGeom>
-          <a:solidFill>
-            <a:srgbClr val="FFFFFF">
-              <a:alpha val="0"/>
-            </a:srgbClr>
-          </a:solidFill>
-          <a:ln w="12700">
-            <a:solidFill>
-              <a:srgbClr val="087866"/>
-            </a:solidFill>
-            <a:prstDash val="solid"/>
-          </a:ln>
-        </p:spPr>
-      </p:sp>
-      <p:sp>
-        <p:nvSpPr>
-          <p:cNvPr id="18" name="Text 15"/>
-          <p:cNvSpPr/>
-          <p:nvPr/>
-        </p:nvSpPr>
-        <p:spPr>
-          <a:xfrm>
-            <a:off x="1437894" y="3642741"/>
-            <a:ext cx="9992106" cy="715264"/>
-          </a:xfrm>
-          <a:prstGeom prst="rect">
-            <a:avLst/>
-          </a:prstGeom>
-          <a:noFill/>
-          <a:ln/>
-        </p:spPr>
-        <p:txBody>
-          <a:bodyPr wrap="square" lIns="0" tIns="0" rIns="0" bIns="0" rtlCol="0" anchor="t"/>
-          <a:lstStyle/>
-          <a:p>
-            <a:pPr algn="l" indent="0" marL="0">
-              <a:lnSpc>
-                <a:spcPct val="116000"/>
-              </a:lnSpc>
-              <a:buNone/>
-            </a:pPr>
-            <a:r>
-              <a:rPr lang="en-US" sz="2200" dirty="0">
-                <a:solidFill>
-                  <a:srgbClr val="111827"/>
-                </a:solidFill>
-                <a:latin typeface="Calibri" pitchFamily="34" charset="0"/>
-                <a:ea typeface="Calibri" pitchFamily="34" charset="-122"/>
-                <a:cs typeface="Calibri" pitchFamily="34" charset="-120"/>
-              </a:rPr>
-              <a:t>I can trace water through four stages without creating or losing water.</a:t>
-            </a:r>
-            <a:endParaRPr lang="en-US" sz="2200" dirty="0"/>
-          </a:p>
-        </p:txBody>
-      </p:sp>
-      <p:sp>
-        <p:nvSpPr>
-          <p:cNvPr id="19" name="Shape 16"/>
-          <p:cNvSpPr/>
-          <p:nvPr/>
-        </p:nvSpPr>
-        <p:spPr>
-          <a:xfrm>
-            <a:off x="914400" y="4495006"/>
-            <a:ext cx="10515600" cy="0"/>
-          </a:xfrm>
-          <a:prstGeom prst="line">
-            <a:avLst/>
-          </a:prstGeom>
-          <a:noFill/>
-          <a:ln w="12700">
-            <a:solidFill>
-              <a:srgbClr val="CFF6ED"/>
-            </a:solidFill>
-            <a:prstDash val="solid"/>
-          </a:ln>
-        </p:spPr>
-      </p:sp>
-      <p:sp>
-        <p:nvSpPr>
-          <p:cNvPr id="20" name="Shape 17"/>
-          <p:cNvSpPr/>
-          <p:nvPr/>
-        </p:nvSpPr>
-        <p:spPr>
-          <a:xfrm>
-            <a:off x="941832" y="4691786"/>
-            <a:ext cx="294208" cy="294208"/>
-          </a:xfrm>
-          <a:prstGeom prst="rect">
-            <a:avLst/>
-          </a:prstGeom>
-          <a:solidFill>
-            <a:srgbClr val="FFFFFF">
-              <a:alpha val="0"/>
-            </a:srgbClr>
-          </a:solidFill>
-          <a:ln w="12700">
-            <a:solidFill>
-              <a:srgbClr val="087866"/>
-            </a:solidFill>
-            <a:prstDash val="solid"/>
-          </a:ln>
-        </p:spPr>
-      </p:sp>
-      <p:sp>
-        <p:nvSpPr>
-          <p:cNvPr id="21" name="Text 18"/>
-          <p:cNvSpPr/>
-          <p:nvPr/>
-        </p:nvSpPr>
-        <p:spPr>
-          <a:xfrm>
-            <a:off x="1437894" y="4632008"/>
-            <a:ext cx="9992106" cy="395478"/>
-          </a:xfrm>
-          <a:prstGeom prst="rect">
-            <a:avLst/>
-          </a:prstGeom>
-          <a:noFill/>
-          <a:ln/>
-        </p:spPr>
-        <p:txBody>
-          <a:bodyPr wrap="square" lIns="0" tIns="0" rIns="0" bIns="0" rtlCol="0" anchor="t"/>
-          <a:lstStyle/>
-          <a:p>
-            <a:pPr algn="l" indent="0" marL="0">
-              <a:lnSpc>
-                <a:spcPct val="116000"/>
-              </a:lnSpc>
-              <a:buNone/>
-            </a:pPr>
-            <a:r>
-              <a:rPr lang="en-US" sz="2200" dirty="0">
-                <a:solidFill>
-                  <a:srgbClr val="111827"/>
-                </a:solidFill>
-                <a:latin typeface="Calibri" pitchFamily="34" charset="0"/>
-                <a:ea typeface="Calibri" pitchFamily="34" charset="-122"/>
-                <a:cs typeface="Calibri" pitchFamily="34" charset="-120"/>
-              </a:rPr>
-              <a:t>I can use evidence to predict how temperature affects evaporation.</a:t>
-            </a:r>
-            <a:endParaRPr lang="en-US" sz="2200" dirty="0"/>
-          </a:p>
-        </p:txBody>
-      </p:sp>
-      <p:sp>
-        <p:nvSpPr>
-          <p:cNvPr id="22" name="Shape 19"/>
-          <p:cNvSpPr/>
-          <p:nvPr/>
-        </p:nvSpPr>
-        <p:spPr>
-          <a:xfrm>
-            <a:off x="914400" y="5164487"/>
-            <a:ext cx="10515600" cy="0"/>
-          </a:xfrm>
-          <a:prstGeom prst="line">
-            <a:avLst/>
-          </a:prstGeom>
-          <a:noFill/>
-          <a:ln w="12700">
-            <a:solidFill>
-              <a:srgbClr val="CFF6ED"/>
-            </a:solidFill>
-            <a:prstDash val="solid"/>
-          </a:ln>
-        </p:spPr>
-      </p:sp>
-      <p:sp>
-        <p:nvSpPr>
-          <p:cNvPr id="23" name="Shape 20"/>
-          <p:cNvSpPr/>
-          <p:nvPr/>
-        </p:nvSpPr>
-        <p:spPr>
-          <a:xfrm>
-            <a:off x="941832" y="5361267"/>
-            <a:ext cx="294208" cy="294208"/>
-          </a:xfrm>
-          <a:prstGeom prst="rect">
-            <a:avLst/>
-          </a:prstGeom>
-          <a:solidFill>
-            <a:srgbClr val="FFFFFF">
-              <a:alpha val="0"/>
-            </a:srgbClr>
-          </a:solidFill>
-          <a:ln w="12700">
-            <a:solidFill>
-              <a:srgbClr val="087866"/>
-            </a:solidFill>
-            <a:prstDash val="solid"/>
-          </a:ln>
-        </p:spPr>
-      </p:sp>
-      <p:sp>
-        <p:nvSpPr>
-          <p:cNvPr id="24" name="Text 21"/>
-          <p:cNvSpPr/>
-          <p:nvPr/>
-        </p:nvSpPr>
-        <p:spPr>
-          <a:xfrm>
-            <a:off x="1437894" y="5301488"/>
-            <a:ext cx="9992106" cy="715264"/>
-          </a:xfrm>
-          <a:prstGeom prst="rect">
-            <a:avLst/>
-          </a:prstGeom>
-          <a:noFill/>
-          <a:ln/>
-        </p:spPr>
-        <p:txBody>
-          <a:bodyPr wrap="square" lIns="0" tIns="0" rIns="0" bIns="0" rtlCol="0" anchor="t"/>
-          <a:lstStyle/>
-          <a:p>
-            <a:pPr algn="l" indent="0" marL="0">
-              <a:lnSpc>
-                <a:spcPct val="116000"/>
-              </a:lnSpc>
-              <a:buNone/>
-            </a:pPr>
-            <a:r>
-              <a:rPr lang="en-US" sz="2200" dirty="0">
-                <a:solidFill>
-                  <a:srgbClr val="111827"/>
-                </a:solidFill>
-                <a:latin typeface="Calibri" pitchFamily="34" charset="0"/>
-                <a:ea typeface="Calibri" pitchFamily="34" charset="-122"/>
-                <a:cs typeface="Calibri" pitchFamily="34" charset="-120"/>
-              </a:rPr>
-              <a:t>Self-check: cite evidence for one criterion and select one to improve.</a:t>
-            </a:r>
-            <a:endParaRPr lang="en-US" sz="2200" dirty="0"/>
-          </a:p>
-        </p:txBody>
-      </p:sp>
-    </p:spTree>
-  </p:cSld>
-  <p:clrMapOvr>
-    <a:masterClrMapping/>
-  </p:clrMapOvr>
-</p:sld>
-</file>
-
-<file path=ppt/slides/slide16.xml><?xml version="1.0" encoding="utf-8"?>
-<p:sld xmlns:a="http://schemas.openxmlformats.org/drawingml/2006/main" xmlns:r="http://schemas.openxmlformats.org/officeDocument/2006/relationships" xmlns:p="http://schemas.openxmlformats.org/presentationml/2006/main">
-  <p:cSld name="Slide 16">
-    <p:bg>
-      <p:bgPr>
-        <a:solidFill>
-          <a:srgbClr val="FFFFFF"/>
-        </a:solidFill>
-      </p:bgPr>
-    </p:bg>
-    <p:spTree>
-      <p:nvGrpSpPr>
-        <p:cNvPr id="1" name=""/>
-        <p:cNvGrpSpPr/>
-        <p:nvPr/>
-      </p:nvGrpSpPr>
-      <p:grpSpPr>
-        <a:xfrm>
-          <a:off x="0" y="0"/>
-          <a:ext cx="0" cy="0"/>
-          <a:chOff x="0" y="0"/>
-          <a:chExt cx="0" cy="0"/>
-        </a:xfrm>
-      </p:grpSpPr>
-      <p:sp>
-        <p:nvSpPr>
-          <p:cNvPr id="2" name="Text 0"/>
-          <p:cNvSpPr/>
-          <p:nvPr/>
-        </p:nvSpPr>
-        <p:spPr>
-          <a:xfrm>
-            <a:off x="621792" y="347472"/>
-            <a:ext cx="10948111" cy="713232"/>
-          </a:xfrm>
-          <a:prstGeom prst="rect">
-            <a:avLst/>
-          </a:prstGeom>
-          <a:noFill/>
-          <a:ln/>
-        </p:spPr>
-        <p:txBody>
-          <a:bodyPr wrap="square" lIns="0" tIns="0" rIns="0" bIns="0" rtlCol="0" anchor="ctr"/>
-          <a:lstStyle/>
-          <a:p>
-            <a:pPr algn="l" indent="0" marL="0">
-              <a:lnSpc>
-                <a:spcPct val="116000"/>
-              </a:lnSpc>
-              <a:buNone/>
-            </a:pPr>
-            <a:r>
-              <a:rPr lang="en-US" sz="3400" b="1" dirty="0">
-                <a:solidFill>
-                  <a:srgbClr val="111827"/>
-                </a:solidFill>
-                <a:latin typeface="Calibri" pitchFamily="34" charset="0"/>
-                <a:ea typeface="Calibri" pitchFamily="34" charset="-122"/>
-                <a:cs typeface="Calibri" pitchFamily="34" charset="-120"/>
-              </a:rPr>
-              <a:t>Lesson Takeaway</a:t>
-            </a:r>
-            <a:endParaRPr lang="en-US" sz="3400" dirty="0"/>
-          </a:p>
-        </p:txBody>
-      </p:sp>
-      <p:sp>
-        <p:nvSpPr>
-          <p:cNvPr id="3" name="Shape 1"/>
-          <p:cNvSpPr/>
-          <p:nvPr/>
-        </p:nvSpPr>
-        <p:spPr>
-          <a:xfrm>
-            <a:off x="621792" y="1207008"/>
-            <a:ext cx="10948111" cy="0"/>
-          </a:xfrm>
-          <a:prstGeom prst="line">
-            <a:avLst/>
-          </a:prstGeom>
-          <a:noFill/>
-          <a:ln w="12700">
-            <a:solidFill>
-              <a:srgbClr val="CFF6ED"/>
-            </a:solidFill>
-            <a:prstDash val="solid"/>
-          </a:ln>
-        </p:spPr>
-      </p:sp>
-      <p:sp>
-        <p:nvSpPr>
-          <p:cNvPr id="4" name="Shape 2"/>
-          <p:cNvSpPr/>
-          <p:nvPr/>
-        </p:nvSpPr>
-        <p:spPr>
-          <a:xfrm>
-            <a:off x="0" y="6492240"/>
-            <a:ext cx="12191695" cy="365760"/>
-          </a:xfrm>
-          <a:prstGeom prst="rect">
-            <a:avLst/>
-          </a:prstGeom>
-          <a:solidFill>
-            <a:srgbClr val="F0FDFB"/>
-          </a:solidFill>
-          <a:ln w="12700">
-            <a:solidFill>
-              <a:srgbClr val="F0FDFB"/>
-            </a:solidFill>
-            <a:prstDash val="solid"/>
-          </a:ln>
-        </p:spPr>
-      </p:sp>
-      <p:sp>
-        <p:nvSpPr>
-          <p:cNvPr id="5" name="Shape 3"/>
-          <p:cNvSpPr/>
-          <p:nvPr/>
-        </p:nvSpPr>
-        <p:spPr>
-          <a:xfrm>
-            <a:off x="0" y="6492240"/>
-            <a:ext cx="12191695" cy="0"/>
-          </a:xfrm>
-          <a:prstGeom prst="line">
-            <a:avLst/>
-          </a:prstGeom>
-          <a:noFill/>
-          <a:ln w="12700">
-            <a:solidFill>
-              <a:srgbClr val="A7F3E8"/>
-            </a:solidFill>
-            <a:prstDash val="solid"/>
-          </a:ln>
-        </p:spPr>
-      </p:sp>
-      <p:sp>
-        <p:nvSpPr>
-          <p:cNvPr id="6" name="Text 4"/>
-          <p:cNvSpPr/>
-          <p:nvPr/>
-        </p:nvSpPr>
-        <p:spPr>
-          <a:xfrm>
-            <a:off x="274320" y="6556248"/>
-            <a:ext cx="4754880" cy="237744"/>
-          </a:xfrm>
-          <a:prstGeom prst="rect">
-            <a:avLst/>
-          </a:prstGeom>
-          <a:noFill/>
-          <a:ln/>
-        </p:spPr>
-        <p:txBody>
-          <a:bodyPr wrap="square" rtlCol="0" anchor="ctr"/>
-          <a:lstStyle/>
-          <a:p>
-            <a:pPr indent="0" marL="0">
-              <a:buNone/>
-            </a:pPr>
-            <a:r>
-              <a:rPr lang="en-US" sz="1200" dirty="0">
-                <a:solidFill>
-                  <a:srgbClr val="087866"/>
-                </a:solidFill>
-                <a:latin typeface="Calibri" pitchFamily="34" charset="0"/>
-                <a:ea typeface="Calibri" pitchFamily="34" charset="-122"/>
-                <a:cs typeface="Calibri" pitchFamily="34" charset="-120"/>
-              </a:rPr>
-              <a:t>Science</a:t>
-            </a:r>
-            <a:endParaRPr lang="en-US" sz="1200" dirty="0"/>
-          </a:p>
-        </p:txBody>
-      </p:sp>
-      <p:pic>
-        <p:nvPicPr>
-          <p:cNvPr id="7" name="Image 0" descr="Layah">    </p:cNvPr>
-          <p:cNvPicPr>
-            <a:picLocks noChangeAspect="1"/>
-          </p:cNvPicPr>
-          <p:nvPr/>
-        </p:nvPicPr>
-        <p:blipFill>
-          <a:blip r:embed="rId1"/>
-          <a:stretch>
-            <a:fillRect/>
-          </a:stretch>
-        </p:blipFill>
-        <p:spPr>
-          <a:xfrm>
-            <a:off x="5394960" y="6528816"/>
-            <a:ext cx="1051560" cy="292608"/>
-          </a:xfrm>
-          <a:prstGeom prst="rect">
-            <a:avLst/>
-          </a:prstGeom>
-        </p:spPr>
-      </p:pic>
-      <p:sp>
-        <p:nvSpPr>
-          <p:cNvPr id="8" name="Text 5"/>
-          <p:cNvSpPr/>
-          <p:nvPr/>
-        </p:nvSpPr>
-        <p:spPr>
-          <a:xfrm>
-            <a:off x="10225735" y="6556248"/>
-            <a:ext cx="1691640" cy="237744"/>
-          </a:xfrm>
-          <a:prstGeom prst="rect">
-            <a:avLst/>
-          </a:prstGeom>
-          <a:noFill/>
-          <a:ln/>
-        </p:spPr>
-        <p:txBody>
-          <a:bodyPr wrap="square" rtlCol="0" anchor="ctr"/>
-          <a:lstStyle/>
-          <a:p>
-            <a:pPr algn="r" indent="0" marL="0">
-              <a:buNone/>
-            </a:pPr>
-            <a:r>
-              <a:rPr lang="en-US" sz="1200" dirty="0">
-                <a:solidFill>
-                  <a:srgbClr val="087866"/>
-                </a:solidFill>
-                <a:latin typeface="Calibri" pitchFamily="34" charset="0"/>
-                <a:ea typeface="Calibri" pitchFamily="34" charset="-122"/>
-                <a:cs typeface="Calibri" pitchFamily="34" charset="-120"/>
-              </a:rPr>
-              <a:t>16 / 16</a:t>
+              <a:t>13 / 13</a:t>
             </a:r>
             <a:endParaRPr lang="en-US" sz="1200" dirty="0"/>
           </a:p>
@@ -8294,7 +5274,7 @@
                 <a:ea typeface="Calibri" pitchFamily="34" charset="-122"/>
                 <a:cs typeface="Calibri" pitchFamily="34" charset="-120"/>
               </a:rPr>
-              <a:t>2 / 16</a:t>
+              <a:t>2 / 13</a:t>
             </a:r>
             <a:endParaRPr lang="en-US" sz="1200" dirty="0"/>
           </a:p>
@@ -8336,7 +5316,7 @@
         <p:spPr>
           <a:xfrm>
             <a:off x="274320" y="6510528"/>
-            <a:ext cx="1455382" cy="73152"/>
+            <a:ext cx="1791239" cy="73152"/>
           </a:xfrm>
           <a:prstGeom prst="roundRect">
             <a:avLst>
@@ -8913,7 +5893,7 @@
                 <a:ea typeface="Calibri" pitchFamily="34" charset="-122"/>
                 <a:cs typeface="Calibri" pitchFamily="34" charset="-120"/>
               </a:rPr>
-              <a:t>3 / 16</a:t>
+              <a:t>3 / 13</a:t>
             </a:r>
             <a:endParaRPr lang="en-US" sz="1200" dirty="0"/>
           </a:p>
@@ -8955,7 +5935,7 @@
         <p:spPr>
           <a:xfrm>
             <a:off x="274320" y="6510528"/>
-            <a:ext cx="2183073" cy="73152"/>
+            <a:ext cx="2686859" cy="73152"/>
           </a:xfrm>
           <a:prstGeom prst="roundRect">
             <a:avLst>
@@ -9390,7 +6370,7 @@
                 <a:ea typeface="Calibri" pitchFamily="34" charset="-122"/>
                 <a:cs typeface="Calibri" pitchFamily="34" charset="-120"/>
               </a:rPr>
-              <a:t>4 / 16</a:t>
+              <a:t>4 / 13</a:t>
             </a:r>
             <a:endParaRPr lang="en-US" sz="1200" dirty="0"/>
           </a:p>
@@ -9432,7 +6412,7 @@
         <p:spPr>
           <a:xfrm>
             <a:off x="274320" y="6510528"/>
-            <a:ext cx="2910764" cy="73152"/>
+            <a:ext cx="3582479" cy="73152"/>
           </a:xfrm>
           <a:prstGeom prst="roundRect">
             <a:avLst>
@@ -9760,7 +6740,7 @@
                 <a:ea typeface="Calibri" pitchFamily="34" charset="-122"/>
                 <a:cs typeface="Calibri" pitchFamily="34" charset="-120"/>
               </a:rPr>
-              <a:t>5 / 16</a:t>
+              <a:t>5 / 13</a:t>
             </a:r>
             <a:endParaRPr lang="en-US" sz="1200" dirty="0"/>
           </a:p>
@@ -9802,7 +6782,7 @@
         <p:spPr>
           <a:xfrm>
             <a:off x="274320" y="6510528"/>
-            <a:ext cx="3638455" cy="73152"/>
+            <a:ext cx="4478098" cy="73152"/>
           </a:xfrm>
           <a:prstGeom prst="roundRect">
             <a:avLst>
@@ -10314,7 +7294,7 @@
                 <a:ea typeface="Calibri" pitchFamily="34" charset="-122"/>
                 <a:cs typeface="Calibri" pitchFamily="34" charset="-120"/>
               </a:rPr>
-              <a:t>6 / 16</a:t>
+              <a:t>6 / 13</a:t>
             </a:r>
             <a:endParaRPr lang="en-US" sz="1200" dirty="0"/>
           </a:p>
@@ -10356,7 +7336,7 @@
         <p:spPr>
           <a:xfrm>
             <a:off x="274320" y="6510528"/>
-            <a:ext cx="4366146" cy="73152"/>
+            <a:ext cx="5373718" cy="73152"/>
           </a:xfrm>
           <a:prstGeom prst="roundRect">
             <a:avLst>
@@ -10833,7 +7813,7 @@
                 <a:ea typeface="Calibri" pitchFamily="34" charset="-122"/>
                 <a:cs typeface="Calibri" pitchFamily="34" charset="-120"/>
               </a:rPr>
-              <a:t>7 / 16</a:t>
+              <a:t>7 / 13</a:t>
             </a:r>
             <a:endParaRPr lang="en-US" sz="1200" dirty="0"/>
           </a:p>
@@ -10875,7 +7855,7 @@
         <p:spPr>
           <a:xfrm>
             <a:off x="274320" y="6510528"/>
-            <a:ext cx="5093837" cy="73152"/>
+            <a:ext cx="6269337" cy="73152"/>
           </a:xfrm>
           <a:prstGeom prst="roundRect">
             <a:avLst>
@@ -10902,7 +7882,7 @@
         <p:spPr>
           <a:xfrm>
             <a:off x="749808" y="1591056"/>
-            <a:ext cx="292608" cy="292608"/>
+            <a:ext cx="377190" cy="377190"/>
           </a:xfrm>
           <a:prstGeom prst="ellipse">
             <a:avLst/>
@@ -10927,7 +7907,7 @@
         <p:spPr>
           <a:xfrm>
             <a:off x="749808" y="1591056"/>
-            <a:ext cx="292608" cy="292608"/>
+            <a:ext cx="377190" cy="377190"/>
           </a:xfrm>
           <a:prstGeom prst="rect">
             <a:avLst/>
@@ -10943,7 +7923,7 @@
               <a:buNone/>
             </a:pPr>
             <a:r>
-              <a:rPr lang="en-US" sz="1200" b="1" dirty="0">
+              <a:rPr lang="en-US" sz="1500" b="1" dirty="0">
                 <a:solidFill>
                   <a:srgbClr val="FFFFFF"/>
                 </a:solidFill>
@@ -10953,7 +7933,7 @@
               </a:rPr>
               <a:t>1</a:t>
             </a:r>
-            <a:endParaRPr lang="en-US" sz="1200" dirty="0"/>
+            <a:endParaRPr lang="en-US" sz="1500" dirty="0"/>
           </a:p>
         </p:txBody>
       </p:sp>
@@ -10965,8 +7945,8 @@
         </p:nvSpPr>
         <p:spPr>
           <a:xfrm>
-            <a:off x="1188720" y="1572768"/>
-            <a:ext cx="10259568" cy="310896"/>
+            <a:off x="1273302" y="1572768"/>
+            <a:ext cx="10174986" cy="715264"/>
           </a:xfrm>
           <a:prstGeom prst="rect">
             <a:avLst/>
@@ -10985,7 +7965,7 @@
               <a:buNone/>
             </a:pPr>
             <a:r>
-              <a:rPr lang="en-US" sz="1600" dirty="0">
+              <a:rPr lang="en-US" sz="2200" dirty="0">
                 <a:solidFill>
                   <a:srgbClr val="111827"/>
                 </a:solidFill>
@@ -10993,9 +7973,9 @@
                 <a:ea typeface="Calibri" pitchFamily="34" charset="-122"/>
                 <a:cs typeface="Calibri" pitchFamily="34" charset="-120"/>
               </a:rPr>
-              <a:t>Higher Achievers task</a:t>
-            </a:r>
-            <a:endParaRPr lang="en-US" sz="1600" dirty="0"/>
+              <a:t>Higher Achievers task: Predict how a 5 °C temperature rise could change evaporation and rainfall. Give two linked scientific reasons.</a:t>
+            </a:r>
+            <a:endParaRPr lang="en-US" sz="2200" dirty="0"/>
           </a:p>
         </p:txBody>
       </p:sp>
@@ -11007,8 +7987,8 @@
         </p:nvSpPr>
         <p:spPr>
           <a:xfrm>
-            <a:off x="749808" y="2107692"/>
-            <a:ext cx="292608" cy="292608"/>
+            <a:off x="749808" y="2763520"/>
+            <a:ext cx="377190" cy="377190"/>
           </a:xfrm>
           <a:prstGeom prst="ellipse">
             <a:avLst/>
@@ -11032,8 +8012,8 @@
         </p:nvSpPr>
         <p:spPr>
           <a:xfrm>
-            <a:off x="749808" y="2107692"/>
-            <a:ext cx="292608" cy="292608"/>
+            <a:off x="749808" y="2763520"/>
+            <a:ext cx="377190" cy="377190"/>
           </a:xfrm>
           <a:prstGeom prst="rect">
             <a:avLst/>
@@ -11049,7 +8029,7 @@
               <a:buNone/>
             </a:pPr>
             <a:r>
-              <a:rPr lang="en-US" sz="1200" b="1" dirty="0">
+              <a:rPr lang="en-US" sz="1500" b="1" dirty="0">
                 <a:solidFill>
                   <a:srgbClr val="FFFFFF"/>
                 </a:solidFill>
@@ -11059,7 +8039,7 @@
               </a:rPr>
               <a:t>2</a:t>
             </a:r>
-            <a:endParaRPr lang="en-US" sz="1200" dirty="0"/>
+            <a:endParaRPr lang="en-US" sz="1500" dirty="0"/>
           </a:p>
         </p:txBody>
       </p:sp>
@@ -11071,8 +8051,8 @@
         </p:nvSpPr>
         <p:spPr>
           <a:xfrm>
-            <a:off x="1188720" y="2089404"/>
-            <a:ext cx="10259568" cy="310896"/>
+            <a:off x="1273302" y="2745232"/>
+            <a:ext cx="10174986" cy="715264"/>
           </a:xfrm>
           <a:prstGeom prst="rect">
             <a:avLst/>
@@ -11091,7 +8071,7 @@
               <a:buNone/>
             </a:pPr>
             <a:r>
-              <a:rPr lang="en-US" sz="1600" dirty="0">
+              <a:rPr lang="en-US" sz="2200" dirty="0">
                 <a:solidFill>
                   <a:srgbClr val="111827"/>
                 </a:solidFill>
@@ -11099,9 +8079,9 @@
                 <a:ea typeface="Calibri" pitchFamily="34" charset="-122"/>
                 <a:cs typeface="Calibri" pitchFamily="34" charset="-120"/>
               </a:rPr>
-              <a:t>Predict how a 5 °C temperature rise could change evaporation and rainfall.</a:t>
-            </a:r>
-            <a:endParaRPr lang="en-US" sz="1600" dirty="0"/>
+              <a:t>Middle Achievers task: Label the four processes, then explain evaporation and condensation using particles.</a:t>
+            </a:r>
+            <a:endParaRPr lang="en-US" sz="2200" dirty="0"/>
           </a:p>
         </p:txBody>
       </p:sp>
@@ -11113,8 +8093,8 @@
         </p:nvSpPr>
         <p:spPr>
           <a:xfrm>
-            <a:off x="749808" y="2624328"/>
-            <a:ext cx="292608" cy="292608"/>
+            <a:off x="749808" y="3935984"/>
+            <a:ext cx="377190" cy="377190"/>
           </a:xfrm>
           <a:prstGeom prst="ellipse">
             <a:avLst/>
@@ -11138,8 +8118,8 @@
         </p:nvSpPr>
         <p:spPr>
           <a:xfrm>
-            <a:off x="749808" y="2624328"/>
-            <a:ext cx="292608" cy="292608"/>
+            <a:off x="749808" y="3935984"/>
+            <a:ext cx="377190" cy="377190"/>
           </a:xfrm>
           <a:prstGeom prst="rect">
             <a:avLst/>
@@ -11155,7 +8135,7 @@
               <a:buNone/>
             </a:pPr>
             <a:r>
-              <a:rPr lang="en-US" sz="1200" b="1" dirty="0">
+              <a:rPr lang="en-US" sz="1500" b="1" dirty="0">
                 <a:solidFill>
                   <a:srgbClr val="FFFFFF"/>
                 </a:solidFill>
@@ -11165,7 +8145,7 @@
               </a:rPr>
               <a:t>3</a:t>
             </a:r>
-            <a:endParaRPr lang="en-US" sz="1200" dirty="0"/>
+            <a:endParaRPr lang="en-US" sz="1500" dirty="0"/>
           </a:p>
         </p:txBody>
       </p:sp>
@@ -11177,8 +8157,8 @@
         </p:nvSpPr>
         <p:spPr>
           <a:xfrm>
-            <a:off x="1188720" y="2606040"/>
-            <a:ext cx="10259568" cy="310896"/>
+            <a:off x="1273302" y="3917696"/>
+            <a:ext cx="10174986" cy="715264"/>
           </a:xfrm>
           <a:prstGeom prst="rect">
             <a:avLst/>
@@ -11197,7 +8177,7 @@
               <a:buNone/>
             </a:pPr>
             <a:r>
-              <a:rPr lang="en-US" sz="1600" dirty="0">
+              <a:rPr lang="en-US" sz="2200" dirty="0">
                 <a:solidFill>
                   <a:srgbClr val="111827"/>
                 </a:solidFill>
@@ -11205,9 +8185,9 @@
                 <a:ea typeface="Calibri" pitchFamily="34" charset="-122"/>
                 <a:cs typeface="Calibri" pitchFamily="34" charset="-120"/>
               </a:rPr>
-              <a:t>Give two linked scientific reasons.</a:t>
-            </a:r>
-            <a:endParaRPr lang="en-US" sz="1600" dirty="0"/>
+              <a:t>Lower Achievers task: Order the process cards. Complete: particles gain energy during evaporation and lose energy during condensation.</a:t>
+            </a:r>
+            <a:endParaRPr lang="en-US" sz="2200" dirty="0"/>
           </a:p>
         </p:txBody>
       </p:sp>
@@ -11219,8 +8199,8 @@
         </p:nvSpPr>
         <p:spPr>
           <a:xfrm>
-            <a:off x="749808" y="3140964"/>
-            <a:ext cx="292608" cy="292608"/>
+            <a:off x="749808" y="5108448"/>
+            <a:ext cx="377190" cy="377190"/>
           </a:xfrm>
           <a:prstGeom prst="ellipse">
             <a:avLst/>
@@ -11244,8 +8224,8 @@
         </p:nvSpPr>
         <p:spPr>
           <a:xfrm>
-            <a:off x="749808" y="3140964"/>
-            <a:ext cx="292608" cy="292608"/>
+            <a:off x="749808" y="5108448"/>
+            <a:ext cx="377190" cy="377190"/>
           </a:xfrm>
           <a:prstGeom prst="rect">
             <a:avLst/>
@@ -11261,7 +8241,7 @@
               <a:buNone/>
             </a:pPr>
             <a:r>
-              <a:rPr lang="en-US" sz="1200" b="1" dirty="0">
+              <a:rPr lang="en-US" sz="1500" b="1" dirty="0">
                 <a:solidFill>
                   <a:srgbClr val="FFFFFF"/>
                 </a:solidFill>
@@ -11271,7 +8251,7 @@
               </a:rPr>
               <a:t>4</a:t>
             </a:r>
-            <a:endParaRPr lang="en-US" sz="1200" dirty="0"/>
+            <a:endParaRPr lang="en-US" sz="1500" dirty="0"/>
           </a:p>
         </p:txBody>
       </p:sp>
@@ -11283,8 +8263,8 @@
         </p:nvSpPr>
         <p:spPr>
           <a:xfrm>
-            <a:off x="1188720" y="3122676"/>
-            <a:ext cx="10259568" cy="310896"/>
+            <a:off x="1273302" y="5090160"/>
+            <a:ext cx="10174986" cy="715264"/>
           </a:xfrm>
           <a:prstGeom prst="rect">
             <a:avLst/>
@@ -11303,7 +8283,7 @@
               <a:buNone/>
             </a:pPr>
             <a:r>
-              <a:rPr lang="en-US" sz="1600" dirty="0">
+              <a:rPr lang="en-US" sz="2200" dirty="0">
                 <a:solidFill>
                   <a:srgbClr val="111827"/>
                 </a:solidFill>
@@ -11311,539 +8291,9 @@
                 <a:ea typeface="Calibri" pitchFamily="34" charset="-122"/>
                 <a:cs typeface="Calibri" pitchFamily="34" charset="-120"/>
               </a:rPr>
-              <a:t>Middle Achievers task</a:t>
-            </a:r>
-            <a:endParaRPr lang="en-US" sz="1600" dirty="0"/>
-          </a:p>
-        </p:txBody>
-      </p:sp>
-      <p:sp>
-        <p:nvSpPr>
-          <p:cNvPr id="23" name="Shape 20"/>
-          <p:cNvSpPr/>
-          <p:nvPr/>
-        </p:nvSpPr>
-        <p:spPr>
-          <a:xfrm>
-            <a:off x="749808" y="3657600"/>
-            <a:ext cx="292608" cy="292608"/>
-          </a:xfrm>
-          <a:prstGeom prst="ellipse">
-            <a:avLst/>
-          </a:prstGeom>
-          <a:solidFill>
-            <a:srgbClr val="087866"/>
-          </a:solidFill>
-          <a:ln w="12700">
-            <a:solidFill>
-              <a:srgbClr val="087866"/>
-            </a:solidFill>
-            <a:prstDash val="solid"/>
-          </a:ln>
-        </p:spPr>
-      </p:sp>
-      <p:sp>
-        <p:nvSpPr>
-          <p:cNvPr id="24" name="Text 21"/>
-          <p:cNvSpPr/>
-          <p:nvPr/>
-        </p:nvSpPr>
-        <p:spPr>
-          <a:xfrm>
-            <a:off x="749808" y="3657600"/>
-            <a:ext cx="292608" cy="292608"/>
-          </a:xfrm>
-          <a:prstGeom prst="rect">
-            <a:avLst/>
-          </a:prstGeom>
-          <a:noFill/>
-          <a:ln/>
-        </p:spPr>
-        <p:txBody>
-          <a:bodyPr wrap="square" lIns="0" tIns="0" rIns="0" bIns="0" rtlCol="0" anchor="ctr"/>
-          <a:lstStyle/>
-          <a:p>
-            <a:pPr algn="ctr" indent="0" marL="0">
-              <a:buNone/>
-            </a:pPr>
-            <a:r>
-              <a:rPr lang="en-US" sz="1200" b="1" dirty="0">
-                <a:solidFill>
-                  <a:srgbClr val="FFFFFF"/>
-                </a:solidFill>
-                <a:latin typeface="Calibri" pitchFamily="34" charset="0"/>
-                <a:ea typeface="Calibri" pitchFamily="34" charset="-122"/>
-                <a:cs typeface="Calibri" pitchFamily="34" charset="-120"/>
-              </a:rPr>
-              <a:t>5</a:t>
-            </a:r>
-            <a:endParaRPr lang="en-US" sz="1200" dirty="0"/>
-          </a:p>
-        </p:txBody>
-      </p:sp>
-      <p:sp>
-        <p:nvSpPr>
-          <p:cNvPr id="25" name="Text 22"/>
-          <p:cNvSpPr/>
-          <p:nvPr/>
-        </p:nvSpPr>
-        <p:spPr>
-          <a:xfrm>
-            <a:off x="1188720" y="3639312"/>
-            <a:ext cx="10259568" cy="310896"/>
-          </a:xfrm>
-          <a:prstGeom prst="rect">
-            <a:avLst/>
-          </a:prstGeom>
-          <a:noFill/>
-          <a:ln/>
-        </p:spPr>
-        <p:txBody>
-          <a:bodyPr wrap="square" lIns="0" tIns="0" rIns="0" bIns="0" rtlCol="0" anchor="t"/>
-          <a:lstStyle/>
-          <a:p>
-            <a:pPr algn="l" indent="0" marL="0">
-              <a:lnSpc>
-                <a:spcPct val="116000"/>
-              </a:lnSpc>
-              <a:buNone/>
-            </a:pPr>
-            <a:r>
-              <a:rPr lang="en-US" sz="1600" dirty="0">
-                <a:solidFill>
-                  <a:srgbClr val="111827"/>
-                </a:solidFill>
-                <a:latin typeface="Calibri" pitchFamily="34" charset="0"/>
-                <a:ea typeface="Calibri" pitchFamily="34" charset="-122"/>
-                <a:cs typeface="Calibri" pitchFamily="34" charset="-120"/>
-              </a:rPr>
-              <a:t>Label the four processes, then explain evaporation and condensation using particles.</a:t>
-            </a:r>
-            <a:endParaRPr lang="en-US" sz="1600" dirty="0"/>
-          </a:p>
-        </p:txBody>
-      </p:sp>
-      <p:sp>
-        <p:nvSpPr>
-          <p:cNvPr id="26" name="Shape 23"/>
-          <p:cNvSpPr/>
-          <p:nvPr/>
-        </p:nvSpPr>
-        <p:spPr>
-          <a:xfrm>
-            <a:off x="749808" y="4174236"/>
-            <a:ext cx="292608" cy="292608"/>
-          </a:xfrm>
-          <a:prstGeom prst="ellipse">
-            <a:avLst/>
-          </a:prstGeom>
-          <a:solidFill>
-            <a:srgbClr val="087866"/>
-          </a:solidFill>
-          <a:ln w="12700">
-            <a:solidFill>
-              <a:srgbClr val="087866"/>
-            </a:solidFill>
-            <a:prstDash val="solid"/>
-          </a:ln>
-        </p:spPr>
-      </p:sp>
-      <p:sp>
-        <p:nvSpPr>
-          <p:cNvPr id="27" name="Text 24"/>
-          <p:cNvSpPr/>
-          <p:nvPr/>
-        </p:nvSpPr>
-        <p:spPr>
-          <a:xfrm>
-            <a:off x="749808" y="4174236"/>
-            <a:ext cx="292608" cy="292608"/>
-          </a:xfrm>
-          <a:prstGeom prst="rect">
-            <a:avLst/>
-          </a:prstGeom>
-          <a:noFill/>
-          <a:ln/>
-        </p:spPr>
-        <p:txBody>
-          <a:bodyPr wrap="square" lIns="0" tIns="0" rIns="0" bIns="0" rtlCol="0" anchor="ctr"/>
-          <a:lstStyle/>
-          <a:p>
-            <a:pPr algn="ctr" indent="0" marL="0">
-              <a:buNone/>
-            </a:pPr>
-            <a:r>
-              <a:rPr lang="en-US" sz="1200" b="1" dirty="0">
-                <a:solidFill>
-                  <a:srgbClr val="FFFFFF"/>
-                </a:solidFill>
-                <a:latin typeface="Calibri" pitchFamily="34" charset="0"/>
-                <a:ea typeface="Calibri" pitchFamily="34" charset="-122"/>
-                <a:cs typeface="Calibri" pitchFamily="34" charset="-120"/>
-              </a:rPr>
-              <a:t>6</a:t>
-            </a:r>
-            <a:endParaRPr lang="en-US" sz="1200" dirty="0"/>
-          </a:p>
-        </p:txBody>
-      </p:sp>
-      <p:sp>
-        <p:nvSpPr>
-          <p:cNvPr id="28" name="Text 25"/>
-          <p:cNvSpPr/>
-          <p:nvPr/>
-        </p:nvSpPr>
-        <p:spPr>
-          <a:xfrm>
-            <a:off x="1188720" y="4155948"/>
-            <a:ext cx="10259568" cy="310896"/>
-          </a:xfrm>
-          <a:prstGeom prst="rect">
-            <a:avLst/>
-          </a:prstGeom>
-          <a:noFill/>
-          <a:ln/>
-        </p:spPr>
-        <p:txBody>
-          <a:bodyPr wrap="square" lIns="0" tIns="0" rIns="0" bIns="0" rtlCol="0" anchor="t"/>
-          <a:lstStyle/>
-          <a:p>
-            <a:pPr algn="l" indent="0" marL="0">
-              <a:lnSpc>
-                <a:spcPct val="116000"/>
-              </a:lnSpc>
-              <a:buNone/>
-            </a:pPr>
-            <a:r>
-              <a:rPr lang="en-US" sz="1600" dirty="0">
-                <a:solidFill>
-                  <a:srgbClr val="111827"/>
-                </a:solidFill>
-                <a:latin typeface="Calibri" pitchFamily="34" charset="0"/>
-                <a:ea typeface="Calibri" pitchFamily="34" charset="-122"/>
-                <a:cs typeface="Calibri" pitchFamily="34" charset="-120"/>
-              </a:rPr>
-              <a:t>Lower Achievers task</a:t>
-            </a:r>
-            <a:endParaRPr lang="en-US" sz="1600" dirty="0"/>
-          </a:p>
-        </p:txBody>
-      </p:sp>
-      <p:sp>
-        <p:nvSpPr>
-          <p:cNvPr id="29" name="Shape 26"/>
-          <p:cNvSpPr/>
-          <p:nvPr/>
-        </p:nvSpPr>
-        <p:spPr>
-          <a:xfrm>
-            <a:off x="749808" y="4690872"/>
-            <a:ext cx="292608" cy="292608"/>
-          </a:xfrm>
-          <a:prstGeom prst="ellipse">
-            <a:avLst/>
-          </a:prstGeom>
-          <a:solidFill>
-            <a:srgbClr val="087866"/>
-          </a:solidFill>
-          <a:ln w="12700">
-            <a:solidFill>
-              <a:srgbClr val="087866"/>
-            </a:solidFill>
-            <a:prstDash val="solid"/>
-          </a:ln>
-        </p:spPr>
-      </p:sp>
-      <p:sp>
-        <p:nvSpPr>
-          <p:cNvPr id="30" name="Text 27"/>
-          <p:cNvSpPr/>
-          <p:nvPr/>
-        </p:nvSpPr>
-        <p:spPr>
-          <a:xfrm>
-            <a:off x="749808" y="4690872"/>
-            <a:ext cx="292608" cy="292608"/>
-          </a:xfrm>
-          <a:prstGeom prst="rect">
-            <a:avLst/>
-          </a:prstGeom>
-          <a:noFill/>
-          <a:ln/>
-        </p:spPr>
-        <p:txBody>
-          <a:bodyPr wrap="square" lIns="0" tIns="0" rIns="0" bIns="0" rtlCol="0" anchor="ctr"/>
-          <a:lstStyle/>
-          <a:p>
-            <a:pPr algn="ctr" indent="0" marL="0">
-              <a:buNone/>
-            </a:pPr>
-            <a:r>
-              <a:rPr lang="en-US" sz="1200" b="1" dirty="0">
-                <a:solidFill>
-                  <a:srgbClr val="FFFFFF"/>
-                </a:solidFill>
-                <a:latin typeface="Calibri" pitchFamily="34" charset="0"/>
-                <a:ea typeface="Calibri" pitchFamily="34" charset="-122"/>
-                <a:cs typeface="Calibri" pitchFamily="34" charset="-120"/>
-              </a:rPr>
-              <a:t>7</a:t>
-            </a:r>
-            <a:endParaRPr lang="en-US" sz="1200" dirty="0"/>
-          </a:p>
-        </p:txBody>
-      </p:sp>
-      <p:sp>
-        <p:nvSpPr>
-          <p:cNvPr id="31" name="Text 28"/>
-          <p:cNvSpPr/>
-          <p:nvPr/>
-        </p:nvSpPr>
-        <p:spPr>
-          <a:xfrm>
-            <a:off x="1188720" y="4672584"/>
-            <a:ext cx="10259568" cy="310896"/>
-          </a:xfrm>
-          <a:prstGeom prst="rect">
-            <a:avLst/>
-          </a:prstGeom>
-          <a:noFill/>
-          <a:ln/>
-        </p:spPr>
-        <p:txBody>
-          <a:bodyPr wrap="square" lIns="0" tIns="0" rIns="0" bIns="0" rtlCol="0" anchor="t"/>
-          <a:lstStyle/>
-          <a:p>
-            <a:pPr algn="l" indent="0" marL="0">
-              <a:lnSpc>
-                <a:spcPct val="116000"/>
-              </a:lnSpc>
-              <a:buNone/>
-            </a:pPr>
-            <a:r>
-              <a:rPr lang="en-US" sz="1600" dirty="0">
-                <a:solidFill>
-                  <a:srgbClr val="111827"/>
-                </a:solidFill>
-                <a:latin typeface="Calibri" pitchFamily="34" charset="0"/>
-                <a:ea typeface="Calibri" pitchFamily="34" charset="-122"/>
-                <a:cs typeface="Calibri" pitchFamily="34" charset="-120"/>
-              </a:rPr>
-              <a:t>Order the process cards.</a:t>
-            </a:r>
-            <a:endParaRPr lang="en-US" sz="1600" dirty="0"/>
-          </a:p>
-        </p:txBody>
-      </p:sp>
-      <p:sp>
-        <p:nvSpPr>
-          <p:cNvPr id="32" name="Shape 29"/>
-          <p:cNvSpPr/>
-          <p:nvPr/>
-        </p:nvSpPr>
-        <p:spPr>
-          <a:xfrm>
-            <a:off x="749808" y="5207508"/>
-            <a:ext cx="292608" cy="292608"/>
-          </a:xfrm>
-          <a:prstGeom prst="ellipse">
-            <a:avLst/>
-          </a:prstGeom>
-          <a:solidFill>
-            <a:srgbClr val="087866"/>
-          </a:solidFill>
-          <a:ln w="12700">
-            <a:solidFill>
-              <a:srgbClr val="087866"/>
-            </a:solidFill>
-            <a:prstDash val="solid"/>
-          </a:ln>
-        </p:spPr>
-      </p:sp>
-      <p:sp>
-        <p:nvSpPr>
-          <p:cNvPr id="33" name="Text 30"/>
-          <p:cNvSpPr/>
-          <p:nvPr/>
-        </p:nvSpPr>
-        <p:spPr>
-          <a:xfrm>
-            <a:off x="749808" y="5207508"/>
-            <a:ext cx="292608" cy="292608"/>
-          </a:xfrm>
-          <a:prstGeom prst="rect">
-            <a:avLst/>
-          </a:prstGeom>
-          <a:noFill/>
-          <a:ln/>
-        </p:spPr>
-        <p:txBody>
-          <a:bodyPr wrap="square" lIns="0" tIns="0" rIns="0" bIns="0" rtlCol="0" anchor="ctr"/>
-          <a:lstStyle/>
-          <a:p>
-            <a:pPr algn="ctr" indent="0" marL="0">
-              <a:buNone/>
-            </a:pPr>
-            <a:r>
-              <a:rPr lang="en-US" sz="1200" b="1" dirty="0">
-                <a:solidFill>
-                  <a:srgbClr val="FFFFFF"/>
-                </a:solidFill>
-                <a:latin typeface="Calibri" pitchFamily="34" charset="0"/>
-                <a:ea typeface="Calibri" pitchFamily="34" charset="-122"/>
-                <a:cs typeface="Calibri" pitchFamily="34" charset="-120"/>
-              </a:rPr>
-              <a:t>8</a:t>
-            </a:r>
-            <a:endParaRPr lang="en-US" sz="1200" dirty="0"/>
-          </a:p>
-        </p:txBody>
-      </p:sp>
-      <p:sp>
-        <p:nvSpPr>
-          <p:cNvPr id="34" name="Text 31"/>
-          <p:cNvSpPr/>
-          <p:nvPr/>
-        </p:nvSpPr>
-        <p:spPr>
-          <a:xfrm>
-            <a:off x="1188720" y="5189220"/>
-            <a:ext cx="10259568" cy="310896"/>
-          </a:xfrm>
-          <a:prstGeom prst="rect">
-            <a:avLst/>
-          </a:prstGeom>
-          <a:noFill/>
-          <a:ln/>
-        </p:spPr>
-        <p:txBody>
-          <a:bodyPr wrap="square" lIns="0" tIns="0" rIns="0" bIns="0" rtlCol="0" anchor="t"/>
-          <a:lstStyle/>
-          <a:p>
-            <a:pPr algn="l" indent="0" marL="0">
-              <a:lnSpc>
-                <a:spcPct val="116000"/>
-              </a:lnSpc>
-              <a:buNone/>
-            </a:pPr>
-            <a:r>
-              <a:rPr lang="en-US" sz="1600" dirty="0">
-                <a:solidFill>
-                  <a:srgbClr val="111827"/>
-                </a:solidFill>
-                <a:latin typeface="Calibri" pitchFamily="34" charset="0"/>
-                <a:ea typeface="Calibri" pitchFamily="34" charset="-122"/>
-                <a:cs typeface="Calibri" pitchFamily="34" charset="-120"/>
-              </a:rPr>
-              <a:t>Complete: particles gain energy during evaporation and lose energy during condensation.</a:t>
-            </a:r>
-            <a:endParaRPr lang="en-US" sz="1600" dirty="0"/>
-          </a:p>
-        </p:txBody>
-      </p:sp>
-      <p:sp>
-        <p:nvSpPr>
-          <p:cNvPr id="35" name="Shape 32"/>
-          <p:cNvSpPr/>
-          <p:nvPr/>
-        </p:nvSpPr>
-        <p:spPr>
-          <a:xfrm>
-            <a:off x="749808" y="5724144"/>
-            <a:ext cx="292608" cy="292608"/>
-          </a:xfrm>
-          <a:prstGeom prst="ellipse">
-            <a:avLst/>
-          </a:prstGeom>
-          <a:solidFill>
-            <a:srgbClr val="087866"/>
-          </a:solidFill>
-          <a:ln w="12700">
-            <a:solidFill>
-              <a:srgbClr val="087866"/>
-            </a:solidFill>
-            <a:prstDash val="solid"/>
-          </a:ln>
-        </p:spPr>
-      </p:sp>
-      <p:sp>
-        <p:nvSpPr>
-          <p:cNvPr id="36" name="Text 33"/>
-          <p:cNvSpPr/>
-          <p:nvPr/>
-        </p:nvSpPr>
-        <p:spPr>
-          <a:xfrm>
-            <a:off x="749808" y="5724144"/>
-            <a:ext cx="292608" cy="292608"/>
-          </a:xfrm>
-          <a:prstGeom prst="rect">
-            <a:avLst/>
-          </a:prstGeom>
-          <a:noFill/>
-          <a:ln/>
-        </p:spPr>
-        <p:txBody>
-          <a:bodyPr wrap="square" lIns="0" tIns="0" rIns="0" bIns="0" rtlCol="0" anchor="ctr"/>
-          <a:lstStyle/>
-          <a:p>
-            <a:pPr algn="ctr" indent="0" marL="0">
-              <a:buNone/>
-            </a:pPr>
-            <a:r>
-              <a:rPr lang="en-US" sz="1200" b="1" dirty="0">
-                <a:solidFill>
-                  <a:srgbClr val="FFFFFF"/>
-                </a:solidFill>
-                <a:latin typeface="Calibri" pitchFamily="34" charset="0"/>
-                <a:ea typeface="Calibri" pitchFamily="34" charset="-122"/>
-                <a:cs typeface="Calibri" pitchFamily="34" charset="-120"/>
-              </a:rPr>
-              <a:t>9</a:t>
-            </a:r>
-            <a:endParaRPr lang="en-US" sz="1200" dirty="0"/>
-          </a:p>
-        </p:txBody>
-      </p:sp>
-      <p:sp>
-        <p:nvSpPr>
-          <p:cNvPr id="37" name="Text 34"/>
-          <p:cNvSpPr/>
-          <p:nvPr/>
-        </p:nvSpPr>
-        <p:spPr>
-          <a:xfrm>
-            <a:off x="1188720" y="5705856"/>
-            <a:ext cx="10259568" cy="310896"/>
-          </a:xfrm>
-          <a:prstGeom prst="rect">
-            <a:avLst/>
-          </a:prstGeom>
-          <a:noFill/>
-          <a:ln/>
-        </p:spPr>
-        <p:txBody>
-          <a:bodyPr wrap="square" lIns="0" tIns="0" rIns="0" bIns="0" rtlCol="0" anchor="t"/>
-          <a:lstStyle/>
-          <a:p>
-            <a:pPr algn="l" indent="0" marL="0">
-              <a:lnSpc>
-                <a:spcPct val="116000"/>
-              </a:lnSpc>
-              <a:buNone/>
-            </a:pPr>
-            <a:r>
-              <a:rPr lang="en-US" sz="1600" dirty="0">
-                <a:solidFill>
-                  <a:srgbClr val="111827"/>
-                </a:solidFill>
-                <a:latin typeface="Calibri" pitchFamily="34" charset="0"/>
-                <a:ea typeface="Calibri" pitchFamily="34" charset="-122"/>
-                <a:cs typeface="Calibri" pitchFamily="34" charset="-120"/>
-              </a:rPr>
-              <a:t>Mini Plenary</a:t>
-            </a:r>
-            <a:endParaRPr lang="en-US" sz="1600" dirty="0"/>
+              <a:t>Mini Plenary: Why can a cloud form even though water vapour is invisible?</a:t>
+            </a:r>
+            <a:endParaRPr lang="en-US" sz="2200" dirty="0"/>
           </a:p>
         </p:txBody>
       </p:sp>
@@ -11907,7 +8357,7 @@
               <a:buNone/>
             </a:pPr>
             <a:r>
-              <a:rPr lang="en-US" sz="3100" b="1" dirty="0">
+              <a:rPr lang="en-US" sz="3400" b="1" dirty="0">
                 <a:solidFill>
                   <a:srgbClr val="111827"/>
                 </a:solidFill>
@@ -11915,9 +8365,9 @@
                 <a:ea typeface="Calibri" pitchFamily="34" charset="-122"/>
                 <a:cs typeface="Calibri" pitchFamily="34" charset="-120"/>
               </a:rPr>
-              <a:t>Differentiated Activity and Mini Plenary — Continued</a:t>
-            </a:r>
-            <a:endParaRPr lang="en-US" sz="3100" dirty="0"/>
+              <a:t>Real Life and Cross Curricular Connection</a:t>
+            </a:r>
+            <a:endParaRPr lang="en-US" sz="3400" dirty="0"/>
           </a:p>
         </p:txBody>
       </p:sp>
@@ -12088,7 +8538,7 @@
                 <a:ea typeface="Calibri" pitchFamily="34" charset="-122"/>
                 <a:cs typeface="Calibri" pitchFamily="34" charset="-120"/>
               </a:rPr>
-              <a:t>8 / 16</a:t>
+              <a:t>8 / 13</a:t>
             </a:r>
             <a:endParaRPr lang="en-US" sz="1200" dirty="0"/>
           </a:p>
@@ -12130,7 +8580,7 @@
         <p:spPr>
           <a:xfrm>
             <a:off x="274320" y="6510528"/>
-            <a:ext cx="5821528" cy="73152"/>
+            <a:ext cx="7164957" cy="73152"/>
           </a:xfrm>
           <a:prstGeom prst="roundRect">
             <a:avLst>
@@ -12156,10 +8606,35 @@
         </p:nvSpPr>
         <p:spPr>
           <a:xfrm>
-            <a:off x="749808" y="1591056"/>
-            <a:ext cx="377190" cy="377190"/>
-          </a:xfrm>
-          <a:prstGeom prst="ellipse">
+            <a:off x="713232" y="1536192"/>
+            <a:ext cx="10716768" cy="1627632"/>
+          </a:xfrm>
+          <a:prstGeom prst="rect">
+            <a:avLst/>
+          </a:prstGeom>
+          <a:solidFill>
+            <a:srgbClr val="ECFDF8"/>
+          </a:solidFill>
+          <a:ln w="12700">
+            <a:solidFill>
+              <a:srgbClr val="ECFDF8"/>
+            </a:solidFill>
+            <a:prstDash val="solid"/>
+          </a:ln>
+        </p:spPr>
+      </p:sp>
+      <p:sp>
+        <p:nvSpPr>
+          <p:cNvPr id="12" name="Shape 9"/>
+          <p:cNvSpPr/>
+          <p:nvPr/>
+        </p:nvSpPr>
+        <p:spPr>
+          <a:xfrm>
+            <a:off x="713232" y="1536192"/>
+            <a:ext cx="54864" cy="1627632"/>
+          </a:xfrm>
+          <a:prstGeom prst="rect">
             <a:avLst/>
           </a:prstGeom>
           <a:solidFill>
@@ -12175,14 +8650,14 @@
       </p:sp>
       <p:sp>
         <p:nvSpPr>
-          <p:cNvPr id="12" name="Text 9"/>
-          <p:cNvSpPr/>
-          <p:nvPr/>
-        </p:nvSpPr>
-        <p:spPr>
-          <a:xfrm>
-            <a:off x="749808" y="1591056"/>
-            <a:ext cx="377190" cy="377190"/>
+          <p:cNvPr id="13" name="Text 10"/>
+          <p:cNvSpPr/>
+          <p:nvPr/>
+        </p:nvSpPr>
+        <p:spPr>
+          <a:xfrm>
+            <a:off x="969264" y="1682496"/>
+            <a:ext cx="10204704" cy="1335024"/>
           </a:xfrm>
           <a:prstGeom prst="rect">
             <a:avLst/>
@@ -12192,45 +8667,6 @@
         </p:spPr>
         <p:txBody>
           <a:bodyPr wrap="square" lIns="0" tIns="0" rIns="0" bIns="0" rtlCol="0" anchor="ctr"/>
-          <a:lstStyle/>
-          <a:p>
-            <a:pPr algn="ctr" indent="0" marL="0">
-              <a:buNone/>
-            </a:pPr>
-            <a:r>
-              <a:rPr lang="en-US" sz="1500" b="1" dirty="0">
-                <a:solidFill>
-                  <a:srgbClr val="FFFFFF"/>
-                </a:solidFill>
-                <a:latin typeface="Calibri" pitchFamily="34" charset="0"/>
-                <a:ea typeface="Calibri" pitchFamily="34" charset="-122"/>
-                <a:cs typeface="Calibri" pitchFamily="34" charset="-120"/>
-              </a:rPr>
-              <a:t>1</a:t>
-            </a:r>
-            <a:endParaRPr lang="en-US" sz="1500" dirty="0"/>
-          </a:p>
-        </p:txBody>
-      </p:sp>
-      <p:sp>
-        <p:nvSpPr>
-          <p:cNvPr id="13" name="Text 10"/>
-          <p:cNvSpPr/>
-          <p:nvPr/>
-        </p:nvSpPr>
-        <p:spPr>
-          <a:xfrm>
-            <a:off x="1273302" y="1572768"/>
-            <a:ext cx="10174986" cy="395478"/>
-          </a:xfrm>
-          <a:prstGeom prst="rect">
-            <a:avLst/>
-          </a:prstGeom>
-          <a:noFill/>
-          <a:ln/>
-        </p:spPr>
-        <p:txBody>
-          <a:bodyPr wrap="square" lIns="0" tIns="0" rIns="0" bIns="0" rtlCol="0" anchor="t"/>
           <a:lstStyle/>
           <a:p>
             <a:pPr algn="l" indent="0" marL="0">
@@ -12240,7 +8676,7 @@
               <a:buNone/>
             </a:pPr>
             <a:r>
-              <a:rPr lang="en-US" sz="2200" dirty="0">
+              <a:rPr lang="en-US" sz="2200" b="1" dirty="0">
                 <a:solidFill>
                   <a:srgbClr val="111827"/>
                 </a:solidFill>
@@ -12248,9 +8684,135 @@
                 <a:ea typeface="Calibri" pitchFamily="34" charset="-122"/>
                 <a:cs typeface="Calibri" pitchFamily="34" charset="-120"/>
               </a:rPr>
-              <a:t>Why can a cloud form even though water vapour is invisible?</a:t>
+              <a:t>Real-life connection</a:t>
             </a:r>
             <a:endParaRPr lang="en-US" sz="2200" dirty="0"/>
+          </a:p>
+        </p:txBody>
+      </p:sp>
+      <p:sp>
+        <p:nvSpPr>
+          <p:cNvPr id="14" name="Text 11"/>
+          <p:cNvSpPr/>
+          <p:nvPr/>
+        </p:nvSpPr>
+        <p:spPr>
+          <a:xfrm>
+            <a:off x="713232" y="3419856"/>
+            <a:ext cx="10716768" cy="520192"/>
+          </a:xfrm>
+          <a:prstGeom prst="rect">
+            <a:avLst/>
+          </a:prstGeom>
+          <a:noFill/>
+          <a:ln/>
+        </p:spPr>
+        <p:txBody>
+          <a:bodyPr wrap="square" lIns="0" tIns="0" rIns="0" bIns="0" rtlCol="0" anchor="t"/>
+          <a:lstStyle/>
+          <a:p>
+            <a:pPr algn="l" indent="0" marL="0">
+              <a:lnSpc>
+                <a:spcPct val="116000"/>
+              </a:lnSpc>
+              <a:buNone/>
+            </a:pPr>
+            <a:r>
+              <a:rPr lang="en-US" sz="1600" dirty="0">
+                <a:solidFill>
+                  <a:srgbClr val="111827"/>
+                </a:solidFill>
+                <a:latin typeface="Calibri" pitchFamily="34" charset="0"/>
+                <a:ea typeface="Calibri" pitchFamily="34" charset="-122"/>
+                <a:cs typeface="Calibri" pitchFamily="34" charset="-120"/>
+              </a:rPr>
+              <a:t>A cold bathroom mirror collects droplets because warm water vapour cools and condenses on the glass. Meteorologists use the same change of state when explaining cloud formation and rainfall.</a:t>
+            </a:r>
+            <a:endParaRPr lang="en-US" sz="1600" dirty="0"/>
+          </a:p>
+        </p:txBody>
+      </p:sp>
+      <p:sp>
+        <p:nvSpPr>
+          <p:cNvPr id="15" name="Text 12"/>
+          <p:cNvSpPr/>
+          <p:nvPr/>
+        </p:nvSpPr>
+        <p:spPr>
+          <a:xfrm>
+            <a:off x="713232" y="4068064"/>
+            <a:ext cx="10716768" cy="310896"/>
+          </a:xfrm>
+          <a:prstGeom prst="rect">
+            <a:avLst/>
+          </a:prstGeom>
+          <a:noFill/>
+          <a:ln/>
+        </p:spPr>
+        <p:txBody>
+          <a:bodyPr wrap="square" lIns="0" tIns="0" rIns="0" bIns="0" rtlCol="0" anchor="t"/>
+          <a:lstStyle/>
+          <a:p>
+            <a:pPr algn="l" indent="0" marL="0">
+              <a:lnSpc>
+                <a:spcPct val="116000"/>
+              </a:lnSpc>
+              <a:buNone/>
+            </a:pPr>
+            <a:r>
+              <a:rPr lang="en-US" sz="1600" dirty="0">
+                <a:solidFill>
+                  <a:srgbClr val="111827"/>
+                </a:solidFill>
+                <a:latin typeface="Calibri" pitchFamily="34" charset="0"/>
+                <a:ea typeface="Calibri" pitchFamily="34" charset="-122"/>
+                <a:cs typeface="Calibri" pitchFamily="34" charset="-120"/>
+              </a:rPr>
+              <a:t>Cross-curricular link</a:t>
+            </a:r>
+            <a:endParaRPr lang="en-US" sz="1600" dirty="0"/>
+          </a:p>
+        </p:txBody>
+      </p:sp>
+      <p:sp>
+        <p:nvSpPr>
+          <p:cNvPr id="16" name="Text 13"/>
+          <p:cNvSpPr/>
+          <p:nvPr/>
+        </p:nvSpPr>
+        <p:spPr>
+          <a:xfrm>
+            <a:off x="713232" y="4506976"/>
+            <a:ext cx="10716768" cy="520192"/>
+          </a:xfrm>
+          <a:prstGeom prst="rect">
+            <a:avLst/>
+          </a:prstGeom>
+          <a:noFill/>
+          <a:ln/>
+        </p:spPr>
+        <p:txBody>
+          <a:bodyPr wrap="square" lIns="0" tIns="0" rIns="0" bIns="0" rtlCol="0" anchor="t"/>
+          <a:lstStyle/>
+          <a:p>
+            <a:pPr algn="l" indent="0" marL="0">
+              <a:lnSpc>
+                <a:spcPct val="116000"/>
+              </a:lnSpc>
+              <a:buNone/>
+            </a:pPr>
+            <a:r>
+              <a:rPr lang="en-US" sz="1600" dirty="0">
+                <a:solidFill>
+                  <a:srgbClr val="111827"/>
+                </a:solidFill>
+                <a:latin typeface="Calibri" pitchFamily="34" charset="0"/>
+                <a:ea typeface="Calibri" pitchFamily="34" charset="-122"/>
+                <a:cs typeface="Calibri" pitchFamily="34" charset="-120"/>
+              </a:rPr>
+              <a:t>In Geography, compare rainfall and water availability in two climates, then explain the pattern using evaporation and condensation.</a:t>
+            </a:r>
+            <a:endParaRPr lang="en-US" sz="1600" dirty="0"/>
           </a:p>
         </p:txBody>
       </p:sp>
@@ -12322,7 +8884,7 @@
                 <a:ea typeface="Calibri" pitchFamily="34" charset="-122"/>
                 <a:cs typeface="Calibri" pitchFamily="34" charset="-120"/>
               </a:rPr>
-              <a:t>Real Life and Cross Curricular Connection</a:t>
+              <a:t>Plenary</a:t>
             </a:r>
             <a:endParaRPr lang="en-US" sz="3400" dirty="0"/>
           </a:p>
@@ -12495,7 +9057,7 @@
                 <a:ea typeface="Calibri" pitchFamily="34" charset="-122"/>
                 <a:cs typeface="Calibri" pitchFamily="34" charset="-120"/>
               </a:rPr>
-              <a:t>9 / 16</a:t>
+              <a:t>9 / 13</a:t>
             </a:r>
             <a:endParaRPr lang="en-US" sz="1200" dirty="0"/>
           </a:p>
@@ -12537,7 +9099,7 @@
         <p:spPr>
           <a:xfrm>
             <a:off x="274320" y="6510528"/>
-            <a:ext cx="6549219" cy="73152"/>
+            <a:ext cx="8060577" cy="73152"/>
           </a:xfrm>
           <a:prstGeom prst="roundRect">
             <a:avLst>
@@ -12557,73 +9119,23 @@
       </p:sp>
       <p:sp>
         <p:nvSpPr>
-          <p:cNvPr id="11" name="Shape 8"/>
-          <p:cNvSpPr/>
-          <p:nvPr/>
-        </p:nvSpPr>
-        <p:spPr>
-          <a:xfrm>
-            <a:off x="713232" y="1536192"/>
-            <a:ext cx="10716768" cy="1627632"/>
-          </a:xfrm>
-          <a:prstGeom prst="rect">
-            <a:avLst/>
-          </a:prstGeom>
-          <a:solidFill>
-            <a:srgbClr val="ECFDF8"/>
-          </a:solidFill>
-          <a:ln w="12700">
-            <a:solidFill>
-              <a:srgbClr val="ECFDF8"/>
-            </a:solidFill>
-            <a:prstDash val="solid"/>
-          </a:ln>
-        </p:spPr>
-      </p:sp>
-      <p:sp>
-        <p:nvSpPr>
-          <p:cNvPr id="12" name="Shape 9"/>
-          <p:cNvSpPr/>
-          <p:nvPr/>
-        </p:nvSpPr>
-        <p:spPr>
-          <a:xfrm>
-            <a:off x="713232" y="1536192"/>
-            <a:ext cx="54864" cy="1627632"/>
-          </a:xfrm>
-          <a:prstGeom prst="rect">
-            <a:avLst/>
-          </a:prstGeom>
-          <a:solidFill>
-            <a:srgbClr val="087866"/>
-          </a:solidFill>
-          <a:ln w="12700">
-            <a:solidFill>
-              <a:srgbClr val="087866"/>
-            </a:solidFill>
-            <a:prstDash val="solid"/>
-          </a:ln>
-        </p:spPr>
-      </p:sp>
-      <p:sp>
-        <p:nvSpPr>
-          <p:cNvPr id="13" name="Text 10"/>
-          <p:cNvSpPr/>
-          <p:nvPr/>
-        </p:nvSpPr>
-        <p:spPr>
-          <a:xfrm>
-            <a:off x="969264" y="1682496"/>
-            <a:ext cx="10204704" cy="1335024"/>
-          </a:xfrm>
-          <a:prstGeom prst="rect">
-            <a:avLst/>
-          </a:prstGeom>
-          <a:noFill/>
-          <a:ln/>
-        </p:spPr>
-        <p:txBody>
-          <a:bodyPr wrap="square" lIns="0" tIns="0" rIns="0" bIns="0" rtlCol="0" anchor="ctr"/>
+          <p:cNvPr id="11" name="Text 8"/>
+          <p:cNvSpPr/>
+          <p:nvPr/>
+        </p:nvSpPr>
+        <p:spPr>
+          <a:xfrm>
+            <a:off x="877824" y="1572768"/>
+            <a:ext cx="10515600" cy="384048"/>
+          </a:xfrm>
+          <a:prstGeom prst="rect">
+            <a:avLst/>
+          </a:prstGeom>
+          <a:noFill/>
+          <a:ln/>
+        </p:spPr>
+        <p:txBody>
+          <a:bodyPr wrap="square" lIns="0" tIns="0" rIns="0" bIns="0" rtlCol="0" anchor="t"/>
           <a:lstStyle/>
           <a:p>
             <a:pPr algn="l" indent="0" marL="0">
@@ -12633,7 +9145,7 @@
               <a:buNone/>
             </a:pPr>
             <a:r>
-              <a:rPr lang="en-US" sz="2200" b="1" dirty="0">
+              <a:rPr lang="en-US" sz="1800" b="1" dirty="0">
                 <a:solidFill>
                   <a:srgbClr val="111827"/>
                 </a:solidFill>
@@ -12641,9 +9153,73 @@
                 <a:ea typeface="Calibri" pitchFamily="34" charset="-122"/>
                 <a:cs typeface="Calibri" pitchFamily="34" charset="-120"/>
               </a:rPr>
-              <a:t>Real-life connection</a:t>
-            </a:r>
-            <a:endParaRPr lang="en-US" sz="2200" dirty="0"/>
+              <a:t>Water-particle challenge</a:t>
+            </a:r>
+            <a:endParaRPr lang="en-US" sz="1800" dirty="0"/>
+          </a:p>
+        </p:txBody>
+      </p:sp>
+      <p:sp>
+        <p:nvSpPr>
+          <p:cNvPr id="12" name="Shape 9"/>
+          <p:cNvSpPr/>
+          <p:nvPr/>
+        </p:nvSpPr>
+        <p:spPr>
+          <a:xfrm>
+            <a:off x="877824" y="2176272"/>
+            <a:ext cx="411480" cy="411480"/>
+          </a:xfrm>
+          <a:prstGeom prst="ellipse">
+            <a:avLst/>
+          </a:prstGeom>
+          <a:solidFill>
+            <a:srgbClr val="087866"/>
+          </a:solidFill>
+          <a:ln w="12700">
+            <a:solidFill>
+              <a:srgbClr val="087866"/>
+            </a:solidFill>
+            <a:prstDash val="solid"/>
+          </a:ln>
+        </p:spPr>
+      </p:sp>
+      <p:sp>
+        <p:nvSpPr>
+          <p:cNvPr id="13" name="Text 10"/>
+          <p:cNvSpPr/>
+          <p:nvPr/>
+        </p:nvSpPr>
+        <p:spPr>
+          <a:xfrm>
+            <a:off x="877824" y="2176272"/>
+            <a:ext cx="411480" cy="411480"/>
+          </a:xfrm>
+          <a:prstGeom prst="rect">
+            <a:avLst/>
+          </a:prstGeom>
+          <a:noFill/>
+          <a:ln/>
+        </p:spPr>
+        <p:txBody>
+          <a:bodyPr wrap="square" lIns="0" tIns="0" rIns="0" bIns="0" rtlCol="0" anchor="ctr"/>
+          <a:lstStyle/>
+          <a:p>
+            <a:pPr algn="ctr" indent="0" marL="0">
+              <a:buNone/>
+            </a:pPr>
+            <a:r>
+              <a:rPr lang="en-US" sz="1700" b="1" dirty="0">
+                <a:solidFill>
+                  <a:srgbClr val="FFFFFF"/>
+                </a:solidFill>
+                <a:latin typeface="Calibri" pitchFamily="34" charset="0"/>
+                <a:ea typeface="Calibri" pitchFamily="34" charset="-122"/>
+                <a:cs typeface="Calibri" pitchFamily="34" charset="-120"/>
+              </a:rPr>
+              <a:t>1</a:t>
+            </a:r>
+            <a:endParaRPr lang="en-US" sz="1700" dirty="0"/>
           </a:p>
         </p:txBody>
       </p:sp>
@@ -12655,8 +9231,8 @@
         </p:nvSpPr>
         <p:spPr>
           <a:xfrm>
-            <a:off x="713232" y="3419856"/>
-            <a:ext cx="10716768" cy="520192"/>
+            <a:off x="1435608" y="2157984"/>
+            <a:ext cx="9957816" cy="780288"/>
           </a:xfrm>
           <a:prstGeom prst="rect">
             <a:avLst/>
@@ -12675,7 +9251,7 @@
               <a:buNone/>
             </a:pPr>
             <a:r>
-              <a:rPr lang="en-US" sz="1600" dirty="0">
+              <a:rPr lang="en-US" sz="2400" dirty="0">
                 <a:solidFill>
                   <a:srgbClr val="111827"/>
                 </a:solidFill>
@@ -12683,22 +9259,109 @@
                 <a:ea typeface="Calibri" pitchFamily="34" charset="-122"/>
                 <a:cs typeface="Calibri" pitchFamily="34" charset="-120"/>
               </a:rPr>
-              <a:t>A cold bathroom mirror collects droplets because warm water vapour cools and condenses on the glass. Meteorologists use the same change of state when explaining cloud formation and rainfall.</a:t>
-            </a:r>
-            <a:endParaRPr lang="en-US" sz="1600" dirty="0"/>
-          </a:p>
-        </p:txBody>
-      </p:sp>
-      <p:sp>
-        <p:nvSpPr>
-          <p:cNvPr id="15" name="Text 12"/>
-          <p:cNvSpPr/>
-          <p:nvPr/>
-        </p:nvSpPr>
-        <p:spPr>
-          <a:xfrm>
-            <a:off x="713232" y="4068064"/>
-            <a:ext cx="10716768" cy="310896"/>
+              <a:t>Draw one particle’s route: ocean → atmosphere → cloud → river.</a:t>
+            </a:r>
+            <a:endParaRPr lang="en-US" sz="2400" dirty="0"/>
+          </a:p>
+        </p:txBody>
+      </p:sp>
+      <p:sp>
+        <p:nvSpPr>
+          <p:cNvPr id="15" name="Shape 12"/>
+          <p:cNvSpPr/>
+          <p:nvPr/>
+        </p:nvSpPr>
+        <p:spPr>
+          <a:xfrm>
+            <a:off x="877824" y="3095752"/>
+            <a:ext cx="10515600" cy="0"/>
+          </a:xfrm>
+          <a:prstGeom prst="line">
+            <a:avLst/>
+          </a:prstGeom>
+          <a:noFill/>
+          <a:ln w="12700">
+            <a:solidFill>
+              <a:srgbClr val="CFF6ED"/>
+            </a:solidFill>
+            <a:prstDash val="solid"/>
+          </a:ln>
+        </p:spPr>
+      </p:sp>
+      <p:sp>
+        <p:nvSpPr>
+          <p:cNvPr id="16" name="Shape 13"/>
+          <p:cNvSpPr/>
+          <p:nvPr/>
+        </p:nvSpPr>
+        <p:spPr>
+          <a:xfrm>
+            <a:off x="877824" y="3271520"/>
+            <a:ext cx="411480" cy="411480"/>
+          </a:xfrm>
+          <a:prstGeom prst="ellipse">
+            <a:avLst/>
+          </a:prstGeom>
+          <a:solidFill>
+            <a:srgbClr val="087866"/>
+          </a:solidFill>
+          <a:ln w="12700">
+            <a:solidFill>
+              <a:srgbClr val="087866"/>
+            </a:solidFill>
+            <a:prstDash val="solid"/>
+          </a:ln>
+        </p:spPr>
+      </p:sp>
+      <p:sp>
+        <p:nvSpPr>
+          <p:cNvPr id="17" name="Text 14"/>
+          <p:cNvSpPr/>
+          <p:nvPr/>
+        </p:nvSpPr>
+        <p:spPr>
+          <a:xfrm>
+            <a:off x="877824" y="3271520"/>
+            <a:ext cx="411480" cy="411480"/>
+          </a:xfrm>
+          <a:prstGeom prst="rect">
+            <a:avLst/>
+          </a:prstGeom>
+          <a:noFill/>
+          <a:ln/>
+        </p:spPr>
+        <p:txBody>
+          <a:bodyPr wrap="square" lIns="0" tIns="0" rIns="0" bIns="0" rtlCol="0" anchor="ctr"/>
+          <a:lstStyle/>
+          <a:p>
+            <a:pPr algn="ctr" indent="0" marL="0">
+              <a:buNone/>
+            </a:pPr>
+            <a:r>
+              <a:rPr lang="en-US" sz="1700" b="1" dirty="0">
+                <a:solidFill>
+                  <a:srgbClr val="FFFFFF"/>
+                </a:solidFill>
+                <a:latin typeface="Calibri" pitchFamily="34" charset="0"/>
+                <a:ea typeface="Calibri" pitchFamily="34" charset="-122"/>
+                <a:cs typeface="Calibri" pitchFamily="34" charset="-120"/>
+              </a:rPr>
+              <a:t>2</a:t>
+            </a:r>
+            <a:endParaRPr lang="en-US" sz="1700" dirty="0"/>
+          </a:p>
+        </p:txBody>
+      </p:sp>
+      <p:sp>
+        <p:nvSpPr>
+          <p:cNvPr id="18" name="Text 15"/>
+          <p:cNvSpPr/>
+          <p:nvPr/>
+        </p:nvSpPr>
+        <p:spPr>
+          <a:xfrm>
+            <a:off x="1435608" y="3253232"/>
+            <a:ext cx="9957816" cy="780288"/>
           </a:xfrm>
           <a:prstGeom prst="rect">
             <a:avLst/>
@@ -12717,7 +9380,7 @@
               <a:buNone/>
             </a:pPr>
             <a:r>
-              <a:rPr lang="en-US" sz="1600" dirty="0">
+              <a:rPr lang="en-US" sz="2400" dirty="0">
                 <a:solidFill>
                   <a:srgbClr val="111827"/>
                 </a:solidFill>
@@ -12725,22 +9388,109 @@
                 <a:ea typeface="Calibri" pitchFamily="34" charset="-122"/>
                 <a:cs typeface="Calibri" pitchFamily="34" charset="-120"/>
               </a:rPr>
-              <a:t>Cross-curricular link</a:t>
-            </a:r>
-            <a:endParaRPr lang="en-US" sz="1600" dirty="0"/>
-          </a:p>
-        </p:txBody>
-      </p:sp>
-      <p:sp>
-        <p:nvSpPr>
-          <p:cNvPr id="16" name="Text 13"/>
-          <p:cNvSpPr/>
-          <p:nvPr/>
-        </p:nvSpPr>
-        <p:spPr>
-          <a:xfrm>
-            <a:off x="713232" y="4506976"/>
-            <a:ext cx="10716768" cy="520192"/>
+              <a:t>Label each change and state whether the particle gains or loses energy.</a:t>
+            </a:r>
+            <a:endParaRPr lang="en-US" sz="2400" dirty="0"/>
+          </a:p>
+        </p:txBody>
+      </p:sp>
+      <p:sp>
+        <p:nvSpPr>
+          <p:cNvPr id="19" name="Shape 16"/>
+          <p:cNvSpPr/>
+          <p:nvPr/>
+        </p:nvSpPr>
+        <p:spPr>
+          <a:xfrm>
+            <a:off x="877824" y="4191000"/>
+            <a:ext cx="10515600" cy="0"/>
+          </a:xfrm>
+          <a:prstGeom prst="line">
+            <a:avLst/>
+          </a:prstGeom>
+          <a:noFill/>
+          <a:ln w="12700">
+            <a:solidFill>
+              <a:srgbClr val="CFF6ED"/>
+            </a:solidFill>
+            <a:prstDash val="solid"/>
+          </a:ln>
+        </p:spPr>
+      </p:sp>
+      <p:sp>
+        <p:nvSpPr>
+          <p:cNvPr id="20" name="Shape 17"/>
+          <p:cNvSpPr/>
+          <p:nvPr/>
+        </p:nvSpPr>
+        <p:spPr>
+          <a:xfrm>
+            <a:off x="877824" y="4366768"/>
+            <a:ext cx="411480" cy="411480"/>
+          </a:xfrm>
+          <a:prstGeom prst="ellipse">
+            <a:avLst/>
+          </a:prstGeom>
+          <a:solidFill>
+            <a:srgbClr val="087866"/>
+          </a:solidFill>
+          <a:ln w="12700">
+            <a:solidFill>
+              <a:srgbClr val="087866"/>
+            </a:solidFill>
+            <a:prstDash val="solid"/>
+          </a:ln>
+        </p:spPr>
+      </p:sp>
+      <p:sp>
+        <p:nvSpPr>
+          <p:cNvPr id="21" name="Text 18"/>
+          <p:cNvSpPr/>
+          <p:nvPr/>
+        </p:nvSpPr>
+        <p:spPr>
+          <a:xfrm>
+            <a:off x="877824" y="4366768"/>
+            <a:ext cx="411480" cy="411480"/>
+          </a:xfrm>
+          <a:prstGeom prst="rect">
+            <a:avLst/>
+          </a:prstGeom>
+          <a:noFill/>
+          <a:ln/>
+        </p:spPr>
+        <p:txBody>
+          <a:bodyPr wrap="square" lIns="0" tIns="0" rIns="0" bIns="0" rtlCol="0" anchor="ctr"/>
+          <a:lstStyle/>
+          <a:p>
+            <a:pPr algn="ctr" indent="0" marL="0">
+              <a:buNone/>
+            </a:pPr>
+            <a:r>
+              <a:rPr lang="en-US" sz="1700" b="1" dirty="0">
+                <a:solidFill>
+                  <a:srgbClr val="FFFFFF"/>
+                </a:solidFill>
+                <a:latin typeface="Calibri" pitchFamily="34" charset="0"/>
+                <a:ea typeface="Calibri" pitchFamily="34" charset="-122"/>
+                <a:cs typeface="Calibri" pitchFamily="34" charset="-120"/>
+              </a:rPr>
+              <a:t>3</a:t>
+            </a:r>
+            <a:endParaRPr lang="en-US" sz="1700" dirty="0"/>
+          </a:p>
+        </p:txBody>
+      </p:sp>
+      <p:sp>
+        <p:nvSpPr>
+          <p:cNvPr id="22" name="Text 19"/>
+          <p:cNvSpPr/>
+          <p:nvPr/>
+        </p:nvSpPr>
+        <p:spPr>
+          <a:xfrm>
+            <a:off x="1435608" y="4348480"/>
+            <a:ext cx="9957816" cy="429768"/>
           </a:xfrm>
           <a:prstGeom prst="rect">
             <a:avLst/>
@@ -12759,7 +9509,7 @@
               <a:buNone/>
             </a:pPr>
             <a:r>
-              <a:rPr lang="en-US" sz="1600" dirty="0">
+              <a:rPr lang="en-US" sz="2400" dirty="0">
                 <a:solidFill>
                   <a:srgbClr val="111827"/>
                 </a:solidFill>
@@ -12767,9 +9517,180 @@
                 <a:ea typeface="Calibri" pitchFamily="34" charset="-122"/>
                 <a:cs typeface="Calibri" pitchFamily="34" charset="-120"/>
               </a:rPr>
-              <a:t>In Geography, compare rainfall and water availability in two climates, then explain the pattern using evaporation and condensation.</a:t>
-            </a:r>
-            <a:endParaRPr lang="en-US" sz="1600" dirty="0"/>
+              <a:t>Swap diagrams; check every arrow against the objective.</a:t>
+            </a:r>
+            <a:endParaRPr lang="en-US" sz="2400" dirty="0"/>
+          </a:p>
+        </p:txBody>
+      </p:sp>
+      <p:sp>
+        <p:nvSpPr>
+          <p:cNvPr id="23" name="Shape 20"/>
+          <p:cNvSpPr/>
+          <p:nvPr/>
+        </p:nvSpPr>
+        <p:spPr>
+          <a:xfrm>
+            <a:off x="877824" y="4935728"/>
+            <a:ext cx="10515600" cy="0"/>
+          </a:xfrm>
+          <a:prstGeom prst="line">
+            <a:avLst/>
+          </a:prstGeom>
+          <a:noFill/>
+          <a:ln w="12700">
+            <a:solidFill>
+              <a:srgbClr val="CFF6ED"/>
+            </a:solidFill>
+            <a:prstDash val="solid"/>
+          </a:ln>
+        </p:spPr>
+      </p:sp>
+      <p:sp>
+        <p:nvSpPr>
+          <p:cNvPr id="24" name="Shape 21"/>
+          <p:cNvSpPr/>
+          <p:nvPr/>
+        </p:nvSpPr>
+        <p:spPr>
+          <a:xfrm>
+            <a:off x="877824" y="5111496"/>
+            <a:ext cx="411480" cy="411480"/>
+          </a:xfrm>
+          <a:prstGeom prst="ellipse">
+            <a:avLst/>
+          </a:prstGeom>
+          <a:solidFill>
+            <a:srgbClr val="087866"/>
+          </a:solidFill>
+          <a:ln w="12700">
+            <a:solidFill>
+              <a:srgbClr val="087866"/>
+            </a:solidFill>
+            <a:prstDash val="solid"/>
+          </a:ln>
+        </p:spPr>
+      </p:sp>
+      <p:sp>
+        <p:nvSpPr>
+          <p:cNvPr id="25" name="Text 22"/>
+          <p:cNvSpPr/>
+          <p:nvPr/>
+        </p:nvSpPr>
+        <p:spPr>
+          <a:xfrm>
+            <a:off x="877824" y="5111496"/>
+            <a:ext cx="411480" cy="411480"/>
+          </a:xfrm>
+          <a:prstGeom prst="rect">
+            <a:avLst/>
+          </a:prstGeom>
+          <a:noFill/>
+          <a:ln/>
+        </p:spPr>
+        <p:txBody>
+          <a:bodyPr wrap="square" lIns="0" tIns="0" rIns="0" bIns="0" rtlCol="0" anchor="ctr"/>
+          <a:lstStyle/>
+          <a:p>
+            <a:pPr algn="ctr" indent="0" marL="0">
+              <a:buNone/>
+            </a:pPr>
+            <a:r>
+              <a:rPr lang="en-US" sz="1700" b="1" dirty="0">
+                <a:solidFill>
+                  <a:srgbClr val="FFFFFF"/>
+                </a:solidFill>
+                <a:latin typeface="Calibri" pitchFamily="34" charset="0"/>
+                <a:ea typeface="Calibri" pitchFamily="34" charset="-122"/>
+                <a:cs typeface="Calibri" pitchFamily="34" charset="-120"/>
+              </a:rPr>
+              <a:t>4</a:t>
+            </a:r>
+            <a:endParaRPr lang="en-US" sz="1700" dirty="0"/>
+          </a:p>
+        </p:txBody>
+      </p:sp>
+      <p:sp>
+        <p:nvSpPr>
+          <p:cNvPr id="26" name="Text 23"/>
+          <p:cNvSpPr/>
+          <p:nvPr/>
+        </p:nvSpPr>
+        <p:spPr>
+          <a:xfrm>
+            <a:off x="1435608" y="5093208"/>
+            <a:ext cx="9957816" cy="429768"/>
+          </a:xfrm>
+          <a:prstGeom prst="rect">
+            <a:avLst/>
+          </a:prstGeom>
+          <a:noFill/>
+          <a:ln/>
+        </p:spPr>
+        <p:txBody>
+          <a:bodyPr wrap="square" lIns="0" tIns="0" rIns="0" bIns="0" rtlCol="0" anchor="t"/>
+          <a:lstStyle/>
+          <a:p>
+            <a:pPr algn="l" indent="0" marL="0">
+              <a:lnSpc>
+                <a:spcPct val="116000"/>
+              </a:lnSpc>
+              <a:buNone/>
+            </a:pPr>
+            <a:r>
+              <a:rPr lang="en-US" sz="2400" dirty="0">
+                <a:solidFill>
+                  <a:srgbClr val="111827"/>
+                </a:solidFill>
+                <a:latin typeface="Calibri" pitchFamily="34" charset="0"/>
+                <a:ea typeface="Calibri" pitchFamily="34" charset="-122"/>
+                <a:cs typeface="Calibri" pitchFamily="34" charset="-120"/>
+              </a:rPr>
+              <a:t>Improve one explanation using particle movement.</a:t>
+            </a:r>
+            <a:endParaRPr lang="en-US" sz="2400" dirty="0"/>
+          </a:p>
+        </p:txBody>
+      </p:sp>
+      <p:sp>
+        <p:nvSpPr>
+          <p:cNvPr id="27" name="Text 24"/>
+          <p:cNvSpPr/>
+          <p:nvPr/>
+        </p:nvSpPr>
+        <p:spPr>
+          <a:xfrm>
+            <a:off x="877824" y="5650992"/>
+            <a:ext cx="10515600" cy="365760"/>
+          </a:xfrm>
+          <a:prstGeom prst="rect">
+            <a:avLst/>
+          </a:prstGeom>
+          <a:noFill/>
+          <a:ln/>
+        </p:spPr>
+        <p:txBody>
+          <a:bodyPr wrap="square" lIns="0" tIns="0" rIns="0" bIns="0" rtlCol="0" anchor="t"/>
+          <a:lstStyle/>
+          <a:p>
+            <a:pPr algn="l" indent="0" marL="0">
+              <a:lnSpc>
+                <a:spcPct val="116000"/>
+              </a:lnSpc>
+              <a:buNone/>
+            </a:pPr>
+            <a:r>
+              <a:rPr lang="en-US" sz="1700" b="1" dirty="0">
+                <a:solidFill>
+                  <a:srgbClr val="111827"/>
+                </a:solidFill>
+                <a:latin typeface="Calibri" pitchFamily="34" charset="0"/>
+                <a:ea typeface="Calibri" pitchFamily="34" charset="-122"/>
+                <a:cs typeface="Calibri" pitchFamily="34" charset="-120"/>
+              </a:rPr>
+              <a:t>Final check: why is this a cycle rather than a one-way path?</a:t>
+            </a:r>
+            <a:endParaRPr lang="en-US" sz="1700" dirty="0"/>
           </a:p>
         </p:txBody>
       </p:sp>
